--- a/2026-Q4/07-FaithTests/Week07-FaithTestsAcrossCovenants.pptx
+++ b/2026-Q4/07-FaithTests/Week07-FaithTestsAcrossCovenants.pptx
@@ -4,6 +4,9 @@
   <p:sldMasterIdLst>
     <p:sldMasterId id="2147483648" r:id="rId1"/>
   </p:sldMasterIdLst>
+  <p:notesMasterIdLst>
+    <p:notesMasterId r:id="rId9"/>
+  </p:notesMasterIdLst>
   <p:sldIdLst>
     <p:sldId id="256" r:id="rId2"/>
     <p:sldId id="257" r:id="rId3"/>
@@ -13,10 +16,7 @@
     <p:sldId id="261" r:id="rId7"/>
     <p:sldId id="262" r:id="rId8"/>
   </p:sldIdLst>
-  <p:notesMasterIdLst>
-    <p:notesMasterId r:id="rId9"/>
-  </p:notesMasterIdLst>
-  <p:sldSz cx="9144000" cy="6858000"/>
+  <p:sldSz cx="9144000" cy="6858000" type="screen4x3"/>
   <p:notesSz cx="6858000" cy="9144000"/>
   <p:defaultTextStyle>
     <a:lvl1pPr marL="0" algn="l" defTabSz="914400" rtl="0" eaLnBrk="1" latinLnBrk="0" hangingPunct="1">
@@ -110,6 +110,11 @@
       </a:defRPr>
     </a:lvl9pPr>
   </p:defaultTextStyle>
+  <p:extLst>
+    <p:ext uri="{EFAFB233-063F-42B5-8137-9DF3F51BA10A}">
+      <p15:sldGuideLst xmlns:p15="http://schemas.microsoft.com/office/powerpoint/2012/main"/>
+    </p:ext>
+  </p:extLst>
 </p:presentation>
 </file>
 
@@ -135,234 +140,10 @@
           <a:chExt cx="0" cy="0"/>
         </a:xfrm>
       </p:grpSpPr>
-      <p:sp>
-        <p:nvSpPr>
-          <p:cNvPr id="2" name="Header Placeholder 1"/>
-          <p:cNvSpPr>
-            <a:spLocks noGrp="1"/>
-          </p:cNvSpPr>
-          <p:nvPr>
-            <p:ph type="hdr" sz="quarter"/>
-          </p:nvPr>
-        </p:nvSpPr>
-        <p:spPr>
-          <a:xfrm>
-            <a:off x="0" y="0"/>
-            <a:ext cx="2971800" cy="458788"/>
-          </a:xfrm>
-          <a:prstGeom prst="rect">
-            <a:avLst/>
-          </a:prstGeom>
-        </p:spPr>
-        <p:txBody>
-          <a:bodyPr vert="horz" lIns="91440" tIns="45720" rIns="91440" bIns="45720" rtlCol="0"/>
-          <a:lstStyle>
-            <a:lvl1pPr algn="l">
-              <a:defRPr sz="1200"/>
-            </a:lvl1pPr>
-          </a:lstStyle>
-          <a:p>
-            <a:endParaRPr lang="en-US"/>
-          </a:p>
-        </p:txBody>
-      </p:sp>
-      <p:sp>
-        <p:nvSpPr>
-          <p:cNvPr id="3" name="Date Placeholder 2"/>
-          <p:cNvSpPr>
-            <a:spLocks noGrp="1"/>
-          </p:cNvSpPr>
-          <p:nvPr>
-            <p:ph type="dt" idx="1"/>
-          </p:nvPr>
-        </p:nvSpPr>
-        <p:spPr>
-          <a:xfrm>
-            <a:off x="3884613" y="0"/>
-            <a:ext cx="2971800" cy="458788"/>
-          </a:xfrm>
-          <a:prstGeom prst="rect">
-            <a:avLst/>
-          </a:prstGeom>
-        </p:spPr>
-        <p:txBody>
-          <a:bodyPr vert="horz" lIns="91440" tIns="45720" rIns="91440" bIns="45720" rtlCol="0"/>
-          <a:lstStyle>
-            <a:lvl1pPr algn="r">
-              <a:defRPr sz="1200"/>
-            </a:lvl1pPr>
-          </a:lstStyle>
-          <a:p>
-            <a:fld id="{5282F153-3F37-0F45-9E97-73ACFA13230C}" type="datetimeFigureOut">
-              <a:rPr lang="en-US"/>
-              <a:t>7/23/19</a:t>
-            </a:fld>
-            <a:endParaRPr lang="en-US"/>
-          </a:p>
-        </p:txBody>
-      </p:sp>
-      <p:sp>
-        <p:nvSpPr>
-          <p:cNvPr id="4" name="Slide Image Placeholder 3"/>
-          <p:cNvSpPr>
-            <a:spLocks noGrp="1" noRot="1" noChangeAspect="1"/>
-          </p:cNvSpPr>
-          <p:nvPr>
-            <p:ph type="sldImg" idx="2"/>
-          </p:nvPr>
-        </p:nvSpPr>
-        <p:spPr>
-          <a:xfrm>
-            <a:off x="685800" y="1143000"/>
-            <a:ext cx="5486400" cy="3086100"/>
-          </a:xfrm>
-          <a:prstGeom prst="rect">
-            <a:avLst/>
-          </a:prstGeom>
-          <a:noFill/>
-          <a:ln w="12700">
-            <a:solidFill>
-              <a:prstClr val="black"/>
-            </a:solidFill>
-          </a:ln>
-        </p:spPr>
-        <p:txBody>
-          <a:bodyPr vert="horz" lIns="91440" tIns="45720" rIns="91440" bIns="45720" rtlCol="0" anchor="ctr"/>
-          <a:lstStyle/>
-          <a:p>
-            <a:endParaRPr lang="en-US"/>
-          </a:p>
-        </p:txBody>
-      </p:sp>
-      <p:sp>
-        <p:nvSpPr>
-          <p:cNvPr id="5" name="Notes Placeholder 4"/>
-          <p:cNvSpPr>
-            <a:spLocks noGrp="1"/>
-          </p:cNvSpPr>
-          <p:nvPr>
-            <p:ph type="body" sz="quarter" idx="3"/>
-          </p:nvPr>
-        </p:nvSpPr>
-        <p:spPr>
-          <a:xfrm>
-            <a:off x="685800" y="4400550"/>
-            <a:ext cx="5486400" cy="3600450"/>
-          </a:xfrm>
-          <a:prstGeom prst="rect">
-            <a:avLst/>
-          </a:prstGeom>
-        </p:spPr>
-        <p:txBody>
-          <a:bodyPr vert="horz" lIns="91440" tIns="45720" rIns="91440" bIns="45720" rtlCol="0"/>
-          <a:lstStyle/>
-          <a:p>
-            <a:pPr lvl="0"/>
-            <a:r>
-              <a:rPr lang="en-US"/>
-              <a:t>Click to edit Master text styles</a:t>
-            </a:r>
-          </a:p>
-          <a:p>
-            <a:pPr lvl="1"/>
-            <a:r>
-              <a:rPr lang="en-US"/>
-              <a:t>Second level</a:t>
-            </a:r>
-          </a:p>
-          <a:p>
-            <a:pPr lvl="2"/>
-            <a:r>
-              <a:rPr lang="en-US"/>
-              <a:t>Third level</a:t>
-            </a:r>
-          </a:p>
-          <a:p>
-            <a:pPr lvl="3"/>
-            <a:r>
-              <a:rPr lang="en-US"/>
-              <a:t>Fourth level</a:t>
-            </a:r>
-          </a:p>
-          <a:p>
-            <a:pPr lvl="4"/>
-            <a:r>
-              <a:rPr lang="en-US"/>
-              <a:t>Fifth level</a:t>
-            </a:r>
-          </a:p>
-        </p:txBody>
-      </p:sp>
-      <p:sp>
-        <p:nvSpPr>
-          <p:cNvPr id="6" name="Footer Placeholder 5"/>
-          <p:cNvSpPr>
-            <a:spLocks noGrp="1"/>
-          </p:cNvSpPr>
-          <p:nvPr>
-            <p:ph type="ftr" sz="quarter" idx="4"/>
-          </p:nvPr>
-        </p:nvSpPr>
-        <p:spPr>
-          <a:xfrm>
-            <a:off x="0" y="8685213"/>
-            <a:ext cx="2971800" cy="458787"/>
-          </a:xfrm>
-          <a:prstGeom prst="rect">
-            <a:avLst/>
-          </a:prstGeom>
-        </p:spPr>
-        <p:txBody>
-          <a:bodyPr vert="horz" lIns="91440" tIns="45720" rIns="91440" bIns="45720" rtlCol="0" anchor="b"/>
-          <a:lstStyle>
-            <a:lvl1pPr algn="l">
-              <a:defRPr sz="1200"/>
-            </a:lvl1pPr>
-          </a:lstStyle>
-          <a:p>
-            <a:endParaRPr lang="en-US"/>
-          </a:p>
-        </p:txBody>
-      </p:sp>
-      <p:sp>
-        <p:nvSpPr>
-          <p:cNvPr id="7" name="Slide Number Placeholder 6"/>
-          <p:cNvSpPr>
-            <a:spLocks noGrp="1"/>
-          </p:cNvSpPr>
-          <p:nvPr>
-            <p:ph type="sldNum" sz="quarter" idx="5"/>
-          </p:nvPr>
-        </p:nvSpPr>
-        <p:spPr>
-          <a:xfrm>
-            <a:off x="3884613" y="8685213"/>
-            <a:ext cx="2971800" cy="458787"/>
-          </a:xfrm>
-          <a:prstGeom prst="rect">
-            <a:avLst/>
-          </a:prstGeom>
-        </p:spPr>
-        <p:txBody>
-          <a:bodyPr vert="horz" lIns="91440" tIns="45720" rIns="91440" bIns="45720" rtlCol="0" anchor="b"/>
-          <a:lstStyle>
-            <a:lvl1pPr algn="r">
-              <a:defRPr sz="1200"/>
-            </a:lvl1pPr>
-          </a:lstStyle>
-          <a:p>
-            <a:fld id="{CE5E9CC1-C706-0F49-92D6-E571CC5EEA8F}" type="slidenum">
-              <a:rPr lang="en-US"/>
-              <a:t>‹#›</a:t>
-            </a:fld>
-            <a:endParaRPr lang="en-US"/>
-          </a:p>
-        </p:txBody>
-      </p:sp>
     </p:spTree>
     <p:extLst>
       <p:ext uri="{BB962C8B-B14F-4D97-AF65-F5344CB8AC3E}">
-        <p14:creationId xmlns:p14="http://schemas.microsoft.com/office/powerpoint/2010/main" val="1024086991"/>
+        <p14:creationId xmlns:p14="http://schemas.microsoft.com/office/powerpoint/2010/main" val="2981331101"/>
       </p:ext>
     </p:extLst>
   </p:cSld>
@@ -508,9 +289,16 @@
           <a:p>
             <a:r>
               <a:rPr lang="en-US" dirty="0"/>
-              <a:t>[0:00] Unit III opens. Reassure immediately, because “testing” can sound like earning after four weeks of grace: “We are not undoing Week 4. Every test we look at today comes AFTER the rescue, never before it. Grace saves; testing proves.” Point at Deut 8:2 — that is the thesis verse of the whole unit.</a:t>
-            </a:r>
-            <a:endParaRPr lang="en-US" dirty="0"/>
+              <a:t>[0:00] Unit III opens. Reassure immediately, because “testing” can sound like earning after four weeks of grace: “We are not undoing Week 4. Every test we look at today comes AFTER the rescue, never before it. Grace saves; testing proves.” Point at Deut 8:2 </a:t>
+            </a:r>
+            <a:r>
+              <a:rPr lang="en-US"/>
+              <a:t>→</a:t>
+            </a:r>
+            <a:r>
+              <a:rPr lang="en-US" dirty="0"/>
+              <a:t> that is the thesis verse of the whole unit.</a:t>
+            </a:r>
           </a:p>
         </p:txBody>
       </p:sp>
@@ -597,12 +385,51 @@
             <a:r>
               <a:rPr lang="en-US" dirty="0"/>
               <a:t>[0:00–8:00]
-[CLICK] GOD TESTS — the vocabulary. nasah = prove (Gen 22:1); bachan = assay metal (Prov 17:3). dokimazo = test to APPROVE (the goldsmith wants the gold to pass). God’s testing is FOR you.
-[CLICK] SATAN TEMPTS — same Greek word peirazo, opposite aim. He wants the failure. The word is neutral; the intent is not.
-[CLICK] Same event, two sides — Job and Peter are the proof texts. God permits what Satan intends for ruin, and turns it to proving. Luke 22: “I have prayed for you that your faith may not fail.”
-[CLICK] James 1:13 — the guardrail. God never solicits evil. Then land the unit’s thesis: a test is the scheduled occasion of sacrifice (ties Unit III back to Unit I). Transition: “With that, walk the whole Bible — every covenant has its tests.”</a:t>
-            </a:r>
-            <a:endParaRPr lang="en-US" dirty="0"/>
+[CLICK] GOD TESTS </a:t>
+            </a:r>
+            <a:r>
+              <a:rPr lang="en-US"/>
+              <a:t>→ </a:t>
+            </a:r>
+            <a:r>
+              <a:rPr lang="en-US" dirty="0"/>
+              <a:t>the vocabulary. nasah = prove (Gen 22:1); bachan = assay metal (Prov 17:3). dokimazo = test to APPROVE (the goldsmith wants the gold to pass). God’s testing is FOR you.
+[CLICK] SATAN TEMPTS </a:t>
+            </a:r>
+            <a:r>
+              <a:rPr lang="en-US"/>
+              <a:t>→ </a:t>
+            </a:r>
+            <a:r>
+              <a:rPr lang="en-US" dirty="0"/>
+              <a:t>same Greek word peirazo, opposite aim. He wants the failure. The word is neutral; the intent is not.
+[CLICK] Same event, two sides </a:t>
+            </a:r>
+            <a:r>
+              <a:rPr lang="en-US"/>
+              <a:t>→ </a:t>
+            </a:r>
+            <a:r>
+              <a:rPr lang="en-US" dirty="0"/>
+              <a:t>Job and Peter are the proof texts. God permits what Satan intends for ruin, and turns it to proving. Luke 22: “I have prayed for you that your faith may not fail.”
+[CLICK] James 1:13 </a:t>
+            </a:r>
+            <a:r>
+              <a:rPr lang="en-US"/>
+              <a:t>→ </a:t>
+            </a:r>
+            <a:r>
+              <a:rPr lang="en-US" dirty="0"/>
+              <a:t>the guardrail. God never solicits evil. Then land the unit’s thesis: a test is the scheduled occasion of sacrifice (ties Unit III back to Unit I). Transition: “With that, walk the whole Bible </a:t>
+            </a:r>
+            <a:r>
+              <a:rPr lang="en-US"/>
+              <a:t>→</a:t>
+            </a:r>
+            <a:r>
+              <a:rPr lang="en-US" dirty="0"/>
+              <a:t> every covenant has its tests.”</a:t>
+            </a:r>
           </a:p>
         </p:txBody>
       </p:sp>
@@ -688,16 +515,87 @@
           <a:p>
             <a:r>
               <a:rPr lang="en-US" dirty="0"/>
-              <a:t>[8:00–30:00 — ~4 min per era; table visible whole so the PATTERN is seen at a glance]
+              <a:t>[8:00–30:00 </a:t>
+            </a:r>
+            <a:r>
+              <a:rPr lang="en-US"/>
+              <a:t>→ </a:t>
+            </a:r>
+            <a:r>
+              <a:rPr lang="en-US" dirty="0"/>
+              <a:t>~4 min per era; table visible whole so the PATTERN is seen at a glance]
 Walk row by row:
-• EDEN — the genius of it: the command cost almost nothing to keep (one tree among many). That is what makes it PURE — the only reason to obey was that God said so. Trust, naked.
-• NOAH — Heb 11:7 “things not yet seen.” Decades of labor, ridicule, no rain. Faith across a 120-year gap.
-• ABRAHAM — first time Scripture says “tested” (Gen 22:1). We studied Moriah in Week 2; now see it as the paradigm TEST. Surrender the promise itself.
-• MOSES — the shift: testing becomes stated POLICY. Manna was a daily test (gather right, rest on Sabbath). Deut 8:2 is our thesis verse. Deut 13:3 — even false prophets are a test of love for God.
-• HEZEKIAH — the sobering one, saved for the discussion. God “left him alone to know his true motives.” 39 faithful years, then withdrawal reveals pride. Set up Q2 here but don’t exhaust it.
-[note] The takeaway — read last. Transition: “Every one of these humans was tested. Only One passed perfectly.”</a:t>
-            </a:r>
-            <a:endParaRPr lang="en-US" dirty="0"/>
+• EDEN </a:t>
+            </a:r>
+            <a:r>
+              <a:rPr lang="en-US"/>
+              <a:t>→ </a:t>
+            </a:r>
+            <a:r>
+              <a:rPr lang="en-US" dirty="0"/>
+              <a:t>the genius of it: the command cost almost nothing to keep (one tree among many). That is what makes it PURE </a:t>
+            </a:r>
+            <a:r>
+              <a:rPr lang="en-US"/>
+              <a:t>→ </a:t>
+            </a:r>
+            <a:r>
+              <a:rPr lang="en-US" dirty="0"/>
+              <a:t>the only reason to obey was that God said so. Trust, naked.
+• NOAH </a:t>
+            </a:r>
+            <a:r>
+              <a:rPr lang="en-US"/>
+              <a:t>→ </a:t>
+            </a:r>
+            <a:r>
+              <a:rPr lang="en-US" dirty="0"/>
+              <a:t>Heb 11:7 “things not yet seen.” Decades of labor, ridicule, no rain. Faith across a 120-year gap.
+• ABRAHAM </a:t>
+            </a:r>
+            <a:r>
+              <a:rPr lang="en-US"/>
+              <a:t>→ </a:t>
+            </a:r>
+            <a:r>
+              <a:rPr lang="en-US" dirty="0"/>
+              <a:t>first time Scripture says “tested” (Gen 22:1). We studied Moriah in Week 2; now see it as the paradigm TEST. Surrender the promise itself.
+• MOSES </a:t>
+            </a:r>
+            <a:r>
+              <a:rPr lang="en-US"/>
+              <a:t>→ </a:t>
+            </a:r>
+            <a:r>
+              <a:rPr lang="en-US" dirty="0"/>
+              <a:t>the shift: testing becomes stated POLICY. Manna was a daily test (gather right, rest on Sabbath). Deut 8:2 is our thesis verse. Deut 13:3 </a:t>
+            </a:r>
+            <a:r>
+              <a:rPr lang="en-US"/>
+              <a:t>→ </a:t>
+            </a:r>
+            <a:r>
+              <a:rPr lang="en-US" dirty="0"/>
+              <a:t>even false prophets are a test of love for God.
+• HEZEKIAH </a:t>
+            </a:r>
+            <a:r>
+              <a:rPr lang="en-US"/>
+              <a:t>→ </a:t>
+            </a:r>
+            <a:r>
+              <a:rPr lang="en-US" dirty="0"/>
+              <a:t>the sobering one, saved for the discussion. God “left him alone to know his true motives.” 39 faithful years, then withdrawal reveals pride. Set up Q2 here but don’t exhaust it.
+[note] The takeaway </a:t>
+            </a:r>
+            <a:r>
+              <a:rPr lang="en-US"/>
+              <a:t>→</a:t>
+            </a:r>
+            <a:r>
+              <a:rPr lang="en-US" dirty="0"/>
+              <a:t> read last. Transition: “Every one of these humans was tested. Only One passed perfectly.”</a:t>
+            </a:r>
           </a:p>
         </p:txBody>
       </p:sp>
@@ -784,12 +682,59 @@
             <a:r>
               <a:rPr lang="en-US" dirty="0"/>
               <a:t>[30:00–40:00]
-[CLICK] Matt 4:1–2 — note who leads him IN: the Spirit. This test is God-ordained, Satan-administered. Forty days is not random — it echoes forty years.
-[CLICK] The parallel box — this is the payoff. Israel: 40 years, failed. Jesus: 40 days, passed. And every reply is from Deut 6–8, the wilderness-testing passages. He is re-taking the exam Israel flunked, on our behalf, as the true Son. Walk the three quotes.
-[CLICK] The true-Israel point — Heb 4:15 seals it: fully tested, never failed.
-[CLICK] Heb 5:8–9 — the hinge of the whole unit. He LEARNED obedience through suffering (not learned-to-obey from disobedience — he learned experientially what obedience costs), was perfected (completed, matured as our pioneer), and became salvation’s source for all who OBEY him. That last phrase bridges into the church’s tests next week. Transition: “So where does that leave OUR tests?”</a:t>
-            </a:r>
-            <a:endParaRPr lang="en-US" dirty="0"/>
+[CLICK] Matt 4:1–2 </a:t>
+            </a:r>
+            <a:r>
+              <a:rPr lang="en-US"/>
+              <a:t>→ </a:t>
+            </a:r>
+            <a:r>
+              <a:rPr lang="en-US" dirty="0"/>
+              <a:t>note who leads him IN: the Spirit. This test is God-ordained, Satan-administered. Forty days is not random </a:t>
+            </a:r>
+            <a:r>
+              <a:rPr lang="en-US"/>
+              <a:t>→ </a:t>
+            </a:r>
+            <a:r>
+              <a:rPr lang="en-US" dirty="0"/>
+              <a:t>it echoes forty years.
+[CLICK] The parallel box </a:t>
+            </a:r>
+            <a:r>
+              <a:rPr lang="en-US"/>
+              <a:t>→ </a:t>
+            </a:r>
+            <a:r>
+              <a:rPr lang="en-US" dirty="0"/>
+              <a:t>this is the payoff. Israel: 40 years, failed. Jesus: 40 days, passed. And every reply is from Deut 6–8, the wilderness-testing passages. He is re-taking the exam Israel flunked, on our behalf, as the true Son. Walk the three quotes.
+[CLICK] The true-Israel point </a:t>
+            </a:r>
+            <a:r>
+              <a:rPr lang="en-US"/>
+              <a:t>→ </a:t>
+            </a:r>
+            <a:r>
+              <a:rPr lang="en-US" dirty="0"/>
+              <a:t>Heb 4:15 seals it: fully tested, never failed.
+[CLICK] Heb 5:8–9 </a:t>
+            </a:r>
+            <a:r>
+              <a:rPr lang="en-US"/>
+              <a:t>→ </a:t>
+            </a:r>
+            <a:r>
+              <a:rPr lang="en-US" dirty="0"/>
+              <a:t>the hinge of the whole unit. He LEARNED obedience through suffering (not learned-to-obey from disobedience </a:t>
+            </a:r>
+            <a:r>
+              <a:rPr lang="en-US"/>
+              <a:t>→</a:t>
+            </a:r>
+            <a:r>
+              <a:rPr lang="en-US" dirty="0"/>
+              <a:t> he learned experientially what obedience costs), was perfected (completed, matured as our pioneer), and became salvation’s source for all who OBEY him. That last phrase bridges into the church’s tests next week. Transition: “So where does that leave OUR tests?”</a:t>
+            </a:r>
           </a:p>
         </p:txBody>
       </p:sp>
@@ -876,12 +821,43 @@
             <a:r>
               <a:rPr lang="en-US" dirty="0"/>
               <a:t>[40:00–45:00]
-[CLICK] The hinge stated plainly — proving, not probation. A student who has already passed still does the exercises; they build strength, they don’t determine enrollment.
-[CLICK] Exodus order — the Week 4 keystone, now doing its Unit-III job. Redeemed FIRST, tested SECOND. This is what keeps the whole testing unit from becoming a ladder.
-[CLICK] James 1 / 1 Pet 1 — you can only call a test “joy” if it isn’t deciding your salvation. Refining fire assumes the gold is already yours.
-[CLICK] The banner — the unit’s motto. Grace saves, testing proves. Say it, then to discussion.</a:t>
-            </a:r>
-            <a:endParaRPr lang="en-US" dirty="0"/>
+[CLICK] The hinge stated plainly </a:t>
+            </a:r>
+            <a:r>
+              <a:rPr lang="en-US"/>
+              <a:t>→ </a:t>
+            </a:r>
+            <a:r>
+              <a:rPr lang="en-US" dirty="0"/>
+              <a:t>proving, not probation. A student who has already passed still does the exercises; they build strength, they don’t determine enrollment.
+[CLICK] Exodus order </a:t>
+            </a:r>
+            <a:r>
+              <a:rPr lang="en-US"/>
+              <a:t>→ </a:t>
+            </a:r>
+            <a:r>
+              <a:rPr lang="en-US" dirty="0"/>
+              <a:t>the Week 4 keystone, now doing its Unit-III job. Redeemed FIRST, tested SECOND. This is what keeps the whole testing unit from becoming a ladder.
+[CLICK] James 1 / 1 Pet 1 </a:t>
+            </a:r>
+            <a:r>
+              <a:rPr lang="en-US"/>
+              <a:t>→ </a:t>
+            </a:r>
+            <a:r>
+              <a:rPr lang="en-US" dirty="0"/>
+              <a:t>you can only call a test “joy” if it isn’t deciding your salvation. Refining fire assumes the gold is already yours.
+[CLICK] The banner </a:t>
+            </a:r>
+            <a:r>
+              <a:rPr lang="en-US"/>
+              <a:t>→</a:t>
+            </a:r>
+            <a:r>
+              <a:rPr lang="en-US" dirty="0"/>
+              <a:t> the unit’s motto. Grace saves, testing proves. Say it, then to discussion.</a:t>
+            </a:r>
           </a:p>
         </p:txBody>
       </p:sp>
@@ -968,11 +944,42 @@
             <a:r>
               <a:rPr lang="en-US" dirty="0"/>
               <a:t>[45:00–55:00]
-Q1: The classic answer — the test is not for God’s information (Ps 139) but to make faith REAL and VISIBLE: to the person (self-knowledge — Deut 8:2 “to know what was in your heart”), to a watching world, and as an actual event on the record. God knows the gold is gold; the fire still turns latent into manifest. Tie to Week 1: devotion is invisible until tested.
-Q2: The tender, personal one. Hezekiah’s 39 years didn’t surface the pride; ONE withdrawal did (the Babylonian envoys, showing off his treasure). Felt divine absence can BE the test — what leaks out when God seems quiet? Seasons of silence are not always discipline or abandonment; sometimes they are the exam. Handle gently — some are IN such a season now.
+Q1: The classic answer </a:t>
+            </a:r>
+            <a:r>
+              <a:rPr lang="en-US"/>
+              <a:t>→ </a:t>
+            </a:r>
+            <a:r>
+              <a:rPr lang="en-US" dirty="0"/>
+              <a:t>the test is not for God’s information (Ps 139) but to make faith REAL and VISIBLE: to the person (self-knowledge </a:t>
+            </a:r>
+            <a:r>
+              <a:rPr lang="en-US"/>
+              <a:t>→ </a:t>
+            </a:r>
+            <a:r>
+              <a:rPr lang="en-US" dirty="0"/>
+              <a:t>Deut 8:2 “to know what was in your heart”), to a watching world, and as an actual event on the record. God knows the gold is gold; the fire still turns latent into manifest. Tie to Week 1: devotion is invisible until tested.
+Q2: The tender, personal one. Hezekiah’s 39 years didn’t surface the pride; ONE withdrawal did (the Babylonian envoys, showing off his treasure). Felt divine absence can BE the test </a:t>
+            </a:r>
+            <a:r>
+              <a:rPr lang="en-US"/>
+              <a:t>→ </a:t>
+            </a:r>
+            <a:r>
+              <a:rPr lang="en-US" dirty="0"/>
+              <a:t>what leaks out when God seems quiet? Seasons of silence are not always discipline or abandonment; sometimes they are the exam. Handle gently </a:t>
+            </a:r>
+            <a:r>
+              <a:rPr lang="en-US"/>
+              <a:t>→</a:t>
+            </a:r>
+            <a:r>
+              <a:rPr lang="en-US" dirty="0"/>
+              <a:t> some are IN such a season now.
 [CLICK] Ground rule.</a:t>
             </a:r>
-            <a:endParaRPr lang="en-US" dirty="0"/>
           </a:p>
         </p:txBody>
       </p:sp>
@@ -1059,12 +1066,27 @@
             <a:r>
               <a:rPr lang="en-US" dirty="0"/>
               <a:t>[55:00 close, ~2 min]
-[CLICK] Next week’s reading — the pivot from covenant tests in general to the CHURCH’s specific tests. Both flags (“what shall we do” / “examine”) preview entry-test and recurring-test.
+[CLICK] Next week’s reading </a:t>
+            </a:r>
+            <a:r>
+              <a:rPr lang="en-US"/>
+              <a:t>→ </a:t>
+            </a:r>
+            <a:r>
+              <a:rPr lang="en-US" dirty="0"/>
+              <a:t>the pivot from covenant tests in general to the CHURCH’s specific tests. Both flags (“what shall we do” / “examine”) preview entry-test and recurring-test.
 [CLICK] Preview Week 8.
-[CLICK] Carry sentence — say it together.
+[CLICK] Carry sentence </a:t>
+            </a:r>
+            <a:r>
+              <a:rPr lang="en-US"/>
+              <a:t>→</a:t>
+            </a:r>
+            <a:r>
+              <a:rPr lang="en-US" dirty="0"/>
+              <a:t> say it together.
 [CLICK] Close on Heb 5:9, which sets up next week’s “all who obey him.” Dismiss on time.</a:t>
             </a:r>
-            <a:endParaRPr lang="en-US" dirty="0"/>
           </a:p>
         </p:txBody>
       </p:sp>
@@ -1137,6 +1159,11 @@
 <file path=ppt/slideMasters/slideMaster1.xml><?xml version="1.0" encoding="utf-8"?>
 <p:sldMaster xmlns:a="http://schemas.openxmlformats.org/drawingml/2006/main" xmlns:r="http://schemas.openxmlformats.org/officeDocument/2006/relationships" xmlns:p="http://schemas.openxmlformats.org/presentationml/2006/main">
   <p:cSld>
+    <p:bg>
+      <p:bgRef idx="1001">
+        <a:schemeClr val="bg1"/>
+      </p:bgRef>
+    </p:bg>
     <p:spTree>
       <p:nvGrpSpPr>
         <p:cNvPr id="1" name=""/>
@@ -1449,7 +1476,7 @@
           <a:bodyPr wrap="square" lIns="0" tIns="0" rIns="0" bIns="0" rtlCol="0" anchor="t"/>
           <a:lstStyle/>
           <a:p>
-            <a:pPr algn="ctr" indent="0" marL="0">
+            <a:pPr marL="0" indent="0" algn="ctr">
               <a:buNone/>
             </a:pPr>
             <a:r>
@@ -1461,7 +1488,7 @@
                 <a:ea typeface="Arial" pitchFamily="34" charset="-122"/>
                 <a:cs typeface="Arial" pitchFamily="34" charset="-120"/>
               </a:rPr>
-              <a:t>The Obedience of Faith — Week 7  ·  Unit III: Testing</a:t>
+              <a:t>The Obedience of Faith - Week 7  ·  Unit III: Testing</a:t>
             </a:r>
             <a:endParaRPr lang="en-US" sz="1600" dirty="0"/>
           </a:p>
@@ -1488,7 +1515,7 @@
           <a:bodyPr wrap="square" lIns="0" tIns="0" rIns="0" bIns="0" rtlCol="0" anchor="t"/>
           <a:lstStyle/>
           <a:p>
-            <a:pPr algn="ctr" indent="0" marL="0">
+            <a:pPr marL="0" indent="0" algn="ctr">
               <a:buNone/>
             </a:pPr>
             <a:r>
@@ -1527,7 +1554,7 @@
           <a:bodyPr wrap="square" lIns="0" tIns="0" rIns="0" bIns="0" rtlCol="0" anchor="t"/>
           <a:lstStyle/>
           <a:p>
-            <a:pPr algn="ctr" indent="0" marL="0">
+            <a:pPr marL="0" indent="0" algn="ctr">
               <a:buNone/>
             </a:pPr>
             <a:r>
@@ -1539,7 +1566,30 @@
                 <a:ea typeface="Arial" pitchFamily="34" charset="-122"/>
                 <a:cs typeface="Arial" pitchFamily="34" charset="-120"/>
               </a:rPr>
-              <a:t>In every era, God tests faith — and always on the far side of grace</a:t>
+              <a:t>In every era, God tests faith </a:t>
+            </a:r>
+            <a:r>
+              <a:rPr lang="en-US" sz="1900" b="1" i="1" dirty="0">
+                <a:solidFill>
+                  <a:srgbClr val="1F497D"/>
+                </a:solidFill>
+                <a:latin typeface="Arial" pitchFamily="34" charset="0"/>
+                <a:ea typeface="Arial" pitchFamily="34" charset="-122"/>
+                <a:cs typeface="Arial" pitchFamily="34" charset="-120"/>
+                <a:sym typeface="Wingdings" pitchFamily="2" charset="2"/>
+              </a:rPr>
+              <a:t></a:t>
+            </a:r>
+            <a:r>
+              <a:rPr lang="en-US" sz="1900" b="1" i="1" dirty="0">
+                <a:solidFill>
+                  <a:srgbClr val="1F497D"/>
+                </a:solidFill>
+                <a:latin typeface="Arial" pitchFamily="34" charset="0"/>
+                <a:ea typeface="Arial" pitchFamily="34" charset="-122"/>
+                <a:cs typeface="Arial" pitchFamily="34" charset="-120"/>
+              </a:rPr>
+              <a:t> and always on the far side of grace</a:t>
             </a:r>
             <a:endParaRPr lang="en-US" sz="1600" dirty="0"/>
           </a:p>
@@ -1566,11 +1616,11 @@
           <a:bodyPr wrap="square" lIns="0" tIns="0" rIns="0" bIns="0" rtlCol="0" anchor="t"/>
           <a:lstStyle/>
           <a:p>
-            <a:pPr algn="ctr" indent="0" marL="0">
+            <a:pPr marL="0" indent="0" algn="ctr">
               <a:buNone/>
             </a:pPr>
             <a:r>
-              <a:rPr lang="en-US" sz="1800" i="1" dirty="0">
+              <a:rPr lang="en-US" sz="2000" i="1" dirty="0">
                 <a:solidFill>
                   <a:srgbClr val="000000"/>
                 </a:solidFill>
@@ -1580,55 +1630,52 @@
               </a:rPr>
               <a:t>“Remember… how he brought you these forty years through the desert so that he might, by humbling you, test you to see if you have it within you to keep his commandments.”</a:t>
             </a:r>
-            <a:pPr algn="ctr" indent="0" marL="0">
+            <a:endParaRPr lang="en-US" dirty="0"/>
+          </a:p>
+          <a:p>
+            <a:pPr marL="0" indent="0" algn="ctr">
               <a:buNone/>
             </a:pPr>
-            <a:endParaRPr lang="en-US" sz="1600" dirty="0"/>
-          </a:p>
-          <a:p>
-            <a:pPr algn="ctr" indent="0" marL="0">
+            <a:r>
+              <a:rPr lang="en-US" dirty="0">
+                <a:solidFill>
+                  <a:srgbClr val="000000"/>
+                </a:solidFill>
+                <a:latin typeface="Arial" pitchFamily="34" charset="0"/>
+                <a:ea typeface="Arial" pitchFamily="34" charset="-122"/>
+                <a:cs typeface="Arial" pitchFamily="34" charset="-120"/>
+              </a:rPr>
+              <a:t>(Deuteronomy 8:2)</a:t>
+            </a:r>
+            <a:endParaRPr lang="en-US" dirty="0"/>
+          </a:p>
+        </p:txBody>
+      </p:sp>
+      <p:sp>
+        <p:nvSpPr>
+          <p:cNvPr id="6" name="t4"/>
+          <p:cNvSpPr txBox="1"/>
+          <p:nvPr/>
+        </p:nvSpPr>
+        <p:spPr>
+          <a:xfrm>
+            <a:off x="914400" y="4846320"/>
+            <a:ext cx="7315200" cy="457200"/>
+          </a:xfrm>
+          <a:prstGeom prst="rect">
+            <a:avLst/>
+          </a:prstGeom>
+          <a:noFill/>
+          <a:ln/>
+        </p:spPr>
+        <p:txBody>
+          <a:bodyPr wrap="square" lIns="0" tIns="0" rIns="0" bIns="0" rtlCol="0" anchor="t"/>
+          <a:lstStyle/>
+          <a:p>
+            <a:pPr marL="0" indent="0" algn="ctr">
               <a:buNone/>
             </a:pPr>
             <a:r>
-              <a:rPr lang="en-US" sz="1700" dirty="0">
-                <a:solidFill>
-                  <a:srgbClr val="000000"/>
-                </a:solidFill>
-                <a:latin typeface="Arial" pitchFamily="34" charset="0"/>
-                <a:ea typeface="Arial" pitchFamily="34" charset="-122"/>
-                <a:cs typeface="Arial" pitchFamily="34" charset="-120"/>
-              </a:rPr>
-              <a:t>(Deuteronomy 8:2)</a:t>
-            </a:r>
-            <a:endParaRPr lang="en-US" sz="1600" dirty="0"/>
-          </a:p>
-        </p:txBody>
-      </p:sp>
-      <p:sp>
-        <p:nvSpPr>
-          <p:cNvPr id="6" name="t4"/>
-          <p:cNvSpPr txBox="1"/>
-          <p:nvPr/>
-        </p:nvSpPr>
-        <p:spPr>
-          <a:xfrm>
-            <a:off x="914400" y="4846320"/>
-            <a:ext cx="7315200" cy="457200"/>
-          </a:xfrm>
-          <a:prstGeom prst="rect">
-            <a:avLst/>
-          </a:prstGeom>
-          <a:noFill/>
-          <a:ln/>
-        </p:spPr>
-        <p:txBody>
-          <a:bodyPr wrap="square" lIns="0" tIns="0" rIns="0" bIns="0" rtlCol="0" anchor="t"/>
-          <a:lstStyle/>
-          <a:p>
-            <a:pPr algn="ctr" indent="0" marL="0">
-              <a:buNone/>
-            </a:pPr>
-            <a:r>
               <a:rPr lang="en-US" sz="1600" b="1" u="sng" dirty="0">
                 <a:solidFill>
                   <a:srgbClr val="4F81BD"/>
@@ -1636,7 +1683,7 @@
                 <a:latin typeface="Arial" pitchFamily="34" charset="0"/>
                 <a:ea typeface="Arial" pitchFamily="34" charset="-122"/>
                 <a:cs typeface="Arial" pitchFamily="34" charset="-120"/>
-                <a:hlinkClick r:id="rId1" invalidUrl="" action="" tgtFrame="" tooltip="" history="1" highlightClick="0" endSnd="0">
+                <a:hlinkClick r:id="rId3">
                   <a:extLst>
                     <a:ext uri="{A12FA001-AC4F-418D-AE19-62706E023703}">
                       <ahyp:hlinkClr xmlns:ahyp="http://schemas.microsoft.com/office/drawing/2018/hyperlinkcolor" val="tx"/>
@@ -1644,7 +1691,36 @@
                   </a:extLst>
                 </a:hlinkClick>
               </a:rPr>
-              <a:t>https://tinyurl.com/TeachTheWord</a:t>
+              <a:t>https://</a:t>
+            </a:r>
+            <a:r>
+              <a:rPr lang="en-US" sz="1600" b="1" u="sng" dirty="0" err="1">
+                <a:solidFill>
+                  <a:srgbClr val="4F81BD"/>
+                </a:solidFill>
+                <a:latin typeface="Arial" pitchFamily="34" charset="0"/>
+                <a:ea typeface="Arial" pitchFamily="34" charset="-122"/>
+                <a:cs typeface="Arial" pitchFamily="34" charset="-120"/>
+                <a:hlinkClick r:id="rId3">
+                  <a:extLst>
+                    <a:ext uri="{A12FA001-AC4F-418D-AE19-62706E023703}">
+                      <ahyp:hlinkClr xmlns:ahyp="http://schemas.microsoft.com/office/drawing/2018/hyperlinkcolor" val="tx"/>
+                    </a:ext>
+                  </a:extLst>
+                </a:hlinkClick>
+              </a:rPr>
+              <a:t>TeachTheWord</a:t>
+            </a:r>
+            <a:r>
+              <a:rPr lang="en-US" sz="1600" b="1" u="sng" dirty="0" err="1">
+                <a:solidFill>
+                  <a:srgbClr val="4F81BD"/>
+                </a:solidFill>
+                <a:latin typeface="Arial" pitchFamily="34" charset="0"/>
+                <a:ea typeface="Arial" pitchFamily="34" charset="-122"/>
+                <a:cs typeface="Arial" pitchFamily="34" charset="-120"/>
+              </a:rPr>
+              <a:t>.Church</a:t>
             </a:r>
             <a:endParaRPr lang="en-US" sz="1600" dirty="0"/>
           </a:p>
@@ -1696,7 +1772,7 @@
           <a:bodyPr wrap="square" lIns="0" tIns="0" rIns="0" bIns="0" rtlCol="0" anchor="t"/>
           <a:lstStyle/>
           <a:p>
-            <a:pPr algn="l" indent="0" marL="0">
+            <a:pPr marL="0" indent="0" algn="l">
               <a:buNone/>
             </a:pPr>
             <a:r>
@@ -1735,11 +1811,11 @@
           <a:bodyPr wrap="square" lIns="0" tIns="0" rIns="0" bIns="0" rtlCol="0" anchor="t"/>
           <a:lstStyle/>
           <a:p>
-            <a:pPr algn="l" indent="0" marL="0">
+            <a:pPr marL="0" indent="0" algn="l">
               <a:buNone/>
             </a:pPr>
             <a:r>
-              <a:rPr lang="en-US" sz="1300" b="1" dirty="0">
+              <a:rPr lang="en-US" sz="2000" b="1" dirty="0">
                 <a:solidFill>
                   <a:srgbClr val="4F81BD"/>
                 </a:solidFill>
@@ -1747,9 +1823,32 @@
                 <a:ea typeface="Arial" pitchFamily="34" charset="-122"/>
                 <a:cs typeface="Arial" pitchFamily="34" charset="-120"/>
               </a:rPr>
-              <a:t>Same event, two purposes — tell them apart</a:t>
-            </a:r>
-            <a:endParaRPr lang="en-US" sz="1600" dirty="0"/>
+              <a:t>Same event, two purposes </a:t>
+            </a:r>
+            <a:r>
+              <a:rPr lang="en-US" sz="2000" b="1" dirty="0">
+                <a:solidFill>
+                  <a:srgbClr val="4F81BD"/>
+                </a:solidFill>
+                <a:latin typeface="Arial" pitchFamily="34" charset="0"/>
+                <a:ea typeface="Arial" pitchFamily="34" charset="-122"/>
+                <a:cs typeface="Arial" pitchFamily="34" charset="-120"/>
+                <a:sym typeface="Wingdings" pitchFamily="2" charset="2"/>
+              </a:rPr>
+              <a:t></a:t>
+            </a:r>
+            <a:r>
+              <a:rPr lang="en-US" sz="2000" b="1" dirty="0">
+                <a:solidFill>
+                  <a:srgbClr val="4F81BD"/>
+                </a:solidFill>
+                <a:latin typeface="Arial" pitchFamily="34" charset="0"/>
+                <a:ea typeface="Arial" pitchFamily="34" charset="-122"/>
+                <a:cs typeface="Arial" pitchFamily="34" charset="-120"/>
+              </a:rPr>
+              <a:t> tell them apart</a:t>
+            </a:r>
+            <a:endParaRPr lang="en-US" sz="2800" dirty="0"/>
           </a:p>
         </p:txBody>
       </p:sp>
@@ -1761,7 +1860,7 @@
         </p:nvSpPr>
         <p:spPr>
           <a:xfrm>
-            <a:off x="365760" y="1234440"/>
+            <a:off x="365760" y="1069848"/>
             <a:ext cx="4114800" cy="2468880"/>
           </a:xfrm>
           <a:prstGeom prst="roundRect">
@@ -1774,6 +1873,13 @@
           </a:solidFill>
           <a:ln/>
         </p:spPr>
+        <p:txBody>
+          <a:bodyPr/>
+          <a:lstStyle/>
+          <a:p>
+            <a:endParaRPr lang="en-US"/>
+          </a:p>
+        </p:txBody>
       </p:sp>
       <p:sp>
         <p:nvSpPr>
@@ -1783,7 +1889,7 @@
         </p:nvSpPr>
         <p:spPr>
           <a:xfrm>
-            <a:off x="548640" y="1371600"/>
+            <a:off x="548640" y="1207008"/>
             <a:ext cx="3794760" cy="2194560"/>
           </a:xfrm>
           <a:prstGeom prst="rect">
@@ -1796,11 +1902,11 @@
           <a:bodyPr wrap="square" lIns="0" tIns="0" rIns="0" bIns="0" rtlCol="0" anchor="t"/>
           <a:lstStyle/>
           <a:p>
-            <a:pPr algn="l" indent="0" marL="0">
+            <a:pPr marL="0" indent="0" algn="l">
               <a:buNone/>
             </a:pPr>
             <a:r>
-              <a:rPr lang="en-US" sz="1700" b="1" dirty="0">
+              <a:rPr lang="en-US" sz="2400" b="1" dirty="0">
                 <a:solidFill>
                   <a:srgbClr val="FFFFFF"/>
                 </a:solidFill>
@@ -1811,11 +1917,8 @@
               <a:t>GOD TESTS
 </a:t>
             </a:r>
-            <a:pPr algn="l" indent="0" marL="0">
-              <a:buNone/>
-            </a:pPr>
-            <a:r>
-              <a:rPr lang="en-US" sz="1150" i="1" dirty="0">
+            <a:r>
+              <a:rPr lang="en-US" sz="1600" i="1" dirty="0">
                 <a:solidFill>
                   <a:srgbClr val="C9A227"/>
                 </a:solidFill>
@@ -1827,11 +1930,8 @@
 Greek: dokimazo (test to approve)
 </a:t>
             </a:r>
-            <a:pPr algn="l" indent="0" marL="0">
-              <a:buNone/>
-            </a:pPr>
-            <a:r>
-              <a:rPr lang="en-US" sz="1350" dirty="0">
+            <a:r>
+              <a:rPr lang="en-US" dirty="0">
                 <a:solidFill>
                   <a:srgbClr val="FFFFFF"/>
                 </a:solidFill>
@@ -1839,9 +1939,32 @@
                 <a:ea typeface="Arial" pitchFamily="34" charset="-122"/>
                 <a:cs typeface="Arial" pitchFamily="34" charset="-120"/>
               </a:rPr>
-              <a:t>Purpose: to prove and refine — to bring genuine faith into the open and strengthen it. God tests toward LIFE.</a:t>
-            </a:r>
-            <a:endParaRPr lang="en-US" sz="1600" dirty="0"/>
+              <a:t>Purpose: to prove and refine </a:t>
+            </a:r>
+            <a:r>
+              <a:rPr lang="en-US" dirty="0">
+                <a:solidFill>
+                  <a:srgbClr val="FFFFFF"/>
+                </a:solidFill>
+                <a:latin typeface="Arial" pitchFamily="34" charset="0"/>
+                <a:ea typeface="Arial" pitchFamily="34" charset="-122"/>
+                <a:cs typeface="Arial" pitchFamily="34" charset="-120"/>
+                <a:sym typeface="Wingdings" pitchFamily="2" charset="2"/>
+              </a:rPr>
+              <a:t></a:t>
+            </a:r>
+            <a:r>
+              <a:rPr lang="en-US" dirty="0">
+                <a:solidFill>
+                  <a:srgbClr val="FFFFFF"/>
+                </a:solidFill>
+                <a:latin typeface="Arial" pitchFamily="34" charset="0"/>
+                <a:ea typeface="Arial" pitchFamily="34" charset="-122"/>
+                <a:cs typeface="Arial" pitchFamily="34" charset="-120"/>
+              </a:rPr>
+              <a:t> to bring genuine faith into the open and strengthen it. God tests toward LIFE.</a:t>
+            </a:r>
+            <a:endParaRPr lang="en-US" sz="2400" dirty="0"/>
           </a:p>
         </p:txBody>
       </p:sp>
@@ -1853,7 +1976,7 @@
         </p:nvSpPr>
         <p:spPr>
           <a:xfrm>
-            <a:off x="4663440" y="1234440"/>
+            <a:off x="4663440" y="1069848"/>
             <a:ext cx="4114800" cy="2468880"/>
           </a:xfrm>
           <a:prstGeom prst="roundRect">
@@ -1871,6 +1994,13 @@
             <a:prstDash val="solid"/>
           </a:ln>
         </p:spPr>
+        <p:txBody>
+          <a:bodyPr/>
+          <a:lstStyle/>
+          <a:p>
+            <a:endParaRPr lang="en-US"/>
+          </a:p>
+        </p:txBody>
       </p:sp>
       <p:sp>
         <p:nvSpPr>
@@ -1880,7 +2010,7 @@
         </p:nvSpPr>
         <p:spPr>
           <a:xfrm>
-            <a:off x="4846320" y="1371600"/>
+            <a:off x="4846320" y="1207008"/>
             <a:ext cx="3794760" cy="2194560"/>
           </a:xfrm>
           <a:prstGeom prst="rect">
@@ -1893,11 +2023,11 @@
           <a:bodyPr wrap="square" lIns="0" tIns="0" rIns="0" bIns="0" rtlCol="0" anchor="t"/>
           <a:lstStyle/>
           <a:p>
-            <a:pPr algn="l" indent="0" marL="0">
+            <a:pPr marL="0" indent="0" algn="l">
               <a:buNone/>
             </a:pPr>
             <a:r>
-              <a:rPr lang="en-US" sz="1700" b="1" dirty="0">
+              <a:rPr lang="en-US" sz="2400" b="1" dirty="0">
                 <a:solidFill>
                   <a:srgbClr val="B0413E"/>
                 </a:solidFill>
@@ -1908,26 +2038,155 @@
               <a:t>SATAN TEMPTS
 </a:t>
             </a:r>
-            <a:pPr algn="l" indent="0" marL="0">
+            <a:r>
+              <a:rPr lang="en-US" sz="1600" i="1" dirty="0">
+                <a:solidFill>
+                  <a:srgbClr val="595959"/>
+                </a:solidFill>
+                <a:latin typeface="Arial" pitchFamily="34" charset="0"/>
+                <a:ea typeface="Arial" pitchFamily="34" charset="-122"/>
+                <a:cs typeface="Arial" pitchFamily="34" charset="-120"/>
+              </a:rPr>
+              <a:t>Greek: peirazo (in his hands: to entice to evil)
+</a:t>
+            </a:r>
+            <a:r>
+              <a:rPr lang="en-US" dirty="0">
+                <a:solidFill>
+                  <a:srgbClr val="000000"/>
+                </a:solidFill>
+                <a:latin typeface="Arial" pitchFamily="34" charset="0"/>
+                <a:ea typeface="Arial" pitchFamily="34" charset="-122"/>
+                <a:cs typeface="Arial" pitchFamily="34" charset="-120"/>
+              </a:rPr>
+              <a:t>Purpose: to break and destroy </a:t>
+            </a:r>
+            <a:r>
+              <a:rPr lang="en-US" dirty="0">
+                <a:solidFill>
+                  <a:srgbClr val="000000"/>
+                </a:solidFill>
+                <a:latin typeface="Arial" pitchFamily="34" charset="0"/>
+                <a:ea typeface="Arial" pitchFamily="34" charset="-122"/>
+                <a:cs typeface="Arial" pitchFamily="34" charset="-120"/>
+                <a:sym typeface="Wingdings" pitchFamily="2" charset="2"/>
+              </a:rPr>
+              <a:t></a:t>
+            </a:r>
+            <a:r>
+              <a:rPr lang="en-US" dirty="0">
+                <a:solidFill>
+                  <a:srgbClr val="000000"/>
+                </a:solidFill>
+                <a:latin typeface="Arial" pitchFamily="34" charset="0"/>
+                <a:ea typeface="Arial" pitchFamily="34" charset="-122"/>
+                <a:cs typeface="Arial" pitchFamily="34" charset="-120"/>
+              </a:rPr>
+              <a:t> to make faith fail. The tempter aims at DEATH.</a:t>
+            </a:r>
+            <a:endParaRPr lang="en-US" sz="2400" dirty="0"/>
+          </a:p>
+        </p:txBody>
+      </p:sp>
+      <p:sp>
+        <p:nvSpPr>
+          <p:cNvPr id="8" name="v1"/>
+          <p:cNvSpPr txBox="1"/>
+          <p:nvPr/>
+        </p:nvSpPr>
+        <p:spPr>
+          <a:xfrm>
+            <a:off x="365760" y="3726180"/>
+            <a:ext cx="8412480" cy="1074420"/>
+          </a:xfrm>
+          <a:prstGeom prst="rect">
+            <a:avLst/>
+          </a:prstGeom>
+          <a:noFill/>
+          <a:ln/>
+        </p:spPr>
+        <p:txBody>
+          <a:bodyPr wrap="square" lIns="0" tIns="0" rIns="0" bIns="0" rtlCol="0" anchor="t"/>
+          <a:lstStyle/>
+          <a:p>
+            <a:pPr marL="0" indent="0" algn="l">
               <a:buNone/>
             </a:pPr>
             <a:r>
-              <a:rPr lang="en-US" sz="1150" i="1" dirty="0">
-                <a:solidFill>
-                  <a:srgbClr val="595959"/>
-                </a:solidFill>
-                <a:latin typeface="Arial" pitchFamily="34" charset="0"/>
-                <a:ea typeface="Arial" pitchFamily="34" charset="-122"/>
-                <a:cs typeface="Arial" pitchFamily="34" charset="-120"/>
-              </a:rPr>
-              <a:t>Greek: peirazo (in his hands: to entice to evil)
-</a:t>
-            </a:r>
-            <a:pPr algn="l" indent="0" marL="0">
+              <a:rPr lang="en-US" sz="2000" b="1" dirty="0">
+                <a:solidFill>
+                  <a:srgbClr val="1F497D"/>
+                </a:solidFill>
+                <a:latin typeface="Arial" pitchFamily="34" charset="0"/>
+                <a:ea typeface="Arial" pitchFamily="34" charset="-122"/>
+                <a:cs typeface="Arial" pitchFamily="34" charset="-120"/>
+              </a:rPr>
+              <a:t>The same event can be both, from two sides:  </a:t>
+            </a:r>
+            <a:r>
+              <a:rPr lang="en-US" sz="2000" dirty="0">
+                <a:solidFill>
+                  <a:srgbClr val="000000"/>
+                </a:solidFill>
+                <a:latin typeface="Arial" pitchFamily="34" charset="0"/>
+                <a:ea typeface="Arial" pitchFamily="34" charset="-122"/>
+                <a:cs typeface="Arial" pitchFamily="34" charset="-120"/>
+              </a:rPr>
+              <a:t>Job’s loss, Peter’s sifting (Luke 22:31–32 </a:t>
+            </a:r>
+            <a:r>
+              <a:rPr lang="en-US" sz="2000" dirty="0">
+                <a:solidFill>
+                  <a:srgbClr val="000000"/>
+                </a:solidFill>
+                <a:latin typeface="Arial" pitchFamily="34" charset="0"/>
+                <a:ea typeface="Arial" pitchFamily="34" charset="-122"/>
+                <a:cs typeface="Arial" pitchFamily="34" charset="-120"/>
+                <a:sym typeface="Wingdings" pitchFamily="2" charset="2"/>
+              </a:rPr>
+              <a:t></a:t>
+            </a:r>
+            <a:r>
+              <a:rPr lang="en-US" sz="2000" dirty="0">
+                <a:solidFill>
+                  <a:srgbClr val="000000"/>
+                </a:solidFill>
+                <a:latin typeface="Arial" pitchFamily="34" charset="0"/>
+                <a:ea typeface="Arial" pitchFamily="34" charset="-122"/>
+                <a:cs typeface="Arial" pitchFamily="34" charset="-120"/>
+              </a:rPr>
+              <a:t> Satan demanded to sift him; Jesus prayed his faith would not fail). One event; God’s purpose to prove, Satan’s to destroy.</a:t>
+            </a:r>
+            <a:endParaRPr lang="en-US" sz="2400" dirty="0"/>
+          </a:p>
+        </p:txBody>
+      </p:sp>
+      <p:sp>
+        <p:nvSpPr>
+          <p:cNvPr id="9" name="v2"/>
+          <p:cNvSpPr txBox="1"/>
+          <p:nvPr/>
+        </p:nvSpPr>
+        <p:spPr>
+          <a:xfrm>
+            <a:off x="365760" y="4937760"/>
+            <a:ext cx="8412480" cy="1600200"/>
+          </a:xfrm>
+          <a:prstGeom prst="rect">
+            <a:avLst/>
+          </a:prstGeom>
+          <a:noFill/>
+          <a:ln/>
+        </p:spPr>
+        <p:txBody>
+          <a:bodyPr wrap="square" lIns="0" tIns="0" rIns="0" bIns="0" rtlCol="0" anchor="t"/>
+          <a:lstStyle/>
+          <a:p>
+            <a:pPr marL="0" indent="0" algn="l">
               <a:buNone/>
             </a:pPr>
             <a:r>
-              <a:rPr lang="en-US" sz="1350" dirty="0">
+              <a:rPr lang="en-US" sz="2000" b="1" dirty="0">
                 <a:solidFill>
                   <a:srgbClr val="000000"/>
                 </a:solidFill>
@@ -1935,38 +2194,38 @@
                 <a:ea typeface="Arial" pitchFamily="34" charset="-122"/>
                 <a:cs typeface="Arial" pitchFamily="34" charset="-120"/>
               </a:rPr>
-              <a:t>Purpose: to break and destroy — to make faith fail. The tempter aims at DEATH.</a:t>
-            </a:r>
-            <a:endParaRPr lang="en-US" sz="1600" dirty="0"/>
-          </a:p>
-        </p:txBody>
-      </p:sp>
-      <p:sp>
-        <p:nvSpPr>
-          <p:cNvPr id="8" name="v1"/>
-          <p:cNvSpPr txBox="1"/>
-          <p:nvPr/>
-        </p:nvSpPr>
-        <p:spPr>
-          <a:xfrm>
-            <a:off x="365760" y="3886200"/>
-            <a:ext cx="8412480" cy="960120"/>
-          </a:xfrm>
-          <a:prstGeom prst="rect">
-            <a:avLst/>
-          </a:prstGeom>
-          <a:noFill/>
-          <a:ln/>
-        </p:spPr>
-        <p:txBody>
-          <a:bodyPr wrap="square" lIns="0" tIns="0" rIns="0" bIns="0" rtlCol="0" anchor="t"/>
-          <a:lstStyle/>
-          <a:p>
-            <a:pPr algn="l" indent="0" marL="0">
+              <a:t>God never tempts toward evil: </a:t>
+            </a:r>
+            <a:r>
+              <a:rPr lang="en-US" sz="2000" b="1" i="1" dirty="0">
+                <a:solidFill>
+                  <a:srgbClr val="000000"/>
+                </a:solidFill>
+                <a:latin typeface="Arial" pitchFamily="34" charset="0"/>
+                <a:ea typeface="Arial" pitchFamily="34" charset="-122"/>
+                <a:cs typeface="Arial" pitchFamily="34" charset="-120"/>
+              </a:rPr>
+              <a:t>“Let no one say when he is tempted, “I am tempted by God,” for God cannot be tempted by evil, and he himself tempts no one.” </a:t>
+            </a:r>
+            <a:r>
+              <a:rPr lang="en-US" b="1" dirty="0">
+                <a:solidFill>
+                  <a:srgbClr val="000000"/>
+                </a:solidFill>
+                <a:latin typeface="Arial" pitchFamily="34" charset="0"/>
+                <a:ea typeface="Arial" pitchFamily="34" charset="-122"/>
+                <a:cs typeface="Arial" pitchFamily="34" charset="-120"/>
+              </a:rPr>
+              <a:t>(James 1:13)</a:t>
+            </a:r>
+            <a:endParaRPr lang="en-US" sz="2400" dirty="0"/>
+          </a:p>
+          <a:p>
+            <a:pPr marL="0" indent="0" algn="l">
               <a:buNone/>
             </a:pPr>
             <a:r>
-              <a:rPr lang="en-US" sz="1450" b="1" dirty="0">
+              <a:rPr lang="en-US" sz="2000" b="1" dirty="0">
                 <a:solidFill>
                   <a:srgbClr val="1F497D"/>
                 </a:solidFill>
@@ -1974,110 +2233,32 @@
                 <a:ea typeface="Arial" pitchFamily="34" charset="-122"/>
                 <a:cs typeface="Arial" pitchFamily="34" charset="-120"/>
               </a:rPr>
-              <a:t>The same event can be both, from two sides:  </a:t>
-            </a:r>
-            <a:pPr algn="l" indent="0" marL="0">
-              <a:buNone/>
-            </a:pPr>
-            <a:r>
-              <a:rPr lang="en-US" sz="1400" dirty="0">
-                <a:solidFill>
-                  <a:srgbClr val="000000"/>
-                </a:solidFill>
-                <a:latin typeface="Arial" pitchFamily="34" charset="0"/>
-                <a:ea typeface="Arial" pitchFamily="34" charset="-122"/>
-                <a:cs typeface="Arial" pitchFamily="34" charset="-120"/>
-              </a:rPr>
-              <a:t>Job’s loss, Peter’s sifting (Luke 22:31–32 — Satan demanded to sift him; Jesus prayed his faith would not fail). One event; God’s purpose to prove, Satan’s to destroy.</a:t>
-            </a:r>
-            <a:endParaRPr lang="en-US" sz="1600" dirty="0"/>
-          </a:p>
-        </p:txBody>
-      </p:sp>
-      <p:sp>
-        <p:nvSpPr>
-          <p:cNvPr id="9" name="v2"/>
-          <p:cNvSpPr txBox="1"/>
-          <p:nvPr/>
-        </p:nvSpPr>
-        <p:spPr>
-          <a:xfrm>
-            <a:off x="365760" y="4937760"/>
-            <a:ext cx="8412480" cy="1188720"/>
-          </a:xfrm>
-          <a:prstGeom prst="rect">
-            <a:avLst/>
-          </a:prstGeom>
-          <a:noFill/>
-          <a:ln/>
-        </p:spPr>
-        <p:txBody>
-          <a:bodyPr wrap="square" lIns="0" tIns="0" rIns="0" bIns="0" rtlCol="0" anchor="t"/>
-          <a:lstStyle/>
-          <a:p>
-            <a:pPr algn="l" indent="0" marL="0">
-              <a:buNone/>
-            </a:pPr>
-            <a:r>
-              <a:rPr lang="en-US" sz="1450" b="1" dirty="0">
-                <a:solidFill>
-                  <a:srgbClr val="000000"/>
-                </a:solidFill>
-                <a:latin typeface="Arial" pitchFamily="34" charset="0"/>
-                <a:ea typeface="Arial" pitchFamily="34" charset="-122"/>
-                <a:cs typeface="Arial" pitchFamily="34" charset="-120"/>
-              </a:rPr>
-              <a:t>And God never tempts toward evil: </a:t>
-            </a:r>
-            <a:pPr algn="l" indent="0" marL="0">
-              <a:buNone/>
-            </a:pPr>
-            <a:r>
-              <a:rPr lang="en-US" sz="1400" b="1" i="1" dirty="0">
-                <a:solidFill>
-                  <a:srgbClr val="000000"/>
-                </a:solidFill>
-                <a:latin typeface="Arial" pitchFamily="34" charset="0"/>
-                <a:ea typeface="Arial" pitchFamily="34" charset="-122"/>
-                <a:cs typeface="Arial" pitchFamily="34" charset="-120"/>
-              </a:rPr>
-              <a:t>“Let no one say when he is tempted, “I am tempted by God,” for God cannot be tempted by evil, and he himself tempts no one.” </a:t>
-            </a:r>
-            <a:pPr algn="l" indent="0" marL="0">
-              <a:buNone/>
-            </a:pPr>
-            <a:r>
-              <a:rPr lang="en-US" sz="1300" b="1" dirty="0">
-                <a:solidFill>
-                  <a:srgbClr val="000000"/>
-                </a:solidFill>
-                <a:latin typeface="Arial" pitchFamily="34" charset="0"/>
-                <a:ea typeface="Arial" pitchFamily="34" charset="-122"/>
-                <a:cs typeface="Arial" pitchFamily="34" charset="-120"/>
-              </a:rPr>
-              <a:t>(James 1:13)</a:t>
-            </a:r>
-            <a:pPr algn="l" indent="0" marL="0">
-              <a:buNone/>
-            </a:pPr>
-            <a:endParaRPr lang="en-US" sz="1600" dirty="0"/>
-          </a:p>
-          <a:p>
-            <a:pPr algn="l" indent="0" marL="0">
-              <a:buNone/>
-            </a:pPr>
-            <a:r>
-              <a:rPr lang="en-US" sz="1400" b="1" dirty="0">
+              <a:t>Key idea for the whole unit: a test is the scheduled occasion of sacrifice </a:t>
+            </a:r>
+            <a:r>
+              <a:rPr lang="en-US" sz="2000" b="1" dirty="0">
                 <a:solidFill>
                   <a:srgbClr val="1F497D"/>
                 </a:solidFill>
                 <a:latin typeface="Arial" pitchFamily="34" charset="0"/>
                 <a:ea typeface="Arial" pitchFamily="34" charset="-122"/>
                 <a:cs typeface="Arial" pitchFamily="34" charset="-120"/>
-              </a:rPr>
-              <a:t>Key idea for the whole unit: a test is the scheduled occasion of sacrifice — the moment trust must cost something.</a:t>
-            </a:r>
-            <a:endParaRPr lang="en-US" sz="1600" dirty="0"/>
+                <a:sym typeface="Wingdings" pitchFamily="2" charset="2"/>
+              </a:rPr>
+              <a:t></a:t>
+            </a:r>
+            <a:r>
+              <a:rPr lang="en-US" sz="2000" b="1" dirty="0">
+                <a:solidFill>
+                  <a:srgbClr val="1F497D"/>
+                </a:solidFill>
+                <a:latin typeface="Arial" pitchFamily="34" charset="0"/>
+                <a:ea typeface="Arial" pitchFamily="34" charset="-122"/>
+                <a:cs typeface="Arial" pitchFamily="34" charset="-120"/>
+              </a:rPr>
+              <a:t> the moment trust must cost something.</a:t>
+            </a:r>
+            <a:endParaRPr lang="en-US" sz="2400" dirty="0"/>
           </a:p>
         </p:txBody>
       </p:sp>
@@ -2095,26 +2276,26 @@
               <p:cTn id="2" dur="indefinite" nodeType="mainSeq">
                 <p:childTnLst>
                   <p:par>
-                    <p:cTn id="11" fill="hold">
+                    <p:cTn id="3" fill="hold">
                       <p:stCondLst>
                         <p:cond delay="indefinite"/>
                       </p:stCondLst>
                       <p:childTnLst>
                         <p:par>
-                          <p:cTn id="12" fill="hold">
+                          <p:cTn id="4" fill="hold">
                             <p:stCondLst>
                               <p:cond delay="0"/>
                             </p:stCondLst>
                             <p:childTnLst>
                               <p:par>
-                                <p:cTn id="3" presetID="42" presetClass="entr" presetSubtype="0" fill="hold" grpId="0" nodeType="clickEffect">
+                                <p:cTn id="5" presetID="42" presetClass="entr" presetSubtype="0" fill="hold" nodeType="clickEffect">
                                   <p:stCondLst>
                                     <p:cond delay="0"/>
                                   </p:stCondLst>
                                   <p:childTnLst>
                                     <p:set>
                                       <p:cBhvr>
-                                        <p:cTn id="4" dur="1" fill="hold">
+                                        <p:cTn id="6" dur="1" fill="hold">
                                           <p:stCondLst>
                                             <p:cond delay="0"/>
                                           </p:stCondLst>
@@ -2132,7 +2313,7 @@
                                     </p:set>
                                     <p:animEffect transition="in" filter="fade">
                                       <p:cBhvr>
-                                        <p:cTn id="5" dur="1000"/>
+                                        <p:cTn id="7" dur="1000"/>
                                         <p:tgtEl>
                                           <p:spTgt spid="4"/>
                                         </p:tgtEl>
@@ -2140,7 +2321,7 @@
                                     </p:animEffect>
                                     <p:anim calcmode="lin" valueType="num">
                                       <p:cBhvr>
-                                        <p:cTn id="6" dur="1000" fill="hold"/>
+                                        <p:cTn id="8" dur="1000" fill="hold"/>
                                         <p:tgtEl>
                                           <p:spTgt spid="4"/>
                                         </p:tgtEl>
@@ -2165,14 +2346,14 @@
                                 </p:cTn>
                               </p:par>
                               <p:par>
-                                <p:cTn id="7" presetID="42" presetClass="entr" presetSubtype="0" fill="hold" grpId="0" nodeType="withEffect">
+                                <p:cTn id="9" presetID="42" presetClass="entr" presetSubtype="0" fill="hold" nodeType="withEffect">
                                   <p:stCondLst>
                                     <p:cond delay="0"/>
                                   </p:stCondLst>
                                   <p:childTnLst>
                                     <p:set>
                                       <p:cBhvr>
-                                        <p:cTn id="8" dur="1" fill="hold">
+                                        <p:cTn id="10" dur="1" fill="hold">
                                           <p:stCondLst>
                                             <p:cond delay="0"/>
                                           </p:stCondLst>
@@ -2190,7 +2371,7 @@
                                     </p:set>
                                     <p:animEffect transition="in" filter="fade">
                                       <p:cBhvr>
-                                        <p:cTn id="9" dur="1000"/>
+                                        <p:cTn id="11" dur="1000"/>
                                         <p:tgtEl>
                                           <p:spTgt spid="5"/>
                                         </p:tgtEl>
@@ -2198,7 +2379,7 @@
                                     </p:animEffect>
                                     <p:anim calcmode="lin" valueType="num">
                                       <p:cBhvr>
-                                        <p:cTn id="10" dur="1000" fill="hold"/>
+                                        <p:cTn id="12" dur="1000" fill="hold"/>
                                         <p:tgtEl>
                                           <p:spTgt spid="5"/>
                                         </p:tgtEl>
@@ -2229,26 +2410,26 @@
                     </p:cTn>
                   </p:par>
                   <p:par>
-                    <p:cTn id="21" fill="hold">
+                    <p:cTn id="13" fill="hold">
                       <p:stCondLst>
                         <p:cond delay="indefinite"/>
                       </p:stCondLst>
                       <p:childTnLst>
                         <p:par>
-                          <p:cTn id="22" fill="hold">
+                          <p:cTn id="14" fill="hold">
                             <p:stCondLst>
                               <p:cond delay="0"/>
                             </p:stCondLst>
                             <p:childTnLst>
                               <p:par>
-                                <p:cTn id="13" presetID="42" presetClass="entr" presetSubtype="0" fill="hold" grpId="0" nodeType="clickEffect">
+                                <p:cTn id="15" presetID="42" presetClass="entr" presetSubtype="0" fill="hold" nodeType="clickEffect">
                                   <p:stCondLst>
                                     <p:cond delay="0"/>
                                   </p:stCondLst>
                                   <p:childTnLst>
                                     <p:set>
                                       <p:cBhvr>
-                                        <p:cTn id="14" dur="1" fill="hold">
+                                        <p:cTn id="16" dur="1" fill="hold">
                                           <p:stCondLst>
                                             <p:cond delay="0"/>
                                           </p:stCondLst>
@@ -2266,7 +2447,7 @@
                                     </p:set>
                                     <p:animEffect transition="in" filter="fade">
                                       <p:cBhvr>
-                                        <p:cTn id="15" dur="1000"/>
+                                        <p:cTn id="17" dur="1000"/>
                                         <p:tgtEl>
                                           <p:spTgt spid="6"/>
                                         </p:tgtEl>
@@ -2274,7 +2455,7 @@
                                     </p:animEffect>
                                     <p:anim calcmode="lin" valueType="num">
                                       <p:cBhvr>
-                                        <p:cTn id="16" dur="1000" fill="hold"/>
+                                        <p:cTn id="18" dur="1000" fill="hold"/>
                                         <p:tgtEl>
                                           <p:spTgt spid="6"/>
                                         </p:tgtEl>
@@ -2299,14 +2480,14 @@
                                 </p:cTn>
                               </p:par>
                               <p:par>
-                                <p:cTn id="17" presetID="42" presetClass="entr" presetSubtype="0" fill="hold" grpId="0" nodeType="withEffect">
+                                <p:cTn id="19" presetID="42" presetClass="entr" presetSubtype="0" fill="hold" nodeType="withEffect">
                                   <p:stCondLst>
                                     <p:cond delay="0"/>
                                   </p:stCondLst>
                                   <p:childTnLst>
                                     <p:set>
                                       <p:cBhvr>
-                                        <p:cTn id="18" dur="1" fill="hold">
+                                        <p:cTn id="20" dur="1" fill="hold">
                                           <p:stCondLst>
                                             <p:cond delay="0"/>
                                           </p:stCondLst>
@@ -2324,7 +2505,7 @@
                                     </p:set>
                                     <p:animEffect transition="in" filter="fade">
                                       <p:cBhvr>
-                                        <p:cTn id="19" dur="1000"/>
+                                        <p:cTn id="21" dur="1000"/>
                                         <p:tgtEl>
                                           <p:spTgt spid="7"/>
                                         </p:tgtEl>
@@ -2332,7 +2513,7 @@
                                     </p:animEffect>
                                     <p:anim calcmode="lin" valueType="num">
                                       <p:cBhvr>
-                                        <p:cTn id="20" dur="1000" fill="hold"/>
+                                        <p:cTn id="22" dur="1000" fill="hold"/>
                                         <p:tgtEl>
                                           <p:spTgt spid="7"/>
                                         </p:tgtEl>
@@ -2363,26 +2544,26 @@
                     </p:cTn>
                   </p:par>
                   <p:par>
-                    <p:cTn id="27" fill="hold">
+                    <p:cTn id="23" fill="hold">
                       <p:stCondLst>
                         <p:cond delay="indefinite"/>
                       </p:stCondLst>
                       <p:childTnLst>
                         <p:par>
-                          <p:cTn id="28" fill="hold">
+                          <p:cTn id="24" fill="hold">
                             <p:stCondLst>
                               <p:cond delay="0"/>
                             </p:stCondLst>
                             <p:childTnLst>
                               <p:par>
-                                <p:cTn id="23" presetID="42" presetClass="entr" presetSubtype="0" fill="hold" grpId="0" nodeType="clickEffect">
+                                <p:cTn id="25" presetID="42" presetClass="entr" presetSubtype="0" fill="hold" nodeType="clickEffect">
                                   <p:stCondLst>
                                     <p:cond delay="0"/>
                                   </p:stCondLst>
                                   <p:childTnLst>
                                     <p:set>
                                       <p:cBhvr>
-                                        <p:cTn id="24" dur="1" fill="hold">
+                                        <p:cTn id="26" dur="1" fill="hold">
                                           <p:stCondLst>
                                             <p:cond delay="0"/>
                                           </p:stCondLst>
@@ -2400,7 +2581,7 @@
                                     </p:set>
                                     <p:animEffect transition="in" filter="fade">
                                       <p:cBhvr>
-                                        <p:cTn id="25" dur="1000"/>
+                                        <p:cTn id="27" dur="1000"/>
                                         <p:tgtEl>
                                           <p:spTgt spid="8"/>
                                         </p:tgtEl>
@@ -2408,7 +2589,7 @@
                                     </p:animEffect>
                                     <p:anim calcmode="lin" valueType="num">
                                       <p:cBhvr>
-                                        <p:cTn id="26" dur="1000" fill="hold"/>
+                                        <p:cTn id="28" dur="1000" fill="hold"/>
                                         <p:tgtEl>
                                           <p:spTgt spid="8"/>
                                         </p:tgtEl>
@@ -2439,26 +2620,26 @@
                     </p:cTn>
                   </p:par>
                   <p:par>
-                    <p:cTn id="33" fill="hold">
+                    <p:cTn id="29" fill="hold">
                       <p:stCondLst>
                         <p:cond delay="indefinite"/>
                       </p:stCondLst>
                       <p:childTnLst>
                         <p:par>
-                          <p:cTn id="34" fill="hold">
+                          <p:cTn id="30" fill="hold">
                             <p:stCondLst>
                               <p:cond delay="0"/>
                             </p:stCondLst>
                             <p:childTnLst>
                               <p:par>
-                                <p:cTn id="29" presetID="42" presetClass="entr" presetSubtype="0" fill="hold" grpId="0" nodeType="clickEffect">
+                                <p:cTn id="31" presetID="42" presetClass="entr" presetSubtype="0" fill="hold" nodeType="clickEffect">
                                   <p:stCondLst>
                                     <p:cond delay="0"/>
                                   </p:stCondLst>
                                   <p:childTnLst>
                                     <p:set>
                                       <p:cBhvr>
-                                        <p:cTn id="30" dur="1" fill="hold">
+                                        <p:cTn id="32" dur="1" fill="hold">
                                           <p:stCondLst>
                                             <p:cond delay="0"/>
                                           </p:stCondLst>
@@ -2476,7 +2657,7 @@
                                     </p:set>
                                     <p:animEffect transition="in" filter="fade">
                                       <p:cBhvr>
-                                        <p:cTn id="31" dur="1000"/>
+                                        <p:cTn id="33" dur="1000"/>
                                         <p:tgtEl>
                                           <p:spTgt spid="9"/>
                                         </p:tgtEl>
@@ -2484,7 +2665,7 @@
                                     </p:animEffect>
                                     <p:anim calcmode="lin" valueType="num">
                                       <p:cBhvr>
-                                        <p:cTn id="32" dur="1000" fill="hold"/>
+                                        <p:cTn id="34" dur="1000" fill="hold"/>
                                         <p:tgtEl>
                                           <p:spTgt spid="9"/>
                                         </p:tgtEl>
@@ -2577,7 +2758,7 @@
           <a:bodyPr wrap="square" lIns="0" tIns="0" rIns="0" bIns="0" rtlCol="0" anchor="t"/>
           <a:lstStyle/>
           <a:p>
-            <a:pPr algn="l" indent="0" marL="0">
+            <a:pPr marL="0" indent="0" algn="l">
               <a:buNone/>
             </a:pPr>
             <a:r>
@@ -2616,11 +2797,11 @@
           <a:bodyPr wrap="square" lIns="0" tIns="0" rIns="0" bIns="0" rtlCol="0" anchor="t"/>
           <a:lstStyle/>
           <a:p>
-            <a:pPr algn="l" indent="0" marL="0">
+            <a:pPr marL="0" indent="0" algn="l">
               <a:buNone/>
             </a:pPr>
             <a:r>
-              <a:rPr lang="en-US" sz="1300" b="1" dirty="0">
+              <a:rPr lang="en-US" sz="2000" b="1" dirty="0">
                 <a:solidFill>
                   <a:srgbClr val="4F81BD"/>
                 </a:solidFill>
@@ -2628,9 +2809,32 @@
                 <a:ea typeface="Arial" pitchFamily="34" charset="-122"/>
                 <a:cs typeface="Arial" pitchFamily="34" charset="-120"/>
               </a:rPr>
-              <a:t>God speaks — faith must become costly action</a:t>
-            </a:r>
-            <a:endParaRPr lang="en-US" sz="1600" dirty="0"/>
+              <a:t>God speaks </a:t>
+            </a:r>
+            <a:r>
+              <a:rPr lang="en-US" sz="2000" b="1" dirty="0">
+                <a:solidFill>
+                  <a:srgbClr val="4F81BD"/>
+                </a:solidFill>
+                <a:latin typeface="Arial" pitchFamily="34" charset="0"/>
+                <a:ea typeface="Arial" pitchFamily="34" charset="-122"/>
+                <a:cs typeface="Arial" pitchFamily="34" charset="-120"/>
+                <a:sym typeface="Wingdings" pitchFamily="2" charset="2"/>
+              </a:rPr>
+              <a:t></a:t>
+            </a:r>
+            <a:r>
+              <a:rPr lang="en-US" sz="2000" b="1" dirty="0">
+                <a:solidFill>
+                  <a:srgbClr val="4F81BD"/>
+                </a:solidFill>
+                <a:latin typeface="Arial" pitchFamily="34" charset="0"/>
+                <a:ea typeface="Arial" pitchFamily="34" charset="-122"/>
+                <a:cs typeface="Arial" pitchFamily="34" charset="-120"/>
+              </a:rPr>
+              <a:t> faith must become costly action</a:t>
+            </a:r>
+            <a:endParaRPr lang="en-US" sz="2800" dirty="0"/>
           </a:p>
         </p:txBody>
       </p:sp>
@@ -2642,7 +2846,7 @@
         </p:nvSpPr>
         <p:spPr>
           <a:xfrm>
-            <a:off x="365760" y="1371600"/>
+            <a:off x="365760" y="1037844"/>
             <a:ext cx="1234440" cy="365760"/>
           </a:xfrm>
           <a:prstGeom prst="rect">
@@ -2653,6 +2857,13 @@
           </a:solidFill>
           <a:ln/>
         </p:spPr>
+        <p:txBody>
+          <a:bodyPr/>
+          <a:lstStyle/>
+          <a:p>
+            <a:endParaRPr lang="en-US" sz="3200"/>
+          </a:p>
+        </p:txBody>
       </p:sp>
       <p:sp>
         <p:nvSpPr>
@@ -2662,7 +2873,7 @@
         </p:nvSpPr>
         <p:spPr>
           <a:xfrm>
-            <a:off x="429768" y="1417320"/>
+            <a:off x="429768" y="1083564"/>
             <a:ext cx="1124712" cy="274320"/>
           </a:xfrm>
           <a:prstGeom prst="rect">
@@ -2675,11 +2886,11 @@
           <a:bodyPr wrap="square" lIns="0" tIns="0" rIns="0" bIns="0" rtlCol="0" anchor="ctr"/>
           <a:lstStyle/>
           <a:p>
-            <a:pPr algn="l" indent="0" marL="0">
+            <a:pPr marL="0" indent="0" algn="l">
               <a:buNone/>
             </a:pPr>
             <a:r>
-              <a:rPr lang="en-US" sz="1100" b="1" dirty="0">
+              <a:rPr lang="en-US" b="1" dirty="0">
                 <a:solidFill>
                   <a:srgbClr val="FFFFFF"/>
                 </a:solidFill>
@@ -2689,7 +2900,7 @@
               </a:rPr>
               <a:t>Era</a:t>
             </a:r>
-            <a:endParaRPr lang="en-US" sz="1600" dirty="0"/>
+            <a:endParaRPr lang="en-US" sz="2800" dirty="0"/>
           </a:p>
         </p:txBody>
       </p:sp>
@@ -2701,7 +2912,7 @@
         </p:nvSpPr>
         <p:spPr>
           <a:xfrm>
-            <a:off x="1600200" y="1371600"/>
+            <a:off x="1600200" y="1037844"/>
             <a:ext cx="1463040" cy="365760"/>
           </a:xfrm>
           <a:prstGeom prst="rect">
@@ -2712,6 +2923,13 @@
           </a:solidFill>
           <a:ln/>
         </p:spPr>
+        <p:txBody>
+          <a:bodyPr/>
+          <a:lstStyle/>
+          <a:p>
+            <a:endParaRPr lang="en-US" sz="3200"/>
+          </a:p>
+        </p:txBody>
       </p:sp>
       <p:sp>
         <p:nvSpPr>
@@ -2721,7 +2939,7 @@
         </p:nvSpPr>
         <p:spPr>
           <a:xfrm>
-            <a:off x="1664208" y="1417320"/>
+            <a:off x="1664208" y="1083564"/>
             <a:ext cx="1353312" cy="274320"/>
           </a:xfrm>
           <a:prstGeom prst="rect">
@@ -2734,11 +2952,11 @@
           <a:bodyPr wrap="square" lIns="0" tIns="0" rIns="0" bIns="0" rtlCol="0" anchor="ctr"/>
           <a:lstStyle/>
           <a:p>
-            <a:pPr algn="l" indent="0" marL="0">
+            <a:pPr marL="0" indent="0" algn="l">
               <a:buNone/>
             </a:pPr>
             <a:r>
-              <a:rPr lang="en-US" sz="1100" b="1" dirty="0">
+              <a:rPr lang="en-US" b="1" dirty="0">
                 <a:solidFill>
                   <a:srgbClr val="FFFFFF"/>
                 </a:solidFill>
@@ -2748,7 +2966,7 @@
               </a:rPr>
               <a:t>Text</a:t>
             </a:r>
-            <a:endParaRPr lang="en-US" sz="1600" dirty="0"/>
+            <a:endParaRPr lang="en-US" sz="2800" dirty="0"/>
           </a:p>
         </p:txBody>
       </p:sp>
@@ -2760,7 +2978,7 @@
         </p:nvSpPr>
         <p:spPr>
           <a:xfrm>
-            <a:off x="3063240" y="1371600"/>
+            <a:off x="3063240" y="1037844"/>
             <a:ext cx="2560320" cy="365760"/>
           </a:xfrm>
           <a:prstGeom prst="rect">
@@ -2771,6 +2989,13 @@
           </a:solidFill>
           <a:ln/>
         </p:spPr>
+        <p:txBody>
+          <a:bodyPr/>
+          <a:lstStyle/>
+          <a:p>
+            <a:endParaRPr lang="en-US" sz="3200"/>
+          </a:p>
+        </p:txBody>
       </p:sp>
       <p:sp>
         <p:nvSpPr>
@@ -2780,7 +3005,7 @@
         </p:nvSpPr>
         <p:spPr>
           <a:xfrm>
-            <a:off x="3127248" y="1417320"/>
+            <a:off x="3127248" y="1083564"/>
             <a:ext cx="2450592" cy="274320"/>
           </a:xfrm>
           <a:prstGeom prst="rect">
@@ -2793,11 +3018,11 @@
           <a:bodyPr wrap="square" lIns="0" tIns="0" rIns="0" bIns="0" rtlCol="0" anchor="ctr"/>
           <a:lstStyle/>
           <a:p>
-            <a:pPr algn="l" indent="0" marL="0">
+            <a:pPr marL="0" indent="0" algn="l">
               <a:buNone/>
             </a:pPr>
             <a:r>
-              <a:rPr lang="en-US" sz="1100" b="1" dirty="0">
+              <a:rPr lang="en-US" b="1" dirty="0">
                 <a:solidFill>
                   <a:srgbClr val="FFFFFF"/>
                 </a:solidFill>
@@ -2807,7 +3032,7 @@
               </a:rPr>
               <a:t>The test</a:t>
             </a:r>
-            <a:endParaRPr lang="en-US" sz="1600" dirty="0"/>
+            <a:endParaRPr lang="en-US" sz="2800" dirty="0"/>
           </a:p>
         </p:txBody>
       </p:sp>
@@ -2819,7 +3044,7 @@
         </p:nvSpPr>
         <p:spPr>
           <a:xfrm>
-            <a:off x="5623560" y="1371600"/>
+            <a:off x="5623560" y="1037844"/>
             <a:ext cx="3154680" cy="365760"/>
           </a:xfrm>
           <a:prstGeom prst="rect">
@@ -2830,6 +3055,13 @@
           </a:solidFill>
           <a:ln/>
         </p:spPr>
+        <p:txBody>
+          <a:bodyPr/>
+          <a:lstStyle/>
+          <a:p>
+            <a:endParaRPr lang="en-US" sz="3200"/>
+          </a:p>
+        </p:txBody>
       </p:sp>
       <p:sp>
         <p:nvSpPr>
@@ -2839,7 +3071,7 @@
         </p:nvSpPr>
         <p:spPr>
           <a:xfrm>
-            <a:off x="5687568" y="1417320"/>
+            <a:off x="5687568" y="1083564"/>
             <a:ext cx="3044952" cy="274320"/>
           </a:xfrm>
           <a:prstGeom prst="rect">
@@ -2852,11 +3084,11 @@
           <a:bodyPr wrap="square" lIns="0" tIns="0" rIns="0" bIns="0" rtlCol="0" anchor="ctr"/>
           <a:lstStyle/>
           <a:p>
-            <a:pPr algn="l" indent="0" marL="0">
+            <a:pPr marL="0" indent="0" algn="l">
               <a:buNone/>
             </a:pPr>
             <a:r>
-              <a:rPr lang="en-US" sz="1100" b="1" dirty="0">
+              <a:rPr lang="en-US" b="1" dirty="0">
                 <a:solidFill>
                   <a:srgbClr val="FFFFFF"/>
                 </a:solidFill>
@@ -2866,7 +3098,7 @@
               </a:rPr>
               <a:t>What it asked</a:t>
             </a:r>
-            <a:endParaRPr lang="en-US" sz="1600" dirty="0"/>
+            <a:endParaRPr lang="en-US" sz="2800" dirty="0"/>
           </a:p>
         </p:txBody>
       </p:sp>
@@ -2878,7 +3110,7 @@
         </p:nvSpPr>
         <p:spPr>
           <a:xfrm>
-            <a:off x="365760" y="1737360"/>
+            <a:off x="365760" y="1403604"/>
             <a:ext cx="1234440" cy="777240"/>
           </a:xfrm>
           <a:prstGeom prst="rect">
@@ -2894,6 +3126,13 @@
             <a:prstDash val="solid"/>
           </a:ln>
         </p:spPr>
+        <p:txBody>
+          <a:bodyPr/>
+          <a:lstStyle/>
+          <a:p>
+            <a:endParaRPr lang="en-US" sz="3200"/>
+          </a:p>
+        </p:txBody>
       </p:sp>
       <p:sp>
         <p:nvSpPr>
@@ -2903,7 +3142,7 @@
         </p:nvSpPr>
         <p:spPr>
           <a:xfrm>
-            <a:off x="429768" y="1773936"/>
+            <a:off x="429768" y="1440180"/>
             <a:ext cx="1124712" cy="722376"/>
           </a:xfrm>
           <a:prstGeom prst="rect">
@@ -2916,11 +3155,11 @@
           <a:bodyPr wrap="square" lIns="0" tIns="0" rIns="0" bIns="0" rtlCol="0" anchor="ctr"/>
           <a:lstStyle/>
           <a:p>
-            <a:pPr algn="l" indent="0" marL="0">
+            <a:pPr marL="0" indent="0" algn="l">
               <a:buNone/>
             </a:pPr>
             <a:r>
-              <a:rPr lang="en-US" sz="1150" b="1" dirty="0">
+              <a:rPr lang="en-US" b="1" dirty="0">
                 <a:solidFill>
                   <a:srgbClr val="1F497D"/>
                 </a:solidFill>
@@ -2930,7 +3169,7 @@
               </a:rPr>
               <a:t>Eden</a:t>
             </a:r>
-            <a:endParaRPr lang="en-US" sz="1600" dirty="0"/>
+            <a:endParaRPr lang="en-US" sz="2800" dirty="0"/>
           </a:p>
         </p:txBody>
       </p:sp>
@@ -2942,7 +3181,7 @@
         </p:nvSpPr>
         <p:spPr>
           <a:xfrm>
-            <a:off x="1600200" y="1737360"/>
+            <a:off x="1600200" y="1403604"/>
             <a:ext cx="1463040" cy="777240"/>
           </a:xfrm>
           <a:prstGeom prst="rect">
@@ -2958,6 +3197,13 @@
             <a:prstDash val="solid"/>
           </a:ln>
         </p:spPr>
+        <p:txBody>
+          <a:bodyPr/>
+          <a:lstStyle/>
+          <a:p>
+            <a:endParaRPr lang="en-US" sz="3200"/>
+          </a:p>
+        </p:txBody>
       </p:sp>
       <p:sp>
         <p:nvSpPr>
@@ -2967,7 +3213,7 @@
         </p:nvSpPr>
         <p:spPr>
           <a:xfrm>
-            <a:off x="1664208" y="1773936"/>
+            <a:off x="1664208" y="1440180"/>
             <a:ext cx="1353312" cy="722376"/>
           </a:xfrm>
           <a:prstGeom prst="rect">
@@ -2980,11 +3226,11 @@
           <a:bodyPr wrap="square" lIns="0" tIns="0" rIns="0" bIns="0" rtlCol="0" anchor="ctr"/>
           <a:lstStyle/>
           <a:p>
-            <a:pPr algn="l" indent="0" marL="0">
+            <a:pPr marL="0" indent="0" algn="l">
               <a:buNone/>
             </a:pPr>
             <a:r>
-              <a:rPr lang="en-US" sz="1000" i="1" dirty="0">
+              <a:rPr lang="en-US" sz="1400" i="1" dirty="0">
                 <a:solidFill>
                   <a:srgbClr val="000000"/>
                 </a:solidFill>
@@ -2994,7 +3240,7 @@
               </a:rPr>
               <a:t>Gen 2:16–17</a:t>
             </a:r>
-            <a:endParaRPr lang="en-US" sz="1600" dirty="0"/>
+            <a:endParaRPr lang="en-US" sz="2800" dirty="0"/>
           </a:p>
         </p:txBody>
       </p:sp>
@@ -3006,7 +3252,7 @@
         </p:nvSpPr>
         <p:spPr>
           <a:xfrm>
-            <a:off x="3063240" y="1737360"/>
+            <a:off x="3063240" y="1403604"/>
             <a:ext cx="2560320" cy="777240"/>
           </a:xfrm>
           <a:prstGeom prst="rect">
@@ -3022,6 +3268,13 @@
             <a:prstDash val="solid"/>
           </a:ln>
         </p:spPr>
+        <p:txBody>
+          <a:bodyPr/>
+          <a:lstStyle/>
+          <a:p>
+            <a:endParaRPr lang="en-US" sz="3200"/>
+          </a:p>
+        </p:txBody>
       </p:sp>
       <p:sp>
         <p:nvSpPr>
@@ -3031,7 +3284,7 @@
         </p:nvSpPr>
         <p:spPr>
           <a:xfrm>
-            <a:off x="3127248" y="1773936"/>
+            <a:off x="3127248" y="1440180"/>
             <a:ext cx="2450592" cy="722376"/>
           </a:xfrm>
           <a:prstGeom prst="rect">
@@ -3044,11 +3297,11 @@
           <a:bodyPr wrap="square" lIns="0" tIns="0" rIns="0" bIns="0" rtlCol="0" anchor="ctr"/>
           <a:lstStyle/>
           <a:p>
-            <a:pPr algn="l" indent="0" marL="0">
+            <a:pPr marL="0" indent="0" algn="l">
               <a:buNone/>
             </a:pPr>
             <a:r>
-              <a:rPr lang="en-US" sz="1050" dirty="0">
+              <a:rPr lang="en-US" sz="1600" dirty="0">
                 <a:solidFill>
                   <a:srgbClr val="000000"/>
                 </a:solidFill>
@@ -3058,7 +3311,7 @@
               </a:rPr>
               <a:t>The one forbidden tree</a:t>
             </a:r>
-            <a:endParaRPr lang="en-US" sz="1600" dirty="0"/>
+            <a:endParaRPr lang="en-US" sz="2800" dirty="0"/>
           </a:p>
         </p:txBody>
       </p:sp>
@@ -3070,7 +3323,7 @@
         </p:nvSpPr>
         <p:spPr>
           <a:xfrm>
-            <a:off x="5623560" y="1737360"/>
+            <a:off x="5623560" y="1403604"/>
             <a:ext cx="3154680" cy="777240"/>
           </a:xfrm>
           <a:prstGeom prst="rect">
@@ -3086,6 +3339,13 @@
             <a:prstDash val="solid"/>
           </a:ln>
         </p:spPr>
+        <p:txBody>
+          <a:bodyPr/>
+          <a:lstStyle/>
+          <a:p>
+            <a:endParaRPr lang="en-US" sz="3200"/>
+          </a:p>
+        </p:txBody>
       </p:sp>
       <p:sp>
         <p:nvSpPr>
@@ -3095,7 +3355,7 @@
         </p:nvSpPr>
         <p:spPr>
           <a:xfrm>
-            <a:off x="5687568" y="1773936"/>
+            <a:off x="5687568" y="1440180"/>
             <a:ext cx="3044952" cy="722376"/>
           </a:xfrm>
           <a:prstGeom prst="rect">
@@ -3108,11 +3368,11 @@
           <a:bodyPr wrap="square" lIns="0" tIns="0" rIns="0" bIns="0" rtlCol="0" anchor="ctr"/>
           <a:lstStyle/>
           <a:p>
-            <a:pPr algn="l" indent="0" marL="0">
+            <a:pPr marL="0" indent="0" algn="l">
               <a:buNone/>
             </a:pPr>
             <a:r>
-              <a:rPr lang="en-US" sz="1050" dirty="0">
+              <a:rPr lang="en-US" sz="1600" dirty="0">
                 <a:solidFill>
                   <a:srgbClr val="000000"/>
                 </a:solidFill>
@@ -3120,9 +3380,31 @@
                 <a:ea typeface="Arial" pitchFamily="34" charset="-122"/>
                 <a:cs typeface="Arial" pitchFamily="34" charset="-120"/>
               </a:rPr>
-              <a:t>Nearly costless to keep — a PURE test of trust in the word alone</a:t>
-            </a:r>
-            <a:endParaRPr lang="en-US" sz="1600" dirty="0"/>
+              <a:t>Nearly costless to keep </a:t>
+            </a:r>
+            <a:r>
+              <a:rPr lang="en-US" sz="1600">
+                <a:solidFill>
+                  <a:srgbClr val="000000"/>
+                </a:solidFill>
+                <a:latin typeface="Arial" pitchFamily="34" charset="0"/>
+                <a:ea typeface="Arial" pitchFamily="34" charset="-122"/>
+                <a:cs typeface="Arial" pitchFamily="34" charset="-120"/>
+              </a:rPr>
+              <a:t>→</a:t>
+            </a:r>
+            <a:r>
+              <a:rPr lang="en-US" sz="1600" dirty="0">
+                <a:solidFill>
+                  <a:srgbClr val="000000"/>
+                </a:solidFill>
+                <a:latin typeface="Arial" pitchFamily="34" charset="0"/>
+                <a:ea typeface="Arial" pitchFamily="34" charset="-122"/>
+                <a:cs typeface="Arial" pitchFamily="34" charset="-120"/>
+              </a:rPr>
+              <a:t> a PURE test of trust in the word alone</a:t>
+            </a:r>
+            <a:endParaRPr lang="en-US" sz="2800" dirty="0"/>
           </a:p>
         </p:txBody>
       </p:sp>
@@ -3134,7 +3416,7 @@
         </p:nvSpPr>
         <p:spPr>
           <a:xfrm>
-            <a:off x="365760" y="2514600"/>
+            <a:off x="365760" y="2180844"/>
             <a:ext cx="1234440" cy="777240"/>
           </a:xfrm>
           <a:prstGeom prst="rect">
@@ -3150,6 +3432,13 @@
             <a:prstDash val="solid"/>
           </a:ln>
         </p:spPr>
+        <p:txBody>
+          <a:bodyPr/>
+          <a:lstStyle/>
+          <a:p>
+            <a:endParaRPr lang="en-US" sz="3200"/>
+          </a:p>
+        </p:txBody>
       </p:sp>
       <p:sp>
         <p:nvSpPr>
@@ -3159,7 +3448,7 @@
         </p:nvSpPr>
         <p:spPr>
           <a:xfrm>
-            <a:off x="429768" y="2551176"/>
+            <a:off x="429768" y="2217420"/>
             <a:ext cx="1124712" cy="722376"/>
           </a:xfrm>
           <a:prstGeom prst="rect">
@@ -3172,11 +3461,11 @@
           <a:bodyPr wrap="square" lIns="0" tIns="0" rIns="0" bIns="0" rtlCol="0" anchor="ctr"/>
           <a:lstStyle/>
           <a:p>
-            <a:pPr algn="l" indent="0" marL="0">
+            <a:pPr marL="0" indent="0" algn="l">
               <a:buNone/>
             </a:pPr>
             <a:r>
-              <a:rPr lang="en-US" sz="1150" b="1" dirty="0">
+              <a:rPr lang="en-US" b="1" dirty="0">
                 <a:solidFill>
                   <a:srgbClr val="1F497D"/>
                 </a:solidFill>
@@ -3186,7 +3475,7 @@
               </a:rPr>
               <a:t>Noah</a:t>
             </a:r>
-            <a:endParaRPr lang="en-US" sz="1600" dirty="0"/>
+            <a:endParaRPr lang="en-US" sz="2800" dirty="0"/>
           </a:p>
         </p:txBody>
       </p:sp>
@@ -3198,7 +3487,7 @@
         </p:nvSpPr>
         <p:spPr>
           <a:xfrm>
-            <a:off x="1600200" y="2514600"/>
+            <a:off x="1600200" y="2180844"/>
             <a:ext cx="1463040" cy="777240"/>
           </a:xfrm>
           <a:prstGeom prst="rect">
@@ -3214,6 +3503,13 @@
             <a:prstDash val="solid"/>
           </a:ln>
         </p:spPr>
+        <p:txBody>
+          <a:bodyPr/>
+          <a:lstStyle/>
+          <a:p>
+            <a:endParaRPr lang="en-US" sz="3200"/>
+          </a:p>
+        </p:txBody>
       </p:sp>
       <p:sp>
         <p:nvSpPr>
@@ -3223,7 +3519,7 @@
         </p:nvSpPr>
         <p:spPr>
           <a:xfrm>
-            <a:off x="1664208" y="2551176"/>
+            <a:off x="1664208" y="2217420"/>
             <a:ext cx="1353312" cy="722376"/>
           </a:xfrm>
           <a:prstGeom prst="rect">
@@ -3236,11 +3532,11 @@
           <a:bodyPr wrap="square" lIns="0" tIns="0" rIns="0" bIns="0" rtlCol="0" anchor="ctr"/>
           <a:lstStyle/>
           <a:p>
-            <a:pPr algn="l" indent="0" marL="0">
+            <a:pPr marL="0" indent="0" algn="l">
               <a:buNone/>
             </a:pPr>
             <a:r>
-              <a:rPr lang="en-US" sz="1000" i="1" dirty="0">
+              <a:rPr lang="en-US" sz="1400" i="1" dirty="0">
                 <a:solidFill>
                   <a:srgbClr val="000000"/>
                 </a:solidFill>
@@ -3250,7 +3546,7 @@
               </a:rPr>
               <a:t>Heb 11:7</a:t>
             </a:r>
-            <a:endParaRPr lang="en-US" sz="1600" dirty="0"/>
+            <a:endParaRPr lang="en-US" sz="2800" dirty="0"/>
           </a:p>
         </p:txBody>
       </p:sp>
@@ -3262,7 +3558,7 @@
         </p:nvSpPr>
         <p:spPr>
           <a:xfrm>
-            <a:off x="3063240" y="2514600"/>
+            <a:off x="3063240" y="2180844"/>
             <a:ext cx="2560320" cy="777240"/>
           </a:xfrm>
           <a:prstGeom prst="rect">
@@ -3278,6 +3574,13 @@
             <a:prstDash val="solid"/>
           </a:ln>
         </p:spPr>
+        <p:txBody>
+          <a:bodyPr/>
+          <a:lstStyle/>
+          <a:p>
+            <a:endParaRPr lang="en-US" sz="3200"/>
+          </a:p>
+        </p:txBody>
       </p:sp>
       <p:sp>
         <p:nvSpPr>
@@ -3287,7 +3590,7 @@
         </p:nvSpPr>
         <p:spPr>
           <a:xfrm>
-            <a:off x="3127248" y="2551176"/>
+            <a:off x="3127248" y="2217420"/>
             <a:ext cx="2450592" cy="722376"/>
           </a:xfrm>
           <a:prstGeom prst="rect">
@@ -3300,11 +3603,11 @@
           <a:bodyPr wrap="square" lIns="0" tIns="0" rIns="0" bIns="0" rtlCol="0" anchor="ctr"/>
           <a:lstStyle/>
           <a:p>
-            <a:pPr algn="l" indent="0" marL="0">
+            <a:pPr marL="0" indent="0" algn="l">
               <a:buNone/>
             </a:pPr>
             <a:r>
-              <a:rPr lang="en-US" sz="1050" dirty="0">
+              <a:rPr lang="en-US" sz="1600" dirty="0">
                 <a:solidFill>
                   <a:srgbClr val="000000"/>
                 </a:solidFill>
@@ -3314,7 +3617,7 @@
               </a:rPr>
               <a:t>Build an ark for “things not yet seen”</a:t>
             </a:r>
-            <a:endParaRPr lang="en-US" sz="1600" dirty="0"/>
+            <a:endParaRPr lang="en-US" sz="2800" dirty="0"/>
           </a:p>
         </p:txBody>
       </p:sp>
@@ -3326,7 +3629,7 @@
         </p:nvSpPr>
         <p:spPr>
           <a:xfrm>
-            <a:off x="5623560" y="2514600"/>
+            <a:off x="5623560" y="2180844"/>
             <a:ext cx="3154680" cy="777240"/>
           </a:xfrm>
           <a:prstGeom prst="rect">
@@ -3342,6 +3645,13 @@
             <a:prstDash val="solid"/>
           </a:ln>
         </p:spPr>
+        <p:txBody>
+          <a:bodyPr/>
+          <a:lstStyle/>
+          <a:p>
+            <a:endParaRPr lang="en-US" sz="3200"/>
+          </a:p>
+        </p:txBody>
       </p:sp>
       <p:sp>
         <p:nvSpPr>
@@ -3351,7 +3661,7 @@
         </p:nvSpPr>
         <p:spPr>
           <a:xfrm>
-            <a:off x="5687568" y="2551176"/>
+            <a:off x="5687568" y="2217420"/>
             <a:ext cx="3044952" cy="722376"/>
           </a:xfrm>
           <a:prstGeom prst="rect">
@@ -3364,11 +3674,11 @@
           <a:bodyPr wrap="square" lIns="0" tIns="0" rIns="0" bIns="0" rtlCol="0" anchor="ctr"/>
           <a:lstStyle/>
           <a:p>
-            <a:pPr algn="l" indent="0" marL="0">
+            <a:pPr marL="0" indent="0" algn="l">
               <a:buNone/>
             </a:pPr>
             <a:r>
-              <a:rPr lang="en-US" sz="1050" dirty="0">
+              <a:rPr lang="en-US" sz="1600" dirty="0">
                 <a:solidFill>
                   <a:srgbClr val="000000"/>
                 </a:solidFill>
@@ -3378,7 +3688,7 @@
               </a:rPr>
               <a:t>A lifetime’s labor on a warning with no visible referent</a:t>
             </a:r>
-            <a:endParaRPr lang="en-US" sz="1600" dirty="0"/>
+            <a:endParaRPr lang="en-US" sz="2800" dirty="0"/>
           </a:p>
         </p:txBody>
       </p:sp>
@@ -3390,7 +3700,7 @@
         </p:nvSpPr>
         <p:spPr>
           <a:xfrm>
-            <a:off x="365760" y="3291840"/>
+            <a:off x="365760" y="2958084"/>
             <a:ext cx="1234440" cy="777240"/>
           </a:xfrm>
           <a:prstGeom prst="rect">
@@ -3406,6 +3716,13 @@
             <a:prstDash val="solid"/>
           </a:ln>
         </p:spPr>
+        <p:txBody>
+          <a:bodyPr/>
+          <a:lstStyle/>
+          <a:p>
+            <a:endParaRPr lang="en-US" sz="3200"/>
+          </a:p>
+        </p:txBody>
       </p:sp>
       <p:sp>
         <p:nvSpPr>
@@ -3415,7 +3732,7 @@
         </p:nvSpPr>
         <p:spPr>
           <a:xfrm>
-            <a:off x="429768" y="3328416"/>
+            <a:off x="429768" y="2994660"/>
             <a:ext cx="1124712" cy="722376"/>
           </a:xfrm>
           <a:prstGeom prst="rect">
@@ -3428,11 +3745,11 @@
           <a:bodyPr wrap="square" lIns="0" tIns="0" rIns="0" bIns="0" rtlCol="0" anchor="ctr"/>
           <a:lstStyle/>
           <a:p>
-            <a:pPr algn="l" indent="0" marL="0">
+            <a:pPr marL="0" indent="0" algn="l">
               <a:buNone/>
             </a:pPr>
             <a:r>
-              <a:rPr lang="en-US" sz="1150" b="1" dirty="0">
+              <a:rPr lang="en-US" b="1" dirty="0">
                 <a:solidFill>
                   <a:srgbClr val="1F497D"/>
                 </a:solidFill>
@@ -3442,7 +3759,7 @@
               </a:rPr>
               <a:t>Abraham</a:t>
             </a:r>
-            <a:endParaRPr lang="en-US" sz="1600" dirty="0"/>
+            <a:endParaRPr lang="en-US" sz="2800" dirty="0"/>
           </a:p>
         </p:txBody>
       </p:sp>
@@ -3454,7 +3771,7 @@
         </p:nvSpPr>
         <p:spPr>
           <a:xfrm>
-            <a:off x="1600200" y="3291840"/>
+            <a:off x="1600200" y="2958084"/>
             <a:ext cx="1463040" cy="777240"/>
           </a:xfrm>
           <a:prstGeom prst="rect">
@@ -3470,6 +3787,13 @@
             <a:prstDash val="solid"/>
           </a:ln>
         </p:spPr>
+        <p:txBody>
+          <a:bodyPr/>
+          <a:lstStyle/>
+          <a:p>
+            <a:endParaRPr lang="en-US" sz="3200"/>
+          </a:p>
+        </p:txBody>
       </p:sp>
       <p:sp>
         <p:nvSpPr>
@@ -3479,7 +3803,7 @@
         </p:nvSpPr>
         <p:spPr>
           <a:xfrm>
-            <a:off x="1664208" y="3328416"/>
+            <a:off x="1664208" y="2994660"/>
             <a:ext cx="1353312" cy="722376"/>
           </a:xfrm>
           <a:prstGeom prst="rect">
@@ -3492,11 +3816,11 @@
           <a:bodyPr wrap="square" lIns="0" tIns="0" rIns="0" bIns="0" rtlCol="0" anchor="ctr"/>
           <a:lstStyle/>
           <a:p>
-            <a:pPr algn="l" indent="0" marL="0">
+            <a:pPr marL="0" indent="0" algn="l">
               <a:buNone/>
             </a:pPr>
             <a:r>
-              <a:rPr lang="en-US" sz="1000" i="1" dirty="0">
+              <a:rPr lang="en-US" sz="1400" i="1" dirty="0">
                 <a:solidFill>
                   <a:srgbClr val="000000"/>
                 </a:solidFill>
@@ -3506,7 +3830,7 @@
               </a:rPr>
               <a:t>Gen 22:1</a:t>
             </a:r>
-            <a:endParaRPr lang="en-US" sz="1600" dirty="0"/>
+            <a:endParaRPr lang="en-US" sz="2800" dirty="0"/>
           </a:p>
         </p:txBody>
       </p:sp>
@@ -3518,7 +3842,7 @@
         </p:nvSpPr>
         <p:spPr>
           <a:xfrm>
-            <a:off x="3063240" y="3291840"/>
+            <a:off x="3063240" y="2958084"/>
             <a:ext cx="2560320" cy="777240"/>
           </a:xfrm>
           <a:prstGeom prst="rect">
@@ -3534,6 +3858,13 @@
             <a:prstDash val="solid"/>
           </a:ln>
         </p:spPr>
+        <p:txBody>
+          <a:bodyPr/>
+          <a:lstStyle/>
+          <a:p>
+            <a:endParaRPr lang="en-US" sz="3200"/>
+          </a:p>
+        </p:txBody>
       </p:sp>
       <p:sp>
         <p:nvSpPr>
@@ -3543,7 +3874,7 @@
         </p:nvSpPr>
         <p:spPr>
           <a:xfrm>
-            <a:off x="3127248" y="3328416"/>
+            <a:off x="3127248" y="2994660"/>
             <a:ext cx="2450592" cy="722376"/>
           </a:xfrm>
           <a:prstGeom prst="rect">
@@ -3556,11 +3887,11 @@
           <a:bodyPr wrap="square" lIns="0" tIns="0" rIns="0" bIns="0" rtlCol="0" anchor="ctr"/>
           <a:lstStyle/>
           <a:p>
-            <a:pPr algn="l" indent="0" marL="0">
+            <a:pPr marL="0" indent="0" algn="l">
               <a:buNone/>
             </a:pPr>
             <a:r>
-              <a:rPr lang="en-US" sz="1050" dirty="0">
+              <a:rPr lang="en-US" sz="1600" dirty="0">
                 <a:solidFill>
                   <a:srgbClr val="000000"/>
                 </a:solidFill>
@@ -3568,9 +3899,31 @@
                 <a:ea typeface="Arial" pitchFamily="34" charset="-122"/>
                 <a:cs typeface="Arial" pitchFamily="34" charset="-120"/>
               </a:rPr>
-              <a:t>“God tested Abraham” — offer Isaac</a:t>
-            </a:r>
-            <a:endParaRPr lang="en-US" sz="1600" dirty="0"/>
+              <a:t>“God tested Abraham” </a:t>
+            </a:r>
+            <a:r>
+              <a:rPr lang="en-US" sz="1600">
+                <a:solidFill>
+                  <a:srgbClr val="000000"/>
+                </a:solidFill>
+                <a:latin typeface="Arial" pitchFamily="34" charset="0"/>
+                <a:ea typeface="Arial" pitchFamily="34" charset="-122"/>
+                <a:cs typeface="Arial" pitchFamily="34" charset="-120"/>
+              </a:rPr>
+              <a:t>→</a:t>
+            </a:r>
+            <a:r>
+              <a:rPr lang="en-US" sz="1600" dirty="0">
+                <a:solidFill>
+                  <a:srgbClr val="000000"/>
+                </a:solidFill>
+                <a:latin typeface="Arial" pitchFamily="34" charset="0"/>
+                <a:ea typeface="Arial" pitchFamily="34" charset="-122"/>
+                <a:cs typeface="Arial" pitchFamily="34" charset="-120"/>
+              </a:rPr>
+              <a:t> offer Isaac</a:t>
+            </a:r>
+            <a:endParaRPr lang="en-US" sz="2800" dirty="0"/>
           </a:p>
         </p:txBody>
       </p:sp>
@@ -3582,7 +3935,7 @@
         </p:nvSpPr>
         <p:spPr>
           <a:xfrm>
-            <a:off x="5623560" y="3291840"/>
+            <a:off x="5623560" y="2958084"/>
             <a:ext cx="3154680" cy="777240"/>
           </a:xfrm>
           <a:prstGeom prst="rect">
@@ -3598,6 +3951,13 @@
             <a:prstDash val="solid"/>
           </a:ln>
         </p:spPr>
+        <p:txBody>
+          <a:bodyPr/>
+          <a:lstStyle/>
+          <a:p>
+            <a:endParaRPr lang="en-US" sz="3200"/>
+          </a:p>
+        </p:txBody>
       </p:sp>
       <p:sp>
         <p:nvSpPr>
@@ -3607,7 +3967,7 @@
         </p:nvSpPr>
         <p:spPr>
           <a:xfrm>
-            <a:off x="5687568" y="3328416"/>
+            <a:off x="5687568" y="2994660"/>
             <a:ext cx="3044952" cy="722376"/>
           </a:xfrm>
           <a:prstGeom prst="rect">
@@ -3620,11 +3980,11 @@
           <a:bodyPr wrap="square" lIns="0" tIns="0" rIns="0" bIns="0" rtlCol="0" anchor="ctr"/>
           <a:lstStyle/>
           <a:p>
-            <a:pPr algn="l" indent="0" marL="0">
+            <a:pPr marL="0" indent="0" algn="l">
               <a:buNone/>
             </a:pPr>
             <a:r>
-              <a:rPr lang="en-US" sz="1050" dirty="0">
+              <a:rPr lang="en-US" sz="1600" dirty="0">
                 <a:solidFill>
                   <a:srgbClr val="000000"/>
                 </a:solidFill>
@@ -3632,9 +3992,31 @@
                 <a:ea typeface="Arial" pitchFamily="34" charset="-122"/>
                 <a:cs typeface="Arial" pitchFamily="34" charset="-120"/>
               </a:rPr>
-              <a:t>Surrender the very promise — the first EXPLICIT test</a:t>
-            </a:r>
-            <a:endParaRPr lang="en-US" sz="1600" dirty="0"/>
+              <a:t>Surrender the very promise </a:t>
+            </a:r>
+            <a:r>
+              <a:rPr lang="en-US" sz="1600">
+                <a:solidFill>
+                  <a:srgbClr val="000000"/>
+                </a:solidFill>
+                <a:latin typeface="Arial" pitchFamily="34" charset="0"/>
+                <a:ea typeface="Arial" pitchFamily="34" charset="-122"/>
+                <a:cs typeface="Arial" pitchFamily="34" charset="-120"/>
+              </a:rPr>
+              <a:t>→</a:t>
+            </a:r>
+            <a:r>
+              <a:rPr lang="en-US" sz="1600" dirty="0">
+                <a:solidFill>
+                  <a:srgbClr val="000000"/>
+                </a:solidFill>
+                <a:latin typeface="Arial" pitchFamily="34" charset="0"/>
+                <a:ea typeface="Arial" pitchFamily="34" charset="-122"/>
+                <a:cs typeface="Arial" pitchFamily="34" charset="-120"/>
+              </a:rPr>
+              <a:t> the first EXPLICIT test</a:t>
+            </a:r>
+            <a:endParaRPr lang="en-US" sz="2800" dirty="0"/>
           </a:p>
         </p:txBody>
       </p:sp>
@@ -3646,7 +4028,7 @@
         </p:nvSpPr>
         <p:spPr>
           <a:xfrm>
-            <a:off x="365760" y="4069080"/>
+            <a:off x="365760" y="3735324"/>
             <a:ext cx="1234440" cy="777240"/>
           </a:xfrm>
           <a:prstGeom prst="rect">
@@ -3662,6 +4044,13 @@
             <a:prstDash val="solid"/>
           </a:ln>
         </p:spPr>
+        <p:txBody>
+          <a:bodyPr/>
+          <a:lstStyle/>
+          <a:p>
+            <a:endParaRPr lang="en-US" sz="3200"/>
+          </a:p>
+        </p:txBody>
       </p:sp>
       <p:sp>
         <p:nvSpPr>
@@ -3671,7 +4060,7 @@
         </p:nvSpPr>
         <p:spPr>
           <a:xfrm>
-            <a:off x="429768" y="4105656"/>
+            <a:off x="429768" y="3771900"/>
             <a:ext cx="1124712" cy="722376"/>
           </a:xfrm>
           <a:prstGeom prst="rect">
@@ -3684,11 +4073,11 @@
           <a:bodyPr wrap="square" lIns="0" tIns="0" rIns="0" bIns="0" rtlCol="0" anchor="ctr"/>
           <a:lstStyle/>
           <a:p>
-            <a:pPr algn="l" indent="0" marL="0">
+            <a:pPr marL="0" indent="0" algn="l">
               <a:buNone/>
             </a:pPr>
             <a:r>
-              <a:rPr lang="en-US" sz="1150" b="1" dirty="0">
+              <a:rPr lang="en-US" b="1" dirty="0">
                 <a:solidFill>
                   <a:srgbClr val="1F497D"/>
                 </a:solidFill>
@@ -3698,7 +4087,7 @@
               </a:rPr>
               <a:t>Moses</a:t>
             </a:r>
-            <a:endParaRPr lang="en-US" sz="1600" dirty="0"/>
+            <a:endParaRPr lang="en-US" sz="2800" dirty="0"/>
           </a:p>
         </p:txBody>
       </p:sp>
@@ -3710,7 +4099,7 @@
         </p:nvSpPr>
         <p:spPr>
           <a:xfrm>
-            <a:off x="1600200" y="4069080"/>
+            <a:off x="1600200" y="3735324"/>
             <a:ext cx="1463040" cy="777240"/>
           </a:xfrm>
           <a:prstGeom prst="rect">
@@ -3726,6 +4115,13 @@
             <a:prstDash val="solid"/>
           </a:ln>
         </p:spPr>
+        <p:txBody>
+          <a:bodyPr/>
+          <a:lstStyle/>
+          <a:p>
+            <a:endParaRPr lang="en-US" sz="3200"/>
+          </a:p>
+        </p:txBody>
       </p:sp>
       <p:sp>
         <p:nvSpPr>
@@ -3735,7 +4131,7 @@
         </p:nvSpPr>
         <p:spPr>
           <a:xfrm>
-            <a:off x="1664208" y="4105656"/>
+            <a:off x="1664208" y="3771900"/>
             <a:ext cx="1353312" cy="722376"/>
           </a:xfrm>
           <a:prstGeom prst="rect">
@@ -3748,11 +4144,11 @@
           <a:bodyPr wrap="square" lIns="0" tIns="0" rIns="0" bIns="0" rtlCol="0" anchor="ctr"/>
           <a:lstStyle/>
           <a:p>
-            <a:pPr algn="l" indent="0" marL="0">
+            <a:pPr marL="0" indent="0" algn="l">
               <a:buNone/>
             </a:pPr>
             <a:r>
-              <a:rPr lang="en-US" sz="1000" i="1" dirty="0">
+              <a:rPr lang="en-US" sz="1400" i="1" dirty="0">
                 <a:solidFill>
                   <a:srgbClr val="000000"/>
                 </a:solidFill>
@@ -3762,7 +4158,7 @@
               </a:rPr>
               <a:t>Ex 16:4; Deut 8:2</a:t>
             </a:r>
-            <a:endParaRPr lang="en-US" sz="1600" dirty="0"/>
+            <a:endParaRPr lang="en-US" sz="2800" dirty="0"/>
           </a:p>
         </p:txBody>
       </p:sp>
@@ -3774,7 +4170,7 @@
         </p:nvSpPr>
         <p:spPr>
           <a:xfrm>
-            <a:off x="3063240" y="4069080"/>
+            <a:off x="3063240" y="3735324"/>
             <a:ext cx="2560320" cy="777240"/>
           </a:xfrm>
           <a:prstGeom prst="rect">
@@ -3790,6 +4186,13 @@
             <a:prstDash val="solid"/>
           </a:ln>
         </p:spPr>
+        <p:txBody>
+          <a:bodyPr/>
+          <a:lstStyle/>
+          <a:p>
+            <a:endParaRPr lang="en-US" sz="3200"/>
+          </a:p>
+        </p:txBody>
       </p:sp>
       <p:sp>
         <p:nvSpPr>
@@ -3799,7 +4202,7 @@
         </p:nvSpPr>
         <p:spPr>
           <a:xfrm>
-            <a:off x="3127248" y="4105656"/>
+            <a:off x="3127248" y="3771900"/>
             <a:ext cx="2450592" cy="722376"/>
           </a:xfrm>
           <a:prstGeom prst="rect">
@@ -3812,11 +4215,11 @@
           <a:bodyPr wrap="square" lIns="0" tIns="0" rIns="0" bIns="0" rtlCol="0" anchor="ctr"/>
           <a:lstStyle/>
           <a:p>
-            <a:pPr algn="l" indent="0" marL="0">
+            <a:pPr marL="0" indent="0" algn="l">
               <a:buNone/>
             </a:pPr>
             <a:r>
-              <a:rPr lang="en-US" sz="1050" dirty="0">
+              <a:rPr lang="en-US" sz="1600" dirty="0">
                 <a:solidFill>
                   <a:srgbClr val="000000"/>
                 </a:solidFill>
@@ -3826,7 +4229,7 @@
               </a:rPr>
               <a:t>Manna, Sabbath, the wilderness</a:t>
             </a:r>
-            <a:endParaRPr lang="en-US" sz="1600" dirty="0"/>
+            <a:endParaRPr lang="en-US" sz="2800" dirty="0"/>
           </a:p>
         </p:txBody>
       </p:sp>
@@ -3838,7 +4241,7 @@
         </p:nvSpPr>
         <p:spPr>
           <a:xfrm>
-            <a:off x="5623560" y="4069080"/>
+            <a:off x="5623560" y="3735324"/>
             <a:ext cx="3154680" cy="777240"/>
           </a:xfrm>
           <a:prstGeom prst="rect">
@@ -3854,6 +4257,13 @@
             <a:prstDash val="solid"/>
           </a:ln>
         </p:spPr>
+        <p:txBody>
+          <a:bodyPr/>
+          <a:lstStyle/>
+          <a:p>
+            <a:endParaRPr lang="en-US" sz="3200"/>
+          </a:p>
+        </p:txBody>
       </p:sp>
       <p:sp>
         <p:nvSpPr>
@@ -3863,7 +4273,7 @@
         </p:nvSpPr>
         <p:spPr>
           <a:xfrm>
-            <a:off x="5687568" y="4105656"/>
+            <a:off x="5687568" y="3771900"/>
             <a:ext cx="3044952" cy="722376"/>
           </a:xfrm>
           <a:prstGeom prst="rect">
@@ -3876,11 +4286,11 @@
           <a:bodyPr wrap="square" lIns="0" tIns="0" rIns="0" bIns="0" rtlCol="0" anchor="ctr"/>
           <a:lstStyle/>
           <a:p>
-            <a:pPr algn="l" indent="0" marL="0">
+            <a:pPr marL="0" indent="0" algn="l">
               <a:buNone/>
             </a:pPr>
             <a:r>
-              <a:rPr lang="en-US" sz="1050" dirty="0">
+              <a:rPr lang="en-US" sz="1600" dirty="0">
                 <a:solidFill>
                   <a:srgbClr val="000000"/>
                 </a:solidFill>
@@ -3888,9 +4298,31 @@
                 <a:ea typeface="Arial" pitchFamily="34" charset="-122"/>
                 <a:cs typeface="Arial" pitchFamily="34" charset="-120"/>
               </a:rPr>
-              <a:t>Testing becomes covenant POLICY — “will they walk in my law or not?”</a:t>
-            </a:r>
-            <a:endParaRPr lang="en-US" sz="1600" dirty="0"/>
+              <a:t>Testing becomes covenant POLICY </a:t>
+            </a:r>
+            <a:r>
+              <a:rPr lang="en-US" sz="1600">
+                <a:solidFill>
+                  <a:srgbClr val="000000"/>
+                </a:solidFill>
+                <a:latin typeface="Arial" pitchFamily="34" charset="0"/>
+                <a:ea typeface="Arial" pitchFamily="34" charset="-122"/>
+                <a:cs typeface="Arial" pitchFamily="34" charset="-120"/>
+              </a:rPr>
+              <a:t>→</a:t>
+            </a:r>
+            <a:r>
+              <a:rPr lang="en-US" sz="1600" dirty="0">
+                <a:solidFill>
+                  <a:srgbClr val="000000"/>
+                </a:solidFill>
+                <a:latin typeface="Arial" pitchFamily="34" charset="0"/>
+                <a:ea typeface="Arial" pitchFamily="34" charset="-122"/>
+                <a:cs typeface="Arial" pitchFamily="34" charset="-120"/>
+              </a:rPr>
+              <a:t> “will they walk in my law or not?”</a:t>
+            </a:r>
+            <a:endParaRPr lang="en-US" sz="2800" dirty="0"/>
           </a:p>
         </p:txBody>
       </p:sp>
@@ -3902,7 +4334,7 @@
         </p:nvSpPr>
         <p:spPr>
           <a:xfrm>
-            <a:off x="365760" y="4846320"/>
+            <a:off x="365760" y="4512564"/>
             <a:ext cx="1234440" cy="777240"/>
           </a:xfrm>
           <a:prstGeom prst="rect">
@@ -3918,6 +4350,13 @@
             <a:prstDash val="solid"/>
           </a:ln>
         </p:spPr>
+        <p:txBody>
+          <a:bodyPr/>
+          <a:lstStyle/>
+          <a:p>
+            <a:endParaRPr lang="en-US" sz="3200"/>
+          </a:p>
+        </p:txBody>
       </p:sp>
       <p:sp>
         <p:nvSpPr>
@@ -3927,7 +4366,7 @@
         </p:nvSpPr>
         <p:spPr>
           <a:xfrm>
-            <a:off x="429768" y="4882896"/>
+            <a:off x="429768" y="4549140"/>
             <a:ext cx="1124712" cy="722376"/>
           </a:xfrm>
           <a:prstGeom prst="rect">
@@ -3940,11 +4379,11 @@
           <a:bodyPr wrap="square" lIns="0" tIns="0" rIns="0" bIns="0" rtlCol="0" anchor="ctr"/>
           <a:lstStyle/>
           <a:p>
-            <a:pPr algn="l" indent="0" marL="0">
+            <a:pPr marL="0" indent="0" algn="l">
               <a:buNone/>
             </a:pPr>
             <a:r>
-              <a:rPr lang="en-US" sz="1150" b="1" dirty="0">
+              <a:rPr lang="en-US" b="1" dirty="0">
                 <a:solidFill>
                   <a:srgbClr val="1F497D"/>
                 </a:solidFill>
@@ -3954,7 +4393,7 @@
               </a:rPr>
               <a:t>Kings</a:t>
             </a:r>
-            <a:endParaRPr lang="en-US" sz="1600" dirty="0"/>
+            <a:endParaRPr lang="en-US" sz="2800" dirty="0"/>
           </a:p>
         </p:txBody>
       </p:sp>
@@ -3966,7 +4405,7 @@
         </p:nvSpPr>
         <p:spPr>
           <a:xfrm>
-            <a:off x="1600200" y="4846320"/>
+            <a:off x="1600200" y="4512564"/>
             <a:ext cx="1463040" cy="777240"/>
           </a:xfrm>
           <a:prstGeom prst="rect">
@@ -3982,6 +4421,13 @@
             <a:prstDash val="solid"/>
           </a:ln>
         </p:spPr>
+        <p:txBody>
+          <a:bodyPr/>
+          <a:lstStyle/>
+          <a:p>
+            <a:endParaRPr lang="en-US" sz="3200"/>
+          </a:p>
+        </p:txBody>
       </p:sp>
       <p:sp>
         <p:nvSpPr>
@@ -3991,7 +4437,7 @@
         </p:nvSpPr>
         <p:spPr>
           <a:xfrm>
-            <a:off x="1664208" y="4882896"/>
+            <a:off x="1664208" y="4549140"/>
             <a:ext cx="1353312" cy="722376"/>
           </a:xfrm>
           <a:prstGeom prst="rect">
@@ -4004,11 +4450,11 @@
           <a:bodyPr wrap="square" lIns="0" tIns="0" rIns="0" bIns="0" rtlCol="0" anchor="ctr"/>
           <a:lstStyle/>
           <a:p>
-            <a:pPr algn="l" indent="0" marL="0">
+            <a:pPr marL="0" indent="0" algn="l">
               <a:buNone/>
             </a:pPr>
             <a:r>
-              <a:rPr lang="en-US" sz="1000" i="1" dirty="0">
+              <a:rPr lang="en-US" sz="1400" i="1" dirty="0">
                 <a:solidFill>
                   <a:srgbClr val="000000"/>
                 </a:solidFill>
@@ -4018,7 +4464,7 @@
               </a:rPr>
               <a:t>2 Chr 32:31</a:t>
             </a:r>
-            <a:endParaRPr lang="en-US" sz="1600" dirty="0"/>
+            <a:endParaRPr lang="en-US" sz="2800" dirty="0"/>
           </a:p>
         </p:txBody>
       </p:sp>
@@ -4030,7 +4476,7 @@
         </p:nvSpPr>
         <p:spPr>
           <a:xfrm>
-            <a:off x="3063240" y="4846320"/>
+            <a:off x="3063240" y="4512564"/>
             <a:ext cx="2560320" cy="777240"/>
           </a:xfrm>
           <a:prstGeom prst="rect">
@@ -4046,6 +4492,13 @@
             <a:prstDash val="solid"/>
           </a:ln>
         </p:spPr>
+        <p:txBody>
+          <a:bodyPr/>
+          <a:lstStyle/>
+          <a:p>
+            <a:endParaRPr lang="en-US" sz="3200"/>
+          </a:p>
+        </p:txBody>
       </p:sp>
       <p:sp>
         <p:nvSpPr>
@@ -4055,7 +4508,7 @@
         </p:nvSpPr>
         <p:spPr>
           <a:xfrm>
-            <a:off x="3127248" y="4882896"/>
+            <a:off x="3127248" y="4549140"/>
             <a:ext cx="2450592" cy="722376"/>
           </a:xfrm>
           <a:prstGeom prst="rect">
@@ -4068,11 +4521,11 @@
           <a:bodyPr wrap="square" lIns="0" tIns="0" rIns="0" bIns="0" rtlCol="0" anchor="ctr"/>
           <a:lstStyle/>
           <a:p>
-            <a:pPr algn="l" indent="0" marL="0">
+            <a:pPr marL="0" indent="0" algn="l">
               <a:buNone/>
             </a:pPr>
             <a:r>
-              <a:rPr lang="en-US" sz="1050" dirty="0">
+              <a:rPr lang="en-US" sz="1600" dirty="0">
                 <a:solidFill>
                   <a:srgbClr val="000000"/>
                 </a:solidFill>
@@ -4082,7 +4535,7 @@
               </a:rPr>
               <a:t>Hezekiah “left alone… to know his true motives”</a:t>
             </a:r>
-            <a:endParaRPr lang="en-US" sz="1600" dirty="0"/>
+            <a:endParaRPr lang="en-US" sz="2800" dirty="0"/>
           </a:p>
         </p:txBody>
       </p:sp>
@@ -4094,7 +4547,7 @@
         </p:nvSpPr>
         <p:spPr>
           <a:xfrm>
-            <a:off x="5623560" y="4846320"/>
+            <a:off x="5623560" y="4512564"/>
             <a:ext cx="3154680" cy="777240"/>
           </a:xfrm>
           <a:prstGeom prst="rect">
@@ -4110,6 +4563,13 @@
             <a:prstDash val="solid"/>
           </a:ln>
         </p:spPr>
+        <p:txBody>
+          <a:bodyPr/>
+          <a:lstStyle/>
+          <a:p>
+            <a:endParaRPr lang="en-US" sz="3200"/>
+          </a:p>
+        </p:txBody>
       </p:sp>
       <p:sp>
         <p:nvSpPr>
@@ -4119,7 +4579,7 @@
         </p:nvSpPr>
         <p:spPr>
           <a:xfrm>
-            <a:off x="5687568" y="4882896"/>
+            <a:off x="5687568" y="4549140"/>
             <a:ext cx="3044952" cy="722376"/>
           </a:xfrm>
           <a:prstGeom prst="rect">
@@ -4132,11 +4592,11 @@
           <a:bodyPr wrap="square" lIns="0" tIns="0" rIns="0" bIns="0" rtlCol="0" anchor="ctr"/>
           <a:lstStyle/>
           <a:p>
-            <a:pPr algn="l" indent="0" marL="0">
+            <a:pPr marL="0" indent="0" algn="l">
               <a:buNone/>
             </a:pPr>
             <a:r>
-              <a:rPr lang="en-US" sz="1050" dirty="0">
+              <a:rPr lang="en-US" sz="1600" dirty="0">
                 <a:solidFill>
                   <a:srgbClr val="000000"/>
                 </a:solidFill>
@@ -4144,9 +4604,31 @@
                 <a:ea typeface="Arial" pitchFamily="34" charset="-122"/>
                 <a:cs typeface="Arial" pitchFamily="34" charset="-120"/>
               </a:rPr>
-              <a:t>The test moves inward — the heart when unsupervised</a:t>
-            </a:r>
-            <a:endParaRPr lang="en-US" sz="1600" dirty="0"/>
+              <a:t>The test moves inward </a:t>
+            </a:r>
+            <a:r>
+              <a:rPr lang="en-US" sz="1600">
+                <a:solidFill>
+                  <a:srgbClr val="000000"/>
+                </a:solidFill>
+                <a:latin typeface="Arial" pitchFamily="34" charset="0"/>
+                <a:ea typeface="Arial" pitchFamily="34" charset="-122"/>
+                <a:cs typeface="Arial" pitchFamily="34" charset="-120"/>
+              </a:rPr>
+              <a:t>→</a:t>
+            </a:r>
+            <a:r>
+              <a:rPr lang="en-US" sz="1600" dirty="0">
+                <a:solidFill>
+                  <a:srgbClr val="000000"/>
+                </a:solidFill>
+                <a:latin typeface="Arial" pitchFamily="34" charset="0"/>
+                <a:ea typeface="Arial" pitchFamily="34" charset="-122"/>
+                <a:cs typeface="Arial" pitchFamily="34" charset="-120"/>
+              </a:rPr>
+              <a:t> the heart when unsupervised</a:t>
+            </a:r>
+            <a:endParaRPr lang="en-US" sz="2800" dirty="0"/>
           </a:p>
         </p:txBody>
       </p:sp>
@@ -4158,8 +4640,8 @@
         </p:nvSpPr>
         <p:spPr>
           <a:xfrm>
-            <a:off x="365760" y="5806440"/>
-            <a:ext cx="8412480" cy="777240"/>
+            <a:off x="365760" y="5678423"/>
+            <a:ext cx="8412480" cy="933391"/>
           </a:xfrm>
           <a:prstGeom prst="rect">
             <a:avLst/>
@@ -4171,11 +4653,11 @@
           <a:bodyPr wrap="square" lIns="0" tIns="0" rIns="0" bIns="0" rtlCol="0" anchor="t"/>
           <a:lstStyle/>
           <a:p>
-            <a:pPr algn="l" indent="0" marL="0">
+            <a:pPr marL="0" indent="0" algn="l">
               <a:buNone/>
             </a:pPr>
             <a:r>
-              <a:rPr lang="en-US" sz="1400" b="1" dirty="0">
+              <a:rPr lang="en-US" sz="2000" b="1" dirty="0">
                 <a:solidFill>
                   <a:srgbClr val="1F497D"/>
                 </a:solidFill>
@@ -4185,11 +4667,8 @@
               </a:rPr>
               <a:t>One shape, every era: </a:t>
             </a:r>
-            <a:pPr algn="l" indent="0" marL="0">
-              <a:buNone/>
-            </a:pPr>
-            <a:r>
-              <a:rPr lang="en-US" sz="1300" dirty="0">
+            <a:r>
+              <a:rPr lang="en-US" dirty="0">
                 <a:solidFill>
                   <a:srgbClr val="000000"/>
                 </a:solidFill>
@@ -4199,7 +4678,7 @@
               </a:rPr>
               <a:t>God speaks → faith is asked to trust the word against sight, appetite, fear, or delay → obedience makes the invisible faith visible. The eras change; the shape does not.</a:t>
             </a:r>
-            <a:endParaRPr lang="en-US" sz="1600" dirty="0"/>
+            <a:endParaRPr lang="en-US" sz="2400" dirty="0"/>
           </a:p>
         </p:txBody>
       </p:sp>
@@ -4249,7 +4728,7 @@
           <a:bodyPr wrap="square" lIns="0" tIns="0" rIns="0" bIns="0" rtlCol="0" anchor="t"/>
           <a:lstStyle/>
           <a:p>
-            <a:pPr algn="l" indent="0" marL="0">
+            <a:pPr marL="0" indent="0" algn="l">
               <a:buNone/>
             </a:pPr>
             <a:r>
@@ -4288,11 +4767,11 @@
           <a:bodyPr wrap="square" lIns="0" tIns="0" rIns="0" bIns="0" rtlCol="0" anchor="t"/>
           <a:lstStyle/>
           <a:p>
-            <a:pPr algn="l" indent="0" marL="0">
+            <a:pPr marL="0" indent="0" algn="l">
               <a:buNone/>
             </a:pPr>
             <a:r>
-              <a:rPr lang="en-US" sz="1300" b="1" dirty="0">
+              <a:rPr lang="en-US" sz="2000" b="1" dirty="0">
                 <a:solidFill>
                   <a:srgbClr val="4F81BD"/>
                 </a:solidFill>
@@ -4300,9 +4779,9 @@
                 <a:ea typeface="Arial" pitchFamily="34" charset="-122"/>
                 <a:cs typeface="Arial" pitchFamily="34" charset="-120"/>
               </a:rPr>
-              <a:t>Forty days answering to forty years — and passing</a:t>
-            </a:r>
-            <a:endParaRPr lang="en-US" sz="1600" dirty="0"/>
+              <a:t>Forty days answering to forty years → and passing</a:t>
+            </a:r>
+            <a:endParaRPr lang="en-US" sz="2800" dirty="0"/>
           </a:p>
         </p:txBody>
       </p:sp>
@@ -4327,11 +4806,11 @@
           <a:bodyPr wrap="square" lIns="0" tIns="0" rIns="0" bIns="0" rtlCol="0" anchor="t"/>
           <a:lstStyle/>
           <a:p>
-            <a:pPr algn="l" indent="0" marL="0">
+            <a:pPr marL="0" indent="0" algn="l">
               <a:buNone/>
             </a:pPr>
             <a:r>
-              <a:rPr lang="en-US" sz="1500" b="1" i="1" dirty="0">
+              <a:rPr lang="en-US" b="1" i="1" dirty="0">
                 <a:solidFill>
                   <a:srgbClr val="000000"/>
                 </a:solidFill>
@@ -4341,11 +4820,8 @@
               </a:rPr>
               <a:t>“Then Jesus was led by the Spirit into the wilderness to be tempted by the devil. After he had fasted forty days and forty nights he was famished.” </a:t>
             </a:r>
-            <a:pPr algn="l" indent="0" marL="0">
-              <a:buNone/>
-            </a:pPr>
-            <a:r>
-              <a:rPr lang="en-US" sz="1400" b="1" dirty="0">
+            <a:r>
+              <a:rPr lang="en-US" b="1" dirty="0">
                 <a:solidFill>
                   <a:srgbClr val="000000"/>
                 </a:solidFill>
@@ -4355,7 +4831,7 @@
               </a:rPr>
               <a:t>(Matthew 4:1–2)</a:t>
             </a:r>
-            <a:endParaRPr lang="en-US" sz="1600" dirty="0"/>
+            <a:endParaRPr lang="en-US" sz="2000" dirty="0"/>
           </a:p>
         </p:txBody>
       </p:sp>
@@ -4367,8 +4843,8 @@
         </p:nvSpPr>
         <p:spPr>
           <a:xfrm>
-            <a:off x="548640" y="2148840"/>
-            <a:ext cx="8046720" cy="1417320"/>
+            <a:off x="548640" y="2148839"/>
+            <a:ext cx="8002507" cy="2051371"/>
           </a:xfrm>
           <a:prstGeom prst="roundRect">
             <a:avLst>
@@ -4385,6 +4861,13 @@
             <a:prstDash val="solid"/>
           </a:ln>
         </p:spPr>
+        <p:txBody>
+          <a:bodyPr/>
+          <a:lstStyle/>
+          <a:p>
+            <a:endParaRPr lang="en-US"/>
+          </a:p>
+        </p:txBody>
       </p:sp>
       <p:sp>
         <p:nvSpPr>
@@ -4394,8 +4877,8 @@
         </p:nvSpPr>
         <p:spPr>
           <a:xfrm>
-            <a:off x="731520" y="2267712"/>
-            <a:ext cx="7680960" cy="1188720"/>
+            <a:off x="731520" y="2267711"/>
+            <a:ext cx="7680960" cy="1771726"/>
           </a:xfrm>
           <a:prstGeom prst="rect">
             <a:avLst/>
@@ -4407,11 +4890,11 @@
           <a:bodyPr wrap="square" lIns="0" tIns="0" rIns="0" bIns="0" rtlCol="0" anchor="t"/>
           <a:lstStyle/>
           <a:p>
-            <a:pPr algn="l" indent="0" marL="0">
+            <a:pPr marL="0" indent="0" algn="l">
               <a:buNone/>
             </a:pPr>
             <a:r>
-              <a:rPr lang="en-US" sz="1400" b="1" dirty="0">
+              <a:rPr lang="en-US" sz="2000" b="1" dirty="0">
                 <a:solidFill>
                   <a:srgbClr val="1F497D"/>
                 </a:solidFill>
@@ -4419,14 +4902,117 @@
                 <a:ea typeface="Arial" pitchFamily="34" charset="-122"/>
                 <a:cs typeface="Arial" pitchFamily="34" charset="-120"/>
               </a:rPr>
-              <a:t>Israel: 40 years in the wilderness — tested, and failed.    Jesus: 40 days in the wilderness — tested, and passed.
+              <a:t>Israel: 40 years in the wilderness → tested, and failed.    Jesus: 40 days in the wilderness → tested, and passed.
 </a:t>
             </a:r>
-            <a:pPr algn="l" indent="0" marL="0">
+            <a:r>
+              <a:rPr lang="en-US" dirty="0">
+                <a:solidFill>
+                  <a:srgbClr val="000000"/>
+                </a:solidFill>
+                <a:latin typeface="Arial" pitchFamily="34" charset="0"/>
+                <a:ea typeface="Arial" pitchFamily="34" charset="-122"/>
+                <a:cs typeface="Arial" pitchFamily="34" charset="-120"/>
+              </a:rPr>
+              <a:t>Every answer Jesus gives comes from Deuteronomy 6–8 → the very passages that interpret Israel’s wilderness testing:
+• </a:t>
+            </a:r>
+            <a:r>
+              <a:rPr lang="en-US" i="1" dirty="0">
+                <a:solidFill>
+                  <a:srgbClr val="000000"/>
+                </a:solidFill>
+                <a:latin typeface="Arial" pitchFamily="34" charset="0"/>
+                <a:ea typeface="Arial" pitchFamily="34" charset="-122"/>
+                <a:cs typeface="Arial" pitchFamily="34" charset="-120"/>
+              </a:rPr>
+              <a:t>“Man does not live by bread alone” </a:t>
+            </a:r>
+            <a:r>
+              <a:rPr lang="en-US" dirty="0">
+                <a:solidFill>
+                  <a:srgbClr val="000000"/>
+                </a:solidFill>
+                <a:latin typeface="Arial" pitchFamily="34" charset="0"/>
+                <a:ea typeface="Arial" pitchFamily="34" charset="-122"/>
+                <a:cs typeface="Arial" pitchFamily="34" charset="-120"/>
+              </a:rPr>
+              <a:t>(Deut 8:3)   • </a:t>
+            </a:r>
+            <a:r>
+              <a:rPr lang="en-US" i="1" dirty="0">
+                <a:solidFill>
+                  <a:srgbClr val="000000"/>
+                </a:solidFill>
+                <a:latin typeface="Arial" pitchFamily="34" charset="0"/>
+                <a:ea typeface="Arial" pitchFamily="34" charset="-122"/>
+                <a:cs typeface="Arial" pitchFamily="34" charset="-120"/>
+              </a:rPr>
+              <a:t>“Worship the Lord your God” </a:t>
+            </a:r>
+            <a:r>
+              <a:rPr lang="en-US" dirty="0">
+                <a:solidFill>
+                  <a:srgbClr val="000000"/>
+                </a:solidFill>
+                <a:latin typeface="Arial" pitchFamily="34" charset="0"/>
+                <a:ea typeface="Arial" pitchFamily="34" charset="-122"/>
+                <a:cs typeface="Arial" pitchFamily="34" charset="-120"/>
+              </a:rPr>
+              <a:t>(Deut 6:13)   • </a:t>
+            </a:r>
+            <a:r>
+              <a:rPr lang="en-US" i="1" dirty="0">
+                <a:solidFill>
+                  <a:srgbClr val="000000"/>
+                </a:solidFill>
+                <a:latin typeface="Arial" pitchFamily="34" charset="0"/>
+                <a:ea typeface="Arial" pitchFamily="34" charset="-122"/>
+                <a:cs typeface="Arial" pitchFamily="34" charset="-120"/>
+              </a:rPr>
+              <a:t>“Do not put the Lord to the test” </a:t>
+            </a:r>
+            <a:r>
+              <a:rPr lang="en-US" dirty="0">
+                <a:solidFill>
+                  <a:srgbClr val="000000"/>
+                </a:solidFill>
+                <a:latin typeface="Arial" pitchFamily="34" charset="0"/>
+                <a:ea typeface="Arial" pitchFamily="34" charset="-122"/>
+                <a:cs typeface="Arial" pitchFamily="34" charset="-120"/>
+              </a:rPr>
+              <a:t>(Deut 6:16)</a:t>
+            </a:r>
+            <a:endParaRPr lang="en-US" sz="2400" dirty="0"/>
+          </a:p>
+        </p:txBody>
+      </p:sp>
+      <p:sp>
+        <p:nvSpPr>
+          <p:cNvPr id="7" name="d2"/>
+          <p:cNvSpPr txBox="1"/>
+          <p:nvPr/>
+        </p:nvSpPr>
+        <p:spPr>
+          <a:xfrm>
+            <a:off x="365760" y="4416552"/>
+            <a:ext cx="8412480" cy="607624"/>
+          </a:xfrm>
+          <a:prstGeom prst="rect">
+            <a:avLst/>
+          </a:prstGeom>
+          <a:noFill/>
+          <a:ln/>
+        </p:spPr>
+        <p:txBody>
+          <a:bodyPr wrap="square" lIns="0" tIns="0" rIns="0" bIns="0" rtlCol="0" anchor="t"/>
+          <a:lstStyle/>
+          <a:p>
+            <a:pPr marL="0" indent="0" algn="l">
               <a:buNone/>
             </a:pPr>
             <a:r>
-              <a:rPr lang="en-US" sz="1250" dirty="0">
+              <a:rPr lang="en-US" dirty="0">
                 <a:solidFill>
                   <a:srgbClr val="000000"/>
                 </a:solidFill>
@@ -4434,14 +5020,49 @@
                 <a:ea typeface="Arial" pitchFamily="34" charset="-122"/>
                 <a:cs typeface="Arial" pitchFamily="34" charset="-120"/>
               </a:rPr>
-              <a:t>Every answer Jesus gives comes from Deuteronomy 6–8 — the very passages that interpret Israel’s wilderness testing:
-</a:t>
-            </a:r>
-            <a:pPr algn="l" indent="0" marL="0">
+              <a:t>He is deliberately retaking Israel’s failed exam → as the true Israel, the true Son → </a:t>
+            </a:r>
+            <a:r>
+              <a:rPr lang="en-US" b="1" dirty="0">
+                <a:solidFill>
+                  <a:srgbClr val="1F497D"/>
+                </a:solidFill>
+                <a:latin typeface="Arial" pitchFamily="34" charset="0"/>
+                <a:ea typeface="Arial" pitchFamily="34" charset="-122"/>
+                <a:cs typeface="Arial" pitchFamily="34" charset="-120"/>
+              </a:rPr>
+              <a:t>and He passes it clean (Heb 4:15: tempted in every way, yet without sin).</a:t>
+            </a:r>
+            <a:endParaRPr lang="en-US" sz="2000" dirty="0"/>
+          </a:p>
+        </p:txBody>
+      </p:sp>
+      <p:sp>
+        <p:nvSpPr>
+          <p:cNvPr id="8" name="d3"/>
+          <p:cNvSpPr txBox="1"/>
+          <p:nvPr/>
+        </p:nvSpPr>
+        <p:spPr>
+          <a:xfrm>
+            <a:off x="365760" y="5142042"/>
+            <a:ext cx="8412480" cy="1463040"/>
+          </a:xfrm>
+          <a:prstGeom prst="rect">
+            <a:avLst/>
+          </a:prstGeom>
+          <a:noFill/>
+          <a:ln/>
+        </p:spPr>
+        <p:txBody>
+          <a:bodyPr wrap="square" lIns="0" tIns="0" rIns="0" bIns="0" rtlCol="0" anchor="t"/>
+          <a:lstStyle/>
+          <a:p>
+            <a:pPr marL="0" indent="0" algn="l">
               <a:buNone/>
             </a:pPr>
             <a:r>
-              <a:rPr lang="en-US" sz="1200" dirty="0">
+              <a:rPr lang="en-US" b="1" dirty="0">
                 <a:solidFill>
                   <a:srgbClr val="000000"/>
                 </a:solidFill>
@@ -4449,38 +5070,39 @@
                 <a:ea typeface="Arial" pitchFamily="34" charset="-122"/>
                 <a:cs typeface="Arial" pitchFamily="34" charset="-120"/>
               </a:rPr>
-              <a:t>• “Man does not live by bread alone” (Deut 8:3)   • “Worship the Lord your God” (Deut 6:13)   • “Do not put the Lord to the test” (Deut 6:16)</a:t>
-            </a:r>
-            <a:endParaRPr lang="en-US" sz="1600" dirty="0"/>
-          </a:p>
-        </p:txBody>
-      </p:sp>
-      <p:sp>
-        <p:nvSpPr>
-          <p:cNvPr id="7" name="d2"/>
-          <p:cNvSpPr txBox="1"/>
-          <p:nvPr/>
-        </p:nvSpPr>
-        <p:spPr>
-          <a:xfrm>
-            <a:off x="365760" y="3703320"/>
-            <a:ext cx="8412480" cy="868680"/>
-          </a:xfrm>
-          <a:prstGeom prst="rect">
-            <a:avLst/>
-          </a:prstGeom>
-          <a:noFill/>
-          <a:ln/>
-        </p:spPr>
-        <p:txBody>
-          <a:bodyPr wrap="square" lIns="0" tIns="0" rIns="0" bIns="0" rtlCol="0" anchor="t"/>
-          <a:lstStyle/>
-          <a:p>
-            <a:pPr algn="l" indent="0" marL="0">
+              <a:t>And the passed test becomes the ground of our salvation:
+</a:t>
+            </a:r>
+            <a:r>
+              <a:rPr lang="en-US" b="1" i="1" dirty="0">
+                <a:solidFill>
+                  <a:srgbClr val="000000"/>
+                </a:solidFill>
+                <a:latin typeface="Arial" pitchFamily="34" charset="0"/>
+                <a:ea typeface="Arial" pitchFamily="34" charset="-122"/>
+                <a:cs typeface="Arial" pitchFamily="34" charset="-120"/>
+              </a:rPr>
+              <a:t>“Although he was a son, he learned obedience through the things he suffered. And by being perfected in this way, he became the source of eternal salvation to all who obey him.” </a:t>
+            </a:r>
+            <a:r>
+              <a:rPr lang="en-US" sz="1600" b="1" dirty="0">
+                <a:solidFill>
+                  <a:srgbClr val="000000"/>
+                </a:solidFill>
+                <a:latin typeface="Arial" pitchFamily="34" charset="0"/>
+                <a:ea typeface="Arial" pitchFamily="34" charset="-122"/>
+                <a:cs typeface="Arial" pitchFamily="34" charset="-120"/>
+              </a:rPr>
+              <a:t>(Hebrews 5:8–9)</a:t>
+            </a:r>
+            <a:endParaRPr lang="en-US" sz="2000" dirty="0"/>
+          </a:p>
+          <a:p>
+            <a:pPr marL="0" indent="0" algn="l">
               <a:buNone/>
             </a:pPr>
             <a:r>
-              <a:rPr lang="en-US" sz="1450" dirty="0">
+              <a:rPr lang="en-US" sz="1600" i="1" dirty="0">
                 <a:solidFill>
                   <a:srgbClr val="000000"/>
                 </a:solidFill>
@@ -4488,111 +5110,9 @@
                 <a:ea typeface="Arial" pitchFamily="34" charset="-122"/>
                 <a:cs typeface="Arial" pitchFamily="34" charset="-120"/>
               </a:rPr>
-              <a:t>He is deliberately retaking Israel’s failed exam — as the true Israel, the true Son — </a:t>
-            </a:r>
-            <a:pPr algn="l" indent="0" marL="0">
-              <a:buNone/>
-            </a:pPr>
-            <a:r>
-              <a:rPr lang="en-US" sz="1450" b="1" dirty="0">
-                <a:solidFill>
-                  <a:srgbClr val="1F497D"/>
-                </a:solidFill>
-                <a:latin typeface="Arial" pitchFamily="34" charset="0"/>
-                <a:ea typeface="Arial" pitchFamily="34" charset="-122"/>
-                <a:cs typeface="Arial" pitchFamily="34" charset="-120"/>
-              </a:rPr>
-              <a:t>and He passes it clean (Heb 4:15: tempted in every way, yet without sin).</a:t>
-            </a:r>
-            <a:endParaRPr lang="en-US" sz="1600" dirty="0"/>
-          </a:p>
-        </p:txBody>
-      </p:sp>
-      <p:sp>
-        <p:nvSpPr>
-          <p:cNvPr id="8" name="d3"/>
-          <p:cNvSpPr txBox="1"/>
-          <p:nvPr/>
-        </p:nvSpPr>
-        <p:spPr>
-          <a:xfrm>
-            <a:off x="365760" y="4663440"/>
-            <a:ext cx="8412480" cy="1463040"/>
-          </a:xfrm>
-          <a:prstGeom prst="rect">
-            <a:avLst/>
-          </a:prstGeom>
-          <a:noFill/>
-          <a:ln/>
-        </p:spPr>
-        <p:txBody>
-          <a:bodyPr wrap="square" lIns="0" tIns="0" rIns="0" bIns="0" rtlCol="0" anchor="t"/>
-          <a:lstStyle/>
-          <a:p>
-            <a:pPr algn="l" indent="0" marL="0">
-              <a:buNone/>
-            </a:pPr>
-            <a:r>
-              <a:rPr lang="en-US" sz="1400" b="1" dirty="0">
-                <a:solidFill>
-                  <a:srgbClr val="000000"/>
-                </a:solidFill>
-                <a:latin typeface="Arial" pitchFamily="34" charset="0"/>
-                <a:ea typeface="Arial" pitchFamily="34" charset="-122"/>
-                <a:cs typeface="Arial" pitchFamily="34" charset="-120"/>
-              </a:rPr>
-              <a:t>And the passed test becomes the ground of our salvation:
-</a:t>
-            </a:r>
-            <a:pPr algn="l" indent="0" marL="0">
-              <a:buNone/>
-            </a:pPr>
-            <a:r>
-              <a:rPr lang="en-US" sz="1450" b="1" i="1" dirty="0">
-                <a:solidFill>
-                  <a:srgbClr val="000000"/>
-                </a:solidFill>
-                <a:latin typeface="Arial" pitchFamily="34" charset="0"/>
-                <a:ea typeface="Arial" pitchFamily="34" charset="-122"/>
-                <a:cs typeface="Arial" pitchFamily="34" charset="-120"/>
-              </a:rPr>
-              <a:t>“Although he was a son, he learned obedience through the things he suffered. And by being perfected in this way, he became the source of eternal salvation to all who obey him.” </a:t>
-            </a:r>
-            <a:pPr algn="l" indent="0" marL="0">
-              <a:buNone/>
-            </a:pPr>
-            <a:r>
-              <a:rPr lang="en-US" sz="1350" b="1" dirty="0">
-                <a:solidFill>
-                  <a:srgbClr val="000000"/>
-                </a:solidFill>
-                <a:latin typeface="Arial" pitchFamily="34" charset="0"/>
-                <a:ea typeface="Arial" pitchFamily="34" charset="-122"/>
-                <a:cs typeface="Arial" pitchFamily="34" charset="-120"/>
-              </a:rPr>
-              <a:t>(Hebrews 5:8–9)</a:t>
-            </a:r>
-            <a:pPr algn="l" indent="0" marL="0">
-              <a:buNone/>
-            </a:pPr>
-            <a:endParaRPr lang="en-US" sz="1600" dirty="0"/>
-          </a:p>
-          <a:p>
-            <a:pPr algn="l" indent="0" marL="0">
-              <a:buNone/>
-            </a:pPr>
-            <a:r>
-              <a:rPr lang="en-US" sz="1350" i="1" dirty="0">
-                <a:solidFill>
-                  <a:srgbClr val="000000"/>
-                </a:solidFill>
-                <a:latin typeface="Arial" pitchFamily="34" charset="0"/>
-                <a:ea typeface="Arial" pitchFamily="34" charset="-122"/>
-                <a:cs typeface="Arial" pitchFamily="34" charset="-120"/>
-              </a:rPr>
-              <a:t>The tested Son, having passed, becomes salvation’s source — for “all who obey him.”</a:t>
-            </a:r>
-            <a:endParaRPr lang="en-US" sz="1600" dirty="0"/>
+              <a:t>The tested Son, having passed, becomes salvation’s source → for “all who obey him.”</a:t>
+            </a:r>
+            <a:endParaRPr lang="en-US" sz="2000" dirty="0"/>
           </a:p>
         </p:txBody>
       </p:sp>
@@ -4610,26 +5130,26 @@
               <p:cTn id="2" dur="indefinite" nodeType="mainSeq">
                 <p:childTnLst>
                   <p:par>
-                    <p:cTn id="7" fill="hold">
+                    <p:cTn id="3" fill="hold">
                       <p:stCondLst>
                         <p:cond delay="indefinite"/>
                       </p:stCondLst>
                       <p:childTnLst>
                         <p:par>
-                          <p:cTn id="8" fill="hold">
+                          <p:cTn id="4" fill="hold">
                             <p:stCondLst>
                               <p:cond delay="0"/>
                             </p:stCondLst>
                             <p:childTnLst>
                               <p:par>
-                                <p:cTn id="3" presetID="42" presetClass="entr" presetSubtype="0" fill="hold" grpId="0" nodeType="clickEffect">
+                                <p:cTn id="5" presetID="42" presetClass="entr" presetSubtype="0" fill="hold" nodeType="clickEffect">
                                   <p:stCondLst>
                                     <p:cond delay="0"/>
                                   </p:stCondLst>
                                   <p:childTnLst>
                                     <p:set>
                                       <p:cBhvr>
-                                        <p:cTn id="4" dur="1" fill="hold">
+                                        <p:cTn id="6" dur="1" fill="hold">
                                           <p:stCondLst>
                                             <p:cond delay="0"/>
                                           </p:stCondLst>
@@ -4647,7 +5167,7 @@
                                     </p:set>
                                     <p:animEffect transition="in" filter="fade">
                                       <p:cBhvr>
-                                        <p:cTn id="5" dur="1000"/>
+                                        <p:cTn id="7" dur="1000"/>
                                         <p:tgtEl>
                                           <p:spTgt spid="4"/>
                                         </p:tgtEl>
@@ -4655,7 +5175,7 @@
                                     </p:animEffect>
                                     <p:anim calcmode="lin" valueType="num">
                                       <p:cBhvr>
-                                        <p:cTn id="6" dur="1000" fill="hold"/>
+                                        <p:cTn id="8" dur="1000" fill="hold"/>
                                         <p:tgtEl>
                                           <p:spTgt spid="4"/>
                                         </p:tgtEl>
@@ -4686,26 +5206,26 @@
                     </p:cTn>
                   </p:par>
                   <p:par>
-                    <p:cTn id="17" fill="hold">
+                    <p:cTn id="9" fill="hold">
                       <p:stCondLst>
                         <p:cond delay="indefinite"/>
                       </p:stCondLst>
                       <p:childTnLst>
                         <p:par>
-                          <p:cTn id="18" fill="hold">
+                          <p:cTn id="10" fill="hold">
                             <p:stCondLst>
                               <p:cond delay="0"/>
                             </p:stCondLst>
                             <p:childTnLst>
                               <p:par>
-                                <p:cTn id="9" presetID="42" presetClass="entr" presetSubtype="0" fill="hold" grpId="0" nodeType="clickEffect">
+                                <p:cTn id="11" presetID="42" presetClass="entr" presetSubtype="0" fill="hold" nodeType="clickEffect">
                                   <p:stCondLst>
                                     <p:cond delay="0"/>
                                   </p:stCondLst>
                                   <p:childTnLst>
                                     <p:set>
                                       <p:cBhvr>
-                                        <p:cTn id="10" dur="1" fill="hold">
+                                        <p:cTn id="12" dur="1" fill="hold">
                                           <p:stCondLst>
                                             <p:cond delay="0"/>
                                           </p:stCondLst>
@@ -4723,7 +5243,7 @@
                                     </p:set>
                                     <p:animEffect transition="in" filter="fade">
                                       <p:cBhvr>
-                                        <p:cTn id="11" dur="1000"/>
+                                        <p:cTn id="13" dur="1000"/>
                                         <p:tgtEl>
                                           <p:spTgt spid="5"/>
                                         </p:tgtEl>
@@ -4731,7 +5251,7 @@
                                     </p:animEffect>
                                     <p:anim calcmode="lin" valueType="num">
                                       <p:cBhvr>
-                                        <p:cTn id="12" dur="1000" fill="hold"/>
+                                        <p:cTn id="14" dur="1000" fill="hold"/>
                                         <p:tgtEl>
                                           <p:spTgt spid="5"/>
                                         </p:tgtEl>
@@ -4756,14 +5276,14 @@
                                 </p:cTn>
                               </p:par>
                               <p:par>
-                                <p:cTn id="13" presetID="42" presetClass="entr" presetSubtype="0" fill="hold" grpId="0" nodeType="withEffect">
+                                <p:cTn id="15" presetID="42" presetClass="entr" presetSubtype="0" fill="hold" nodeType="withEffect">
                                   <p:stCondLst>
                                     <p:cond delay="0"/>
                                   </p:stCondLst>
                                   <p:childTnLst>
                                     <p:set>
                                       <p:cBhvr>
-                                        <p:cTn id="14" dur="1" fill="hold">
+                                        <p:cTn id="16" dur="1" fill="hold">
                                           <p:stCondLst>
                                             <p:cond delay="0"/>
                                           </p:stCondLst>
@@ -4781,7 +5301,7 @@
                                     </p:set>
                                     <p:animEffect transition="in" filter="fade">
                                       <p:cBhvr>
-                                        <p:cTn id="15" dur="1000"/>
+                                        <p:cTn id="17" dur="1000"/>
                                         <p:tgtEl>
                                           <p:spTgt spid="6"/>
                                         </p:tgtEl>
@@ -4789,7 +5309,7 @@
                                     </p:animEffect>
                                     <p:anim calcmode="lin" valueType="num">
                                       <p:cBhvr>
-                                        <p:cTn id="16" dur="1000" fill="hold"/>
+                                        <p:cTn id="18" dur="1000" fill="hold"/>
                                         <p:tgtEl>
                                           <p:spTgt spid="6"/>
                                         </p:tgtEl>
@@ -4820,26 +5340,26 @@
                     </p:cTn>
                   </p:par>
                   <p:par>
-                    <p:cTn id="23" fill="hold">
+                    <p:cTn id="19" fill="hold">
                       <p:stCondLst>
                         <p:cond delay="indefinite"/>
                       </p:stCondLst>
                       <p:childTnLst>
                         <p:par>
-                          <p:cTn id="24" fill="hold">
+                          <p:cTn id="20" fill="hold">
                             <p:stCondLst>
                               <p:cond delay="0"/>
                             </p:stCondLst>
                             <p:childTnLst>
                               <p:par>
-                                <p:cTn id="19" presetID="42" presetClass="entr" presetSubtype="0" fill="hold" grpId="0" nodeType="clickEffect">
+                                <p:cTn id="21" presetID="42" presetClass="entr" presetSubtype="0" fill="hold" nodeType="clickEffect">
                                   <p:stCondLst>
                                     <p:cond delay="0"/>
                                   </p:stCondLst>
                                   <p:childTnLst>
                                     <p:set>
                                       <p:cBhvr>
-                                        <p:cTn id="20" dur="1" fill="hold">
+                                        <p:cTn id="22" dur="1" fill="hold">
                                           <p:stCondLst>
                                             <p:cond delay="0"/>
                                           </p:stCondLst>
@@ -4857,7 +5377,7 @@
                                     </p:set>
                                     <p:animEffect transition="in" filter="fade">
                                       <p:cBhvr>
-                                        <p:cTn id="21" dur="1000"/>
+                                        <p:cTn id="23" dur="1000"/>
                                         <p:tgtEl>
                                           <p:spTgt spid="7"/>
                                         </p:tgtEl>
@@ -4865,7 +5385,7 @@
                                     </p:animEffect>
                                     <p:anim calcmode="lin" valueType="num">
                                       <p:cBhvr>
-                                        <p:cTn id="22" dur="1000" fill="hold"/>
+                                        <p:cTn id="24" dur="1000" fill="hold"/>
                                         <p:tgtEl>
                                           <p:spTgt spid="7"/>
                                         </p:tgtEl>
@@ -4896,26 +5416,26 @@
                     </p:cTn>
                   </p:par>
                   <p:par>
-                    <p:cTn id="29" fill="hold">
+                    <p:cTn id="25" fill="hold">
                       <p:stCondLst>
                         <p:cond delay="indefinite"/>
                       </p:stCondLst>
                       <p:childTnLst>
                         <p:par>
-                          <p:cTn id="30" fill="hold">
+                          <p:cTn id="26" fill="hold">
                             <p:stCondLst>
                               <p:cond delay="0"/>
                             </p:stCondLst>
                             <p:childTnLst>
                               <p:par>
-                                <p:cTn id="25" presetID="42" presetClass="entr" presetSubtype="0" fill="hold" grpId="0" nodeType="clickEffect">
+                                <p:cTn id="27" presetID="42" presetClass="entr" presetSubtype="0" fill="hold" nodeType="clickEffect">
                                   <p:stCondLst>
                                     <p:cond delay="0"/>
                                   </p:stCondLst>
                                   <p:childTnLst>
                                     <p:set>
                                       <p:cBhvr>
-                                        <p:cTn id="26" dur="1" fill="hold">
+                                        <p:cTn id="28" dur="1" fill="hold">
                                           <p:stCondLst>
                                             <p:cond delay="0"/>
                                           </p:stCondLst>
@@ -4933,7 +5453,7 @@
                                     </p:set>
                                     <p:animEffect transition="in" filter="fade">
                                       <p:cBhvr>
-                                        <p:cTn id="27" dur="1000"/>
+                                        <p:cTn id="29" dur="1000"/>
                                         <p:tgtEl>
                                           <p:spTgt spid="8"/>
                                         </p:tgtEl>
@@ -4941,7 +5461,7 @@
                                     </p:animEffect>
                                     <p:anim calcmode="lin" valueType="num">
                                       <p:cBhvr>
-                                        <p:cTn id="28" dur="1000" fill="hold"/>
+                                        <p:cTn id="30" dur="1000" fill="hold"/>
                                         <p:tgtEl>
                                           <p:spTgt spid="8"/>
                                         </p:tgtEl>
@@ -5034,7 +5554,7 @@
           <a:bodyPr wrap="square" lIns="0" tIns="0" rIns="0" bIns="0" rtlCol="0" anchor="t"/>
           <a:lstStyle/>
           <a:p>
-            <a:pPr algn="l" indent="0" marL="0">
+            <a:pPr marL="0" indent="0" algn="l">
               <a:buNone/>
             </a:pPr>
             <a:r>
@@ -5073,11 +5593,11 @@
           <a:bodyPr wrap="square" lIns="0" tIns="0" rIns="0" bIns="0" rtlCol="0" anchor="t"/>
           <a:lstStyle/>
           <a:p>
-            <a:pPr algn="l" indent="0" marL="0">
+            <a:pPr marL="0" indent="0" algn="l">
               <a:buNone/>
             </a:pPr>
             <a:r>
-              <a:rPr lang="en-US" sz="1300" b="1" dirty="0">
+              <a:rPr lang="en-US" sz="2000" b="1" dirty="0">
                 <a:solidFill>
                   <a:srgbClr val="4F81BD"/>
                 </a:solidFill>
@@ -5087,7 +5607,7 @@
               </a:rPr>
               <a:t>The church’s tests sit on the far side of a passed exam</a:t>
             </a:r>
-            <a:endParaRPr lang="en-US" sz="1600" dirty="0"/>
+            <a:endParaRPr lang="en-US" sz="2800" dirty="0"/>
           </a:p>
         </p:txBody>
       </p:sp>
@@ -5099,8 +5619,8 @@
         </p:nvSpPr>
         <p:spPr>
           <a:xfrm>
-            <a:off x="365760" y="1234440"/>
-            <a:ext cx="8412480" cy="1005840"/>
+            <a:off x="365760" y="1097281"/>
+            <a:ext cx="8412480" cy="1142999"/>
           </a:xfrm>
           <a:prstGeom prst="rect">
             <a:avLst/>
@@ -5112,11 +5632,11 @@
           <a:bodyPr wrap="square" lIns="0" tIns="0" rIns="0" bIns="0" rtlCol="0" anchor="t"/>
           <a:lstStyle/>
           <a:p>
-            <a:pPr algn="l" indent="0" marL="0">
+            <a:pPr marL="0" indent="0" algn="l">
               <a:buNone/>
             </a:pPr>
             <a:r>
-              <a:rPr lang="en-US" sz="1600" b="1" dirty="0">
+              <a:rPr lang="en-US" sz="2000" b="1" dirty="0">
                 <a:solidFill>
                   <a:srgbClr val="1F497D"/>
                 </a:solidFill>
@@ -5124,13 +5644,49 @@
                 <a:ea typeface="Arial" pitchFamily="34" charset="-122"/>
                 <a:cs typeface="Arial" pitchFamily="34" charset="-120"/>
               </a:rPr>
-              <a:t>Christ has already taken the decisive exam — Adam’s, Israel’s, ours — and passed. </a:t>
-            </a:r>
-            <a:pPr algn="l" indent="0" marL="0">
+              <a:t>Christ has already taken the decisive exam → Adam’s, Israel’s, ours → and passed. </a:t>
+            </a:r>
+            <a:r>
+              <a:rPr lang="en-US" dirty="0">
+                <a:solidFill>
+                  <a:srgbClr val="000000"/>
+                </a:solidFill>
+                <a:latin typeface="Arial" pitchFamily="34" charset="0"/>
+                <a:ea typeface="Arial" pitchFamily="34" charset="-122"/>
+                <a:cs typeface="Arial" pitchFamily="34" charset="-120"/>
+              </a:rPr>
+              <a:t>So, the believer’s tests are no longer probation to earn a standing. They are the proving and refining of a faith that already rests on His finished work.</a:t>
+            </a:r>
+            <a:endParaRPr lang="en-US" sz="2000" dirty="0"/>
+          </a:p>
+        </p:txBody>
+      </p:sp>
+      <p:sp>
+        <p:nvSpPr>
+          <p:cNvPr id="5" name="e2"/>
+          <p:cNvSpPr txBox="1"/>
+          <p:nvPr/>
+        </p:nvSpPr>
+        <p:spPr>
+          <a:xfrm>
+            <a:off x="365760" y="2498598"/>
+            <a:ext cx="8412480" cy="1143000"/>
+          </a:xfrm>
+          <a:prstGeom prst="rect">
+            <a:avLst/>
+          </a:prstGeom>
+          <a:noFill/>
+          <a:ln/>
+        </p:spPr>
+        <p:txBody>
+          <a:bodyPr wrap="square" lIns="0" tIns="0" rIns="0" bIns="0" rtlCol="0" anchor="t"/>
+          <a:lstStyle/>
+          <a:p>
+            <a:pPr marL="0" indent="0" algn="l">
               <a:buNone/>
             </a:pPr>
             <a:r>
-              <a:rPr lang="en-US" sz="1500" dirty="0">
+              <a:rPr lang="en-US" b="1" dirty="0">
                 <a:solidFill>
                   <a:srgbClr val="000000"/>
                 </a:solidFill>
@@ -5138,22 +5694,78 @@
                 <a:ea typeface="Arial" pitchFamily="34" charset="-122"/>
                 <a:cs typeface="Arial" pitchFamily="34" charset="-120"/>
               </a:rPr>
-              <a:t>So the believer’s tests are no longer probation to earn a standing. They are the proving and refining of a faith that already rests on His finished work.</a:t>
-            </a:r>
-            <a:endParaRPr lang="en-US" sz="1600" dirty="0"/>
-          </a:p>
-        </p:txBody>
-      </p:sp>
-      <p:sp>
-        <p:nvSpPr>
-          <p:cNvPr id="5" name="e2"/>
+              <a:t>The exodus order settles it (again):
+</a:t>
+            </a:r>
+            <a:r>
+              <a:rPr lang="en-US" dirty="0">
+                <a:solidFill>
+                  <a:srgbClr val="000000"/>
+                </a:solidFill>
+                <a:latin typeface="Arial" pitchFamily="34" charset="0"/>
+                <a:ea typeface="Arial" pitchFamily="34" charset="-122"/>
+                <a:cs typeface="Arial" pitchFamily="34" charset="-120"/>
+              </a:rPr>
+              <a:t>God redeemed Israel from Egypt by blood → </a:t>
+            </a:r>
+            <a:r>
+              <a:rPr lang="en-US" b="1" i="1" dirty="0">
+                <a:solidFill>
+                  <a:srgbClr val="B0413E"/>
+                </a:solidFill>
+                <a:latin typeface="Arial" pitchFamily="34" charset="0"/>
+                <a:ea typeface="Arial" pitchFamily="34" charset="-122"/>
+                <a:cs typeface="Arial" pitchFamily="34" charset="-120"/>
+              </a:rPr>
+              <a:t>and THEN</a:t>
+            </a:r>
+            <a:r>
+              <a:rPr lang="en-US" dirty="0">
+                <a:solidFill>
+                  <a:srgbClr val="000000"/>
+                </a:solidFill>
+                <a:latin typeface="Arial" pitchFamily="34" charset="0"/>
+                <a:ea typeface="Arial" pitchFamily="34" charset="-122"/>
+                <a:cs typeface="Arial" pitchFamily="34" charset="-120"/>
+              </a:rPr>
+              <a:t> tested them in the wilderness (Deut 8:2). The tests came </a:t>
+            </a:r>
+            <a:r>
+              <a:rPr lang="en-US" b="1" dirty="0">
+                <a:solidFill>
+                  <a:srgbClr val="1F497D"/>
+                </a:solidFill>
+                <a:latin typeface="Arial" pitchFamily="34" charset="0"/>
+                <a:ea typeface="Arial" pitchFamily="34" charset="-122"/>
+                <a:cs typeface="Arial" pitchFamily="34" charset="-120"/>
+              </a:rPr>
+              <a:t>after</a:t>
+            </a:r>
+            <a:r>
+              <a:rPr lang="en-US" dirty="0">
+                <a:solidFill>
+                  <a:srgbClr val="000000"/>
+                </a:solidFill>
+                <a:latin typeface="Arial" pitchFamily="34" charset="0"/>
+                <a:ea typeface="Arial" pitchFamily="34" charset="-122"/>
+                <a:cs typeface="Arial" pitchFamily="34" charset="-120"/>
+              </a:rPr>
+              <a:t> the rescue, to prove and shape a people already free. They never bought the freedom.</a:t>
+            </a:r>
+            <a:endParaRPr lang="en-US" sz="2000" dirty="0"/>
+          </a:p>
+        </p:txBody>
+      </p:sp>
+      <p:sp>
+        <p:nvSpPr>
+          <p:cNvPr id="6" name="e3"/>
           <p:cNvSpPr txBox="1"/>
           <p:nvPr/>
         </p:nvSpPr>
         <p:spPr>
           <a:xfrm>
-            <a:off x="365760" y="2377440"/>
-            <a:ext cx="8412480" cy="1143000"/>
+            <a:off x="365760" y="3899916"/>
+            <a:ext cx="8412480" cy="1234440"/>
           </a:xfrm>
           <a:prstGeom prst="rect">
             <a:avLst/>
@@ -5165,11 +5777,11 @@
           <a:bodyPr wrap="square" lIns="0" tIns="0" rIns="0" bIns="0" rtlCol="0" anchor="t"/>
           <a:lstStyle/>
           <a:p>
-            <a:pPr algn="l" indent="0" marL="0">
+            <a:pPr marL="0" indent="0" algn="l">
               <a:buNone/>
             </a:pPr>
             <a:r>
-              <a:rPr lang="en-US" sz="1450" b="1" dirty="0">
+              <a:rPr lang="en-US" sz="2000" b="1" dirty="0">
                 <a:solidFill>
                   <a:srgbClr val="000000"/>
                 </a:solidFill>
@@ -5177,14 +5789,11 @@
                 <a:ea typeface="Arial" pitchFamily="34" charset="-122"/>
                 <a:cs typeface="Arial" pitchFamily="34" charset="-120"/>
               </a:rPr>
-              <a:t>The exodus order settles it (again):
+              <a:t>So, Scripture can call trials pure joy:
 </a:t>
             </a:r>
-            <a:pPr algn="l" indent="0" marL="0">
-              <a:buNone/>
-            </a:pPr>
-            <a:r>
-              <a:rPr lang="en-US" sz="1450" dirty="0">
+            <a:r>
+              <a:rPr lang="en-US" sz="2000" b="1" i="1" dirty="0">
                 <a:solidFill>
                   <a:srgbClr val="000000"/>
                 </a:solidFill>
@@ -5192,27 +5801,10 @@
                 <a:ea typeface="Arial" pitchFamily="34" charset="-122"/>
                 <a:cs typeface="Arial" pitchFamily="34" charset="-120"/>
               </a:rPr>
-              <a:t>God redeemed Israel from Egypt by blood — </a:t>
-            </a:r>
-            <a:pPr algn="l" indent="0" marL="0">
-              <a:buNone/>
-            </a:pPr>
-            <a:r>
-              <a:rPr lang="en-US" sz="1450" b="1" i="1" dirty="0">
-                <a:solidFill>
-                  <a:srgbClr val="B0413E"/>
-                </a:solidFill>
-                <a:latin typeface="Arial" pitchFamily="34" charset="0"/>
-                <a:ea typeface="Arial" pitchFamily="34" charset="-122"/>
-                <a:cs typeface="Arial" pitchFamily="34" charset="-120"/>
-              </a:rPr>
-              <a:t>and THEN</a:t>
-            </a:r>
-            <a:pPr algn="l" indent="0" marL="0">
-              <a:buNone/>
-            </a:pPr>
-            <a:r>
-              <a:rPr lang="en-US" sz="1450" dirty="0">
+              <a:t>“The testing of your faith produces endurance… that the proven character of your faith → more valuable than gold → may bring praise and glory when Jesus Christ is revealed.” </a:t>
+            </a:r>
+            <a:r>
+              <a:rPr lang="en-US" b="1" dirty="0">
                 <a:solidFill>
                   <a:srgbClr val="000000"/>
                 </a:solidFill>
@@ -5220,105 +5812,9 @@
                 <a:ea typeface="Arial" pitchFamily="34" charset="-122"/>
                 <a:cs typeface="Arial" pitchFamily="34" charset="-120"/>
               </a:rPr>
-              <a:t> tested them in the wilderness (Deut 8:2). The tests came </a:t>
-            </a:r>
-            <a:pPr algn="l" indent="0" marL="0">
-              <a:buNone/>
-            </a:pPr>
-            <a:r>
-              <a:rPr lang="en-US" sz="1450" b="1" dirty="0">
-                <a:solidFill>
-                  <a:srgbClr val="1F497D"/>
-                </a:solidFill>
-                <a:latin typeface="Arial" pitchFamily="34" charset="0"/>
-                <a:ea typeface="Arial" pitchFamily="34" charset="-122"/>
-                <a:cs typeface="Arial" pitchFamily="34" charset="-120"/>
-              </a:rPr>
-              <a:t>after</a:t>
-            </a:r>
-            <a:pPr algn="l" indent="0" marL="0">
-              <a:buNone/>
-            </a:pPr>
-            <a:r>
-              <a:rPr lang="en-US" sz="1450" dirty="0">
-                <a:solidFill>
-                  <a:srgbClr val="000000"/>
-                </a:solidFill>
-                <a:latin typeface="Arial" pitchFamily="34" charset="0"/>
-                <a:ea typeface="Arial" pitchFamily="34" charset="-122"/>
-                <a:cs typeface="Arial" pitchFamily="34" charset="-120"/>
-              </a:rPr>
-              <a:t> the rescue, to prove and shape a people already free. They never bought the freedom.</a:t>
-            </a:r>
-            <a:endParaRPr lang="en-US" sz="1600" dirty="0"/>
-          </a:p>
-        </p:txBody>
-      </p:sp>
-      <p:sp>
-        <p:nvSpPr>
-          <p:cNvPr id="6" name="e3"/>
-          <p:cNvSpPr txBox="1"/>
-          <p:nvPr/>
-        </p:nvSpPr>
-        <p:spPr>
-          <a:xfrm>
-            <a:off x="365760" y="3611880"/>
-            <a:ext cx="8412480" cy="1234440"/>
-          </a:xfrm>
-          <a:prstGeom prst="rect">
-            <a:avLst/>
-          </a:prstGeom>
-          <a:noFill/>
-          <a:ln/>
-        </p:spPr>
-        <p:txBody>
-          <a:bodyPr wrap="square" lIns="0" tIns="0" rIns="0" bIns="0" rtlCol="0" anchor="t"/>
-          <a:lstStyle/>
-          <a:p>
-            <a:pPr algn="l" indent="0" marL="0">
-              <a:buNone/>
-            </a:pPr>
-            <a:r>
-              <a:rPr lang="en-US" sz="1400" b="1" dirty="0">
-                <a:solidFill>
-                  <a:srgbClr val="000000"/>
-                </a:solidFill>
-                <a:latin typeface="Arial" pitchFamily="34" charset="0"/>
-                <a:ea typeface="Arial" pitchFamily="34" charset="-122"/>
-                <a:cs typeface="Arial" pitchFamily="34" charset="-120"/>
-              </a:rPr>
-              <a:t>So Scripture can call trials pure joy:
-</a:t>
-            </a:r>
-            <a:pPr algn="l" indent="0" marL="0">
-              <a:buNone/>
-            </a:pPr>
-            <a:r>
-              <a:rPr lang="en-US" sz="1400" b="1" i="1" dirty="0">
-                <a:solidFill>
-                  <a:srgbClr val="000000"/>
-                </a:solidFill>
-                <a:latin typeface="Arial" pitchFamily="34" charset="0"/>
-                <a:ea typeface="Arial" pitchFamily="34" charset="-122"/>
-                <a:cs typeface="Arial" pitchFamily="34" charset="-120"/>
-              </a:rPr>
-              <a:t>“The testing of your faith produces endurance… that the proven character of your faith — more valuable than gold — may bring praise and glory when Jesus Christ is revealed.” </a:t>
-            </a:r>
-            <a:pPr algn="l" indent="0" marL="0">
-              <a:buNone/>
-            </a:pPr>
-            <a:r>
-              <a:rPr lang="en-US" sz="1300" b="1" dirty="0">
-                <a:solidFill>
-                  <a:srgbClr val="000000"/>
-                </a:solidFill>
-                <a:latin typeface="Arial" pitchFamily="34" charset="0"/>
-                <a:ea typeface="Arial" pitchFamily="34" charset="-122"/>
-                <a:cs typeface="Arial" pitchFamily="34" charset="-120"/>
-              </a:rPr>
               <a:t>(James 1:3; 1 Pet 1:7)</a:t>
             </a:r>
-            <a:endParaRPr lang="en-US" sz="1600" dirty="0"/>
+            <a:endParaRPr lang="en-US" sz="2400" dirty="0"/>
           </a:p>
         </p:txBody>
       </p:sp>
@@ -5330,7 +5826,7 @@
         </p:nvSpPr>
         <p:spPr>
           <a:xfrm>
-            <a:off x="1097280" y="5029200"/>
+            <a:off x="1097280" y="5513832"/>
             <a:ext cx="6949440" cy="777240"/>
           </a:xfrm>
           <a:prstGeom prst="roundRect">
@@ -5343,6 +5839,13 @@
           </a:solidFill>
           <a:ln/>
         </p:spPr>
+        <p:txBody>
+          <a:bodyPr/>
+          <a:lstStyle/>
+          <a:p>
+            <a:endParaRPr lang="en-US"/>
+          </a:p>
+        </p:txBody>
       </p:sp>
       <p:sp>
         <p:nvSpPr>
@@ -5352,7 +5855,7 @@
         </p:nvSpPr>
         <p:spPr>
           <a:xfrm>
-            <a:off x="1097280" y="5029200"/>
+            <a:off x="1097280" y="5513832"/>
             <a:ext cx="6949440" cy="777240"/>
           </a:xfrm>
           <a:prstGeom prst="rect">
@@ -5365,7 +5868,7 @@
           <a:bodyPr wrap="square" lIns="0" tIns="0" rIns="0" bIns="0" rtlCol="0" anchor="ctr"/>
           <a:lstStyle/>
           <a:p>
-            <a:pPr algn="ctr" indent="0" marL="0">
+            <a:pPr marL="0" indent="0" algn="ctr">
               <a:buNone/>
             </a:pPr>
             <a:r>
@@ -5377,7 +5880,29 @@
                 <a:ea typeface="Arial" pitchFamily="34" charset="-122"/>
                 <a:cs typeface="Arial" pitchFamily="34" charset="-120"/>
               </a:rPr>
-              <a:t>Grace saves.  Testing proves.  —  Mercy first, altar second.</a:t>
+              <a:t>Grace saves.  Testing proves.  </a:t>
+            </a:r>
+            <a:r>
+              <a:rPr lang="en-US" sz="1900" b="1">
+                <a:solidFill>
+                  <a:srgbClr val="FFFFFF"/>
+                </a:solidFill>
+                <a:latin typeface="Arial" pitchFamily="34" charset="0"/>
+                <a:ea typeface="Arial" pitchFamily="34" charset="-122"/>
+                <a:cs typeface="Arial" pitchFamily="34" charset="-120"/>
+              </a:rPr>
+              <a:t>→</a:t>
+            </a:r>
+            <a:r>
+              <a:rPr lang="en-US" sz="1900" b="1" dirty="0">
+                <a:solidFill>
+                  <a:srgbClr val="FFFFFF"/>
+                </a:solidFill>
+                <a:latin typeface="Arial" pitchFamily="34" charset="0"/>
+                <a:ea typeface="Arial" pitchFamily="34" charset="-122"/>
+                <a:cs typeface="Arial" pitchFamily="34" charset="-120"/>
+              </a:rPr>
+              <a:t>  Mercy first, altar second.</a:t>
             </a:r>
             <a:endParaRPr lang="en-US" sz="1600" dirty="0"/>
           </a:p>
@@ -5397,26 +5922,26 @@
               <p:cTn id="2" dur="indefinite" nodeType="mainSeq">
                 <p:childTnLst>
                   <p:par>
-                    <p:cTn id="7" fill="hold">
+                    <p:cTn id="3" fill="hold">
                       <p:stCondLst>
                         <p:cond delay="indefinite"/>
                       </p:stCondLst>
                       <p:childTnLst>
                         <p:par>
-                          <p:cTn id="8" fill="hold">
+                          <p:cTn id="4" fill="hold">
                             <p:stCondLst>
                               <p:cond delay="0"/>
                             </p:stCondLst>
                             <p:childTnLst>
                               <p:par>
-                                <p:cTn id="3" presetID="42" presetClass="entr" presetSubtype="0" fill="hold" grpId="0" nodeType="clickEffect">
+                                <p:cTn id="5" presetID="42" presetClass="entr" presetSubtype="0" fill="hold" nodeType="clickEffect">
                                   <p:stCondLst>
                                     <p:cond delay="0"/>
                                   </p:stCondLst>
                                   <p:childTnLst>
                                     <p:set>
                                       <p:cBhvr>
-                                        <p:cTn id="4" dur="1" fill="hold">
+                                        <p:cTn id="6" dur="1" fill="hold">
                                           <p:stCondLst>
                                             <p:cond delay="0"/>
                                           </p:stCondLst>
@@ -5434,7 +5959,7 @@
                                     </p:set>
                                     <p:animEffect transition="in" filter="fade">
                                       <p:cBhvr>
-                                        <p:cTn id="5" dur="1000"/>
+                                        <p:cTn id="7" dur="1000"/>
                                         <p:tgtEl>
                                           <p:spTgt spid="4"/>
                                         </p:tgtEl>
@@ -5442,7 +5967,7 @@
                                     </p:animEffect>
                                     <p:anim calcmode="lin" valueType="num">
                                       <p:cBhvr>
-                                        <p:cTn id="6" dur="1000" fill="hold"/>
+                                        <p:cTn id="8" dur="1000" fill="hold"/>
                                         <p:tgtEl>
                                           <p:spTgt spid="4"/>
                                         </p:tgtEl>
@@ -5473,26 +5998,26 @@
                     </p:cTn>
                   </p:par>
                   <p:par>
-                    <p:cTn id="13" fill="hold">
+                    <p:cTn id="9" fill="hold">
                       <p:stCondLst>
                         <p:cond delay="indefinite"/>
                       </p:stCondLst>
                       <p:childTnLst>
                         <p:par>
-                          <p:cTn id="14" fill="hold">
+                          <p:cTn id="10" fill="hold">
                             <p:stCondLst>
                               <p:cond delay="0"/>
                             </p:stCondLst>
                             <p:childTnLst>
                               <p:par>
-                                <p:cTn id="9" presetID="42" presetClass="entr" presetSubtype="0" fill="hold" grpId="0" nodeType="clickEffect">
+                                <p:cTn id="11" presetID="42" presetClass="entr" presetSubtype="0" fill="hold" nodeType="clickEffect">
                                   <p:stCondLst>
                                     <p:cond delay="0"/>
                                   </p:stCondLst>
                                   <p:childTnLst>
                                     <p:set>
                                       <p:cBhvr>
-                                        <p:cTn id="10" dur="1" fill="hold">
+                                        <p:cTn id="12" dur="1" fill="hold">
                                           <p:stCondLst>
                                             <p:cond delay="0"/>
                                           </p:stCondLst>
@@ -5510,7 +6035,7 @@
                                     </p:set>
                                     <p:animEffect transition="in" filter="fade">
                                       <p:cBhvr>
-                                        <p:cTn id="11" dur="1000"/>
+                                        <p:cTn id="13" dur="1000"/>
                                         <p:tgtEl>
                                           <p:spTgt spid="5"/>
                                         </p:tgtEl>
@@ -5518,7 +6043,7 @@
                                     </p:animEffect>
                                     <p:anim calcmode="lin" valueType="num">
                                       <p:cBhvr>
-                                        <p:cTn id="12" dur="1000" fill="hold"/>
+                                        <p:cTn id="14" dur="1000" fill="hold"/>
                                         <p:tgtEl>
                                           <p:spTgt spid="5"/>
                                         </p:tgtEl>
@@ -5549,26 +6074,26 @@
                     </p:cTn>
                   </p:par>
                   <p:par>
-                    <p:cTn id="19" fill="hold">
+                    <p:cTn id="15" fill="hold">
                       <p:stCondLst>
                         <p:cond delay="indefinite"/>
                       </p:stCondLst>
                       <p:childTnLst>
                         <p:par>
-                          <p:cTn id="20" fill="hold">
+                          <p:cTn id="16" fill="hold">
                             <p:stCondLst>
                               <p:cond delay="0"/>
                             </p:stCondLst>
                             <p:childTnLst>
                               <p:par>
-                                <p:cTn id="15" presetID="42" presetClass="entr" presetSubtype="0" fill="hold" grpId="0" nodeType="clickEffect">
+                                <p:cTn id="17" presetID="42" presetClass="entr" presetSubtype="0" fill="hold" nodeType="clickEffect">
                                   <p:stCondLst>
                                     <p:cond delay="0"/>
                                   </p:stCondLst>
                                   <p:childTnLst>
                                     <p:set>
                                       <p:cBhvr>
-                                        <p:cTn id="16" dur="1" fill="hold">
+                                        <p:cTn id="18" dur="1" fill="hold">
                                           <p:stCondLst>
                                             <p:cond delay="0"/>
                                           </p:stCondLst>
@@ -5586,7 +6111,7 @@
                                     </p:set>
                                     <p:animEffect transition="in" filter="fade">
                                       <p:cBhvr>
-                                        <p:cTn id="17" dur="1000"/>
+                                        <p:cTn id="19" dur="1000"/>
                                         <p:tgtEl>
                                           <p:spTgt spid="6"/>
                                         </p:tgtEl>
@@ -5594,7 +6119,7 @@
                                     </p:animEffect>
                                     <p:anim calcmode="lin" valueType="num">
                                       <p:cBhvr>
-                                        <p:cTn id="18" dur="1000" fill="hold"/>
+                                        <p:cTn id="20" dur="1000" fill="hold"/>
                                         <p:tgtEl>
                                           <p:spTgt spid="6"/>
                                         </p:tgtEl>
@@ -5625,26 +6150,26 @@
                     </p:cTn>
                   </p:par>
                   <p:par>
-                    <p:cTn id="29" fill="hold">
+                    <p:cTn id="21" fill="hold">
                       <p:stCondLst>
                         <p:cond delay="indefinite"/>
                       </p:stCondLst>
                       <p:childTnLst>
                         <p:par>
-                          <p:cTn id="30" fill="hold">
+                          <p:cTn id="22" fill="hold">
                             <p:stCondLst>
                               <p:cond delay="0"/>
                             </p:stCondLst>
                             <p:childTnLst>
                               <p:par>
-                                <p:cTn id="21" presetID="42" presetClass="entr" presetSubtype="0" fill="hold" grpId="0" nodeType="clickEffect">
+                                <p:cTn id="23" presetID="42" presetClass="entr" presetSubtype="0" fill="hold" nodeType="clickEffect">
                                   <p:stCondLst>
                                     <p:cond delay="0"/>
                                   </p:stCondLst>
                                   <p:childTnLst>
                                     <p:set>
                                       <p:cBhvr>
-                                        <p:cTn id="22" dur="1" fill="hold">
+                                        <p:cTn id="24" dur="1" fill="hold">
                                           <p:stCondLst>
                                             <p:cond delay="0"/>
                                           </p:stCondLst>
@@ -5662,7 +6187,7 @@
                                     </p:set>
                                     <p:animEffect transition="in" filter="fade">
                                       <p:cBhvr>
-                                        <p:cTn id="23" dur="1000"/>
+                                        <p:cTn id="25" dur="1000"/>
                                         <p:tgtEl>
                                           <p:spTgt spid="7"/>
                                         </p:tgtEl>
@@ -5670,7 +6195,7 @@
                                     </p:animEffect>
                                     <p:anim calcmode="lin" valueType="num">
                                       <p:cBhvr>
-                                        <p:cTn id="24" dur="1000" fill="hold"/>
+                                        <p:cTn id="26" dur="1000" fill="hold"/>
                                         <p:tgtEl>
                                           <p:spTgt spid="7"/>
                                         </p:tgtEl>
@@ -5695,14 +6220,14 @@
                                 </p:cTn>
                               </p:par>
                               <p:par>
-                                <p:cTn id="25" presetID="42" presetClass="entr" presetSubtype="0" fill="hold" grpId="0" nodeType="withEffect">
+                                <p:cTn id="27" presetID="42" presetClass="entr" presetSubtype="0" fill="hold" nodeType="withEffect">
                                   <p:stCondLst>
                                     <p:cond delay="0"/>
                                   </p:stCondLst>
                                   <p:childTnLst>
                                     <p:set>
                                       <p:cBhvr>
-                                        <p:cTn id="26" dur="1" fill="hold">
+                                        <p:cTn id="28" dur="1" fill="hold">
                                           <p:stCondLst>
                                             <p:cond delay="0"/>
                                           </p:stCondLst>
@@ -5720,7 +6245,7 @@
                                     </p:set>
                                     <p:animEffect transition="in" filter="fade">
                                       <p:cBhvr>
-                                        <p:cTn id="27" dur="1000"/>
+                                        <p:cTn id="29" dur="1000"/>
                                         <p:tgtEl>
                                           <p:spTgt spid="8"/>
                                         </p:tgtEl>
@@ -5728,7 +6253,7 @@
                                     </p:animEffect>
                                     <p:anim calcmode="lin" valueType="num">
                                       <p:cBhvr>
-                                        <p:cTn id="28" dur="1000" fill="hold"/>
+                                        <p:cTn id="30" dur="1000" fill="hold"/>
                                         <p:tgtEl>
                                           <p:spTgt spid="8"/>
                                         </p:tgtEl>
@@ -5821,7 +6346,7 @@
           <a:bodyPr wrap="square" lIns="0" tIns="0" rIns="0" bIns="0" rtlCol="0" anchor="t"/>
           <a:lstStyle/>
           <a:p>
-            <a:pPr algn="l" indent="0" marL="0">
+            <a:pPr marL="0" indent="0" algn="l">
               <a:buNone/>
             </a:pPr>
             <a:r>
@@ -5860,11 +6385,11 @@
           <a:bodyPr wrap="square" lIns="0" tIns="0" rIns="0" bIns="0" rtlCol="0" anchor="t"/>
           <a:lstStyle/>
           <a:p>
-            <a:pPr algn="l" indent="0" marL="0">
+            <a:pPr marL="0" indent="0" algn="l">
               <a:buNone/>
             </a:pPr>
             <a:r>
-              <a:rPr lang="en-US" sz="1300" b="1" dirty="0">
+              <a:rPr lang="en-US" sz="2000" b="1" dirty="0">
                 <a:solidFill>
                   <a:srgbClr val="4F81BD"/>
                 </a:solidFill>
@@ -5872,9 +6397,9 @@
                 <a:ea typeface="Arial" pitchFamily="34" charset="-122"/>
                 <a:cs typeface="Arial" pitchFamily="34" charset="-120"/>
               </a:rPr>
-              <a:t>Ten minutes — this is the week’s practice</a:t>
-            </a:r>
-            <a:endParaRPr lang="en-US" sz="1600" dirty="0"/>
+              <a:t>Ten minutes → this is the week’s practice</a:t>
+            </a:r>
+            <a:endParaRPr lang="en-US" sz="2800" dirty="0"/>
           </a:p>
         </p:txBody>
       </p:sp>
@@ -5899,11 +6424,11 @@
           <a:bodyPr wrap="square" lIns="0" tIns="0" rIns="0" bIns="0" rtlCol="0" anchor="t"/>
           <a:lstStyle/>
           <a:p>
-            <a:pPr algn="l" indent="0" marL="0">
+            <a:pPr marL="0" indent="0" algn="l">
               <a:buNone/>
             </a:pPr>
             <a:r>
-              <a:rPr lang="en-US" sz="2000" b="1" dirty="0">
+              <a:rPr lang="en-US" sz="2800" b="1" dirty="0">
                 <a:solidFill>
                   <a:srgbClr val="1F497D"/>
                 </a:solidFill>
@@ -5913,11 +6438,58 @@
               </a:rPr>
               <a:t>1.  </a:t>
             </a:r>
-            <a:pPr algn="l" indent="0" marL="0">
+            <a:r>
+              <a:rPr lang="en-US" sz="2400" dirty="0">
+                <a:solidFill>
+                  <a:srgbClr val="000000"/>
+                </a:solidFill>
+                <a:latin typeface="Arial" pitchFamily="34" charset="0"/>
+                <a:ea typeface="Arial" pitchFamily="34" charset="-122"/>
+                <a:cs typeface="Arial" pitchFamily="34" charset="-120"/>
+              </a:rPr>
+              <a:t>Why does God test people He already knows completely?  If He knows the outcome, who is the test for?</a:t>
+            </a:r>
+            <a:endParaRPr lang="en-US" sz="2000" dirty="0"/>
+          </a:p>
+        </p:txBody>
+      </p:sp>
+      <p:sp>
+        <p:nvSpPr>
+          <p:cNvPr id="5" name="x2"/>
+          <p:cNvSpPr txBox="1"/>
+          <p:nvPr/>
+        </p:nvSpPr>
+        <p:spPr>
+          <a:xfrm>
+            <a:off x="457200" y="2971800"/>
+            <a:ext cx="8229600" cy="1463040"/>
+          </a:xfrm>
+          <a:prstGeom prst="rect">
+            <a:avLst/>
+          </a:prstGeom>
+          <a:noFill/>
+          <a:ln/>
+        </p:spPr>
+        <p:txBody>
+          <a:bodyPr wrap="square" lIns="0" tIns="0" rIns="0" bIns="0" rtlCol="0" anchor="t"/>
+          <a:lstStyle/>
+          <a:p>
+            <a:pPr marL="0" indent="0" algn="l">
               <a:buNone/>
             </a:pPr>
             <a:r>
-              <a:rPr lang="en-US" sz="1800" dirty="0">
+              <a:rPr lang="en-US" sz="2800" b="1" dirty="0">
+                <a:solidFill>
+                  <a:srgbClr val="1F497D"/>
+                </a:solidFill>
+                <a:latin typeface="Arial" pitchFamily="34" charset="0"/>
+                <a:ea typeface="Arial" pitchFamily="34" charset="-122"/>
+                <a:cs typeface="Arial" pitchFamily="34" charset="-120"/>
+              </a:rPr>
+              <a:t>2.  </a:t>
+            </a:r>
+            <a:r>
+              <a:rPr lang="en-US" sz="2400" dirty="0">
                 <a:solidFill>
                   <a:srgbClr val="000000"/>
                 </a:solidFill>
@@ -5925,22 +6497,44 @@
                 <a:ea typeface="Arial" pitchFamily="34" charset="-122"/>
                 <a:cs typeface="Arial" pitchFamily="34" charset="-120"/>
               </a:rPr>
-              <a:t>Why does God test people He already knows completely? If He knows the outcome, who is the test for?</a:t>
-            </a:r>
-            <a:endParaRPr lang="en-US" sz="1600" dirty="0"/>
-          </a:p>
-        </p:txBody>
-      </p:sp>
-      <p:sp>
-        <p:nvSpPr>
-          <p:cNvPr id="5" name="x2"/>
+              <a:t>Hezekiah was faithful for decades → what did being </a:t>
+            </a:r>
+            <a:r>
+              <a:rPr lang="en-US" sz="2400" i="1" dirty="0">
+                <a:solidFill>
+                  <a:srgbClr val="000000"/>
+                </a:solidFill>
+                <a:latin typeface="Arial" pitchFamily="34" charset="0"/>
+                <a:ea typeface="Arial" pitchFamily="34" charset="-122"/>
+                <a:cs typeface="Arial" pitchFamily="34" charset="-120"/>
+              </a:rPr>
+              <a:t>“left alone”</a:t>
+            </a:r>
+            <a:r>
+              <a:rPr lang="en-US" sz="2400" dirty="0">
+                <a:solidFill>
+                  <a:srgbClr val="000000"/>
+                </a:solidFill>
+                <a:latin typeface="Arial" pitchFamily="34" charset="0"/>
+                <a:ea typeface="Arial" pitchFamily="34" charset="-122"/>
+                <a:cs typeface="Arial" pitchFamily="34" charset="-120"/>
+              </a:rPr>
+              <a:t> reveal that forty good years had not?  What might God’s silence be testing in you?</a:t>
+            </a:r>
+            <a:endParaRPr lang="en-US" sz="2000" dirty="0"/>
+          </a:p>
+        </p:txBody>
+      </p:sp>
+      <p:sp>
+        <p:nvSpPr>
+          <p:cNvPr id="6" name="x3"/>
           <p:cNvSpPr txBox="1"/>
           <p:nvPr/>
         </p:nvSpPr>
         <p:spPr>
           <a:xfrm>
-            <a:off x="457200" y="2971800"/>
-            <a:ext cx="8229600" cy="1463040"/>
+            <a:off x="457200" y="4846320"/>
+            <a:ext cx="8229600" cy="1005840"/>
           </a:xfrm>
           <a:prstGeom prst="rect">
             <a:avLst/>
@@ -5952,64 +6546,22 @@
           <a:bodyPr wrap="square" lIns="0" tIns="0" rIns="0" bIns="0" rtlCol="0" anchor="t"/>
           <a:lstStyle/>
           <a:p>
-            <a:pPr algn="l" indent="0" marL="0">
+            <a:pPr marL="0" indent="0" algn="l">
               <a:buNone/>
             </a:pPr>
             <a:r>
               <a:rPr lang="en-US" sz="2000" b="1" dirty="0">
                 <a:solidFill>
-                  <a:srgbClr val="1F497D"/>
-                </a:solidFill>
-                <a:latin typeface="Arial" pitchFamily="34" charset="0"/>
-                <a:ea typeface="Arial" pitchFamily="34" charset="-122"/>
-                <a:cs typeface="Arial" pitchFamily="34" charset="-120"/>
-              </a:rPr>
-              <a:t>2.  </a:t>
-            </a:r>
-            <a:pPr algn="l" indent="0" marL="0">
-              <a:buNone/>
-            </a:pPr>
-            <a:r>
-              <a:rPr lang="en-US" sz="1800" dirty="0">
-                <a:solidFill>
                   <a:srgbClr val="000000"/>
                 </a:solidFill>
                 <a:latin typeface="Arial" pitchFamily="34" charset="0"/>
                 <a:ea typeface="Arial" pitchFamily="34" charset="-122"/>
                 <a:cs typeface="Arial" pitchFamily="34" charset="-120"/>
               </a:rPr>
-              <a:t>Hezekiah was faithful for decades — what did being “left alone” reveal that forty good years had not? What might God’s silence be testing in you?</a:t>
-            </a:r>
-            <a:endParaRPr lang="en-US" sz="1600" dirty="0"/>
-          </a:p>
-        </p:txBody>
-      </p:sp>
-      <p:sp>
-        <p:nvSpPr>
-          <p:cNvPr id="6" name="x3"/>
-          <p:cNvSpPr txBox="1"/>
-          <p:nvPr/>
-        </p:nvSpPr>
-        <p:spPr>
-          <a:xfrm>
-            <a:off x="457200" y="4846320"/>
-            <a:ext cx="8229600" cy="1005840"/>
-          </a:xfrm>
-          <a:prstGeom prst="rect">
-            <a:avLst/>
-          </a:prstGeom>
-          <a:noFill/>
-          <a:ln/>
-        </p:spPr>
-        <p:txBody>
-          <a:bodyPr wrap="square" lIns="0" tIns="0" rIns="0" bIns="0" rtlCol="0" anchor="t"/>
-          <a:lstStyle/>
-          <a:p>
-            <a:pPr algn="l" indent="0" marL="0">
-              <a:buNone/>
-            </a:pPr>
-            <a:r>
-              <a:rPr lang="en-US" sz="1400" b="1" dirty="0">
+              <a:t>Berean rule stands: </a:t>
+            </a:r>
+            <a:r>
+              <a:rPr lang="en-US" sz="2000" i="1" dirty="0">
                 <a:solidFill>
                   <a:srgbClr val="000000"/>
                 </a:solidFill>
@@ -6017,23 +6569,9 @@
                 <a:ea typeface="Arial" pitchFamily="34" charset="-122"/>
                 <a:cs typeface="Arial" pitchFamily="34" charset="-120"/>
               </a:rPr>
-              <a:t>Berean rule stands: </a:t>
-            </a:r>
-            <a:pPr algn="l" indent="0" marL="0">
-              <a:buNone/>
-            </a:pPr>
-            <a:r>
-              <a:rPr lang="en-US" sz="1400" i="1" dirty="0">
-                <a:solidFill>
-                  <a:srgbClr val="000000"/>
-                </a:solidFill>
-                <a:latin typeface="Arial" pitchFamily="34" charset="0"/>
-                <a:ea typeface="Arial" pitchFamily="34" charset="-122"/>
-                <a:cs typeface="Arial" pitchFamily="34" charset="-120"/>
-              </a:rPr>
-              <a:t>every claim goes back to the text — eager, and examining.</a:t>
-            </a:r>
-            <a:endParaRPr lang="en-US" sz="1600" dirty="0"/>
+              <a:t>every claim goes back to the text → eager, and examining.</a:t>
+            </a:r>
+            <a:endParaRPr lang="en-US" sz="2400" dirty="0"/>
           </a:p>
         </p:txBody>
       </p:sp>
@@ -6051,26 +6589,26 @@
               <p:cTn id="2" dur="indefinite" nodeType="mainSeq">
                 <p:childTnLst>
                   <p:par>
-                    <p:cTn id="7" fill="hold">
+                    <p:cTn id="3" fill="hold">
                       <p:stCondLst>
                         <p:cond delay="indefinite"/>
                       </p:stCondLst>
                       <p:childTnLst>
                         <p:par>
-                          <p:cTn id="8" fill="hold">
+                          <p:cTn id="4" fill="hold">
                             <p:stCondLst>
                               <p:cond delay="0"/>
                             </p:stCondLst>
                             <p:childTnLst>
                               <p:par>
-                                <p:cTn id="3" presetID="42" presetClass="entr" presetSubtype="0" fill="hold" grpId="0" nodeType="clickEffect">
+                                <p:cTn id="5" presetID="42" presetClass="entr" presetSubtype="0" fill="hold" nodeType="clickEffect">
                                   <p:stCondLst>
                                     <p:cond delay="0"/>
                                   </p:stCondLst>
                                   <p:childTnLst>
                                     <p:set>
                                       <p:cBhvr>
-                                        <p:cTn id="4" dur="1" fill="hold">
+                                        <p:cTn id="6" dur="1" fill="hold">
                                           <p:stCondLst>
                                             <p:cond delay="0"/>
                                           </p:stCondLst>
@@ -6088,7 +6626,7 @@
                                     </p:set>
                                     <p:animEffect transition="in" filter="fade">
                                       <p:cBhvr>
-                                        <p:cTn id="5" dur="1000"/>
+                                        <p:cTn id="7" dur="1000"/>
                                         <p:tgtEl>
                                           <p:spTgt spid="4"/>
                                         </p:tgtEl>
@@ -6096,7 +6634,7 @@
                                     </p:animEffect>
                                     <p:anim calcmode="lin" valueType="num">
                                       <p:cBhvr>
-                                        <p:cTn id="6" dur="1000" fill="hold"/>
+                                        <p:cTn id="8" dur="1000" fill="hold"/>
                                         <p:tgtEl>
                                           <p:spTgt spid="4"/>
                                         </p:tgtEl>
@@ -6127,26 +6665,26 @@
                     </p:cTn>
                   </p:par>
                   <p:par>
-                    <p:cTn id="13" fill="hold">
+                    <p:cTn id="9" fill="hold">
                       <p:stCondLst>
                         <p:cond delay="indefinite"/>
                       </p:stCondLst>
                       <p:childTnLst>
                         <p:par>
-                          <p:cTn id="14" fill="hold">
+                          <p:cTn id="10" fill="hold">
                             <p:stCondLst>
                               <p:cond delay="0"/>
                             </p:stCondLst>
                             <p:childTnLst>
                               <p:par>
-                                <p:cTn id="9" presetID="42" presetClass="entr" presetSubtype="0" fill="hold" grpId="0" nodeType="clickEffect">
+                                <p:cTn id="11" presetID="42" presetClass="entr" presetSubtype="0" fill="hold" nodeType="clickEffect">
                                   <p:stCondLst>
                                     <p:cond delay="0"/>
                                   </p:stCondLst>
                                   <p:childTnLst>
                                     <p:set>
                                       <p:cBhvr>
-                                        <p:cTn id="10" dur="1" fill="hold">
+                                        <p:cTn id="12" dur="1" fill="hold">
                                           <p:stCondLst>
                                             <p:cond delay="0"/>
                                           </p:stCondLst>
@@ -6164,7 +6702,7 @@
                                     </p:set>
                                     <p:animEffect transition="in" filter="fade">
                                       <p:cBhvr>
-                                        <p:cTn id="11" dur="1000"/>
+                                        <p:cTn id="13" dur="1000"/>
                                         <p:tgtEl>
                                           <p:spTgt spid="5"/>
                                         </p:tgtEl>
@@ -6172,7 +6710,7 @@
                                     </p:animEffect>
                                     <p:anim calcmode="lin" valueType="num">
                                       <p:cBhvr>
-                                        <p:cTn id="12" dur="1000" fill="hold"/>
+                                        <p:cTn id="14" dur="1000" fill="hold"/>
                                         <p:tgtEl>
                                           <p:spTgt spid="5"/>
                                         </p:tgtEl>
@@ -6203,26 +6741,26 @@
                     </p:cTn>
                   </p:par>
                   <p:par>
-                    <p:cTn id="19" fill="hold">
+                    <p:cTn id="15" fill="hold">
                       <p:stCondLst>
                         <p:cond delay="indefinite"/>
                       </p:stCondLst>
                       <p:childTnLst>
                         <p:par>
-                          <p:cTn id="20" fill="hold">
+                          <p:cTn id="16" fill="hold">
                             <p:stCondLst>
                               <p:cond delay="0"/>
                             </p:stCondLst>
                             <p:childTnLst>
                               <p:par>
-                                <p:cTn id="15" presetID="42" presetClass="entr" presetSubtype="0" fill="hold" grpId="0" nodeType="clickEffect">
+                                <p:cTn id="17" presetID="42" presetClass="entr" presetSubtype="0" fill="hold" nodeType="clickEffect">
                                   <p:stCondLst>
                                     <p:cond delay="0"/>
                                   </p:stCondLst>
                                   <p:childTnLst>
                                     <p:set>
                                       <p:cBhvr>
-                                        <p:cTn id="16" dur="1" fill="hold">
+                                        <p:cTn id="18" dur="1" fill="hold">
                                           <p:stCondLst>
                                             <p:cond delay="0"/>
                                           </p:stCondLst>
@@ -6240,7 +6778,7 @@
                                     </p:set>
                                     <p:animEffect transition="in" filter="fade">
                                       <p:cBhvr>
-                                        <p:cTn id="17" dur="1000"/>
+                                        <p:cTn id="19" dur="1000"/>
                                         <p:tgtEl>
                                           <p:spTgt spid="6"/>
                                         </p:tgtEl>
@@ -6248,7 +6786,7 @@
                                     </p:animEffect>
                                     <p:anim calcmode="lin" valueType="num">
                                       <p:cBhvr>
-                                        <p:cTn id="18" dur="1000" fill="hold"/>
+                                        <p:cTn id="20" dur="1000" fill="hold"/>
                                         <p:tgtEl>
                                           <p:spTgt spid="6"/>
                                         </p:tgtEl>
@@ -6341,7 +6879,7 @@
           <a:bodyPr wrap="square" lIns="0" tIns="0" rIns="0" bIns="0" rtlCol="0" anchor="t"/>
           <a:lstStyle/>
           <a:p>
-            <a:pPr algn="l" indent="0" marL="0">
+            <a:pPr marL="0" indent="0" algn="l">
               <a:buNone/>
             </a:pPr>
             <a:r>
@@ -6380,11 +6918,11 @@
           <a:bodyPr wrap="square" lIns="0" tIns="0" rIns="0" bIns="0" rtlCol="0" anchor="t"/>
           <a:lstStyle/>
           <a:p>
-            <a:pPr algn="l" indent="0" marL="0">
+            <a:pPr marL="0" indent="0" algn="l">
               <a:buNone/>
             </a:pPr>
             <a:r>
-              <a:rPr lang="en-US" sz="1300" b="1" dirty="0">
+              <a:rPr lang="en-US" sz="2000" b="1" dirty="0">
                 <a:solidFill>
                   <a:srgbClr val="4F81BD"/>
                 </a:solidFill>
@@ -6392,9 +6930,9 @@
                 <a:ea typeface="Arial" pitchFamily="34" charset="-122"/>
                 <a:cs typeface="Arial" pitchFamily="34" charset="-120"/>
               </a:rPr>
-              <a:t>For next week — eager, and examining</a:t>
-            </a:r>
-            <a:endParaRPr lang="en-US" sz="1600" dirty="0"/>
+              <a:t>For next week → eager, and examining</a:t>
+            </a:r>
+            <a:endParaRPr lang="en-US" sz="2800" dirty="0"/>
           </a:p>
         </p:txBody>
       </p:sp>
@@ -6419,11 +6957,11 @@
           <a:bodyPr wrap="square" lIns="0" tIns="0" rIns="0" bIns="0" rtlCol="0" anchor="t"/>
           <a:lstStyle/>
           <a:p>
-            <a:pPr algn="l" indent="0" marL="0">
+            <a:pPr marL="0" indent="0" algn="l">
               <a:buNone/>
             </a:pPr>
             <a:r>
-              <a:rPr lang="en-US" sz="1700" b="1" dirty="0">
+              <a:rPr lang="en-US" sz="2000" b="1" dirty="0">
                 <a:solidFill>
                   <a:srgbClr val="1F497D"/>
                 </a:solidFill>
@@ -6434,11 +6972,114 @@
               <a:t>For next week, read:
 </a:t>
             </a:r>
-            <a:pPr algn="l" indent="0" marL="0">
+            <a:r>
+              <a:rPr lang="en-US" dirty="0">
+                <a:solidFill>
+                  <a:srgbClr val="000000"/>
+                </a:solidFill>
+                <a:latin typeface="Arial" pitchFamily="34" charset="0"/>
+                <a:ea typeface="Arial" pitchFamily="34" charset="-122"/>
+                <a:cs typeface="Arial" pitchFamily="34" charset="-120"/>
+              </a:rPr>
+              <a:t>•  </a:t>
+            </a:r>
+            <a:r>
+              <a:rPr lang="en-US" b="1" dirty="0">
+                <a:solidFill>
+                  <a:srgbClr val="000000"/>
+                </a:solidFill>
+                <a:latin typeface="Arial" pitchFamily="34" charset="0"/>
+                <a:ea typeface="Arial" pitchFamily="34" charset="-122"/>
+                <a:cs typeface="Arial" pitchFamily="34" charset="-120"/>
+              </a:rPr>
+              <a:t>Acts 2:36–41  </a:t>
+            </a:r>
+            <a:r>
+              <a:rPr lang="en-US" dirty="0">
+                <a:solidFill>
+                  <a:srgbClr val="000000"/>
+                </a:solidFill>
+                <a:latin typeface="Arial" pitchFamily="34" charset="0"/>
+                <a:ea typeface="Arial" pitchFamily="34" charset="-122"/>
+                <a:cs typeface="Arial" pitchFamily="34" charset="-120"/>
+              </a:rPr>
+              <a:t>→ the crowd is “cut to the heart” and asks </a:t>
+            </a:r>
+            <a:r>
+              <a:rPr lang="en-US" i="1" dirty="0">
+                <a:solidFill>
+                  <a:srgbClr val="000000"/>
+                </a:solidFill>
+                <a:latin typeface="Arial" pitchFamily="34" charset="0"/>
+                <a:ea typeface="Arial" pitchFamily="34" charset="-122"/>
+                <a:cs typeface="Arial" pitchFamily="34" charset="-120"/>
+              </a:rPr>
+              <a:t>“what shall we do?” </a:t>
+            </a:r>
+            <a:r>
+              <a:rPr lang="en-US" dirty="0">
+                <a:solidFill>
+                  <a:srgbClr val="000000"/>
+                </a:solidFill>
+                <a:latin typeface="Arial" pitchFamily="34" charset="0"/>
+                <a:ea typeface="Arial" pitchFamily="34" charset="-122"/>
+                <a:cs typeface="Arial" pitchFamily="34" charset="-120"/>
+              </a:rPr>
+              <a:t>What answer are they given → and how do they respond?
+•  </a:t>
+            </a:r>
+            <a:r>
+              <a:rPr lang="en-US" b="1" dirty="0">
+                <a:solidFill>
+                  <a:srgbClr val="000000"/>
+                </a:solidFill>
+                <a:latin typeface="Arial" pitchFamily="34" charset="0"/>
+                <a:ea typeface="Arial" pitchFamily="34" charset="-122"/>
+                <a:cs typeface="Arial" pitchFamily="34" charset="-120"/>
+              </a:rPr>
+              <a:t>1 Corinthians 11:23–29  </a:t>
+            </a:r>
+            <a:r>
+              <a:rPr lang="en-US" dirty="0">
+                <a:solidFill>
+                  <a:srgbClr val="000000"/>
+                </a:solidFill>
+                <a:latin typeface="Arial" pitchFamily="34" charset="0"/>
+                <a:ea typeface="Arial" pitchFamily="34" charset="-122"/>
+                <a:cs typeface="Arial" pitchFamily="34" charset="-120"/>
+              </a:rPr>
+              <a:t>→ what does Paul command a person to do before eating? Find the word “examine.”</a:t>
+            </a:r>
+            <a:endParaRPr lang="en-US" sz="2000" dirty="0"/>
+          </a:p>
+        </p:txBody>
+      </p:sp>
+      <p:sp>
+        <p:nvSpPr>
+          <p:cNvPr id="5" name="z2"/>
+          <p:cNvSpPr txBox="1"/>
+          <p:nvPr/>
+        </p:nvSpPr>
+        <p:spPr>
+          <a:xfrm>
+            <a:off x="365760" y="2834640"/>
+            <a:ext cx="8412480" cy="914400"/>
+          </a:xfrm>
+          <a:prstGeom prst="rect">
+            <a:avLst/>
+          </a:prstGeom>
+          <a:noFill/>
+          <a:ln/>
+        </p:spPr>
+        <p:txBody>
+          <a:bodyPr wrap="square" lIns="0" tIns="0" rIns="0" bIns="0" rtlCol="0" anchor="t"/>
+          <a:lstStyle/>
+          <a:p>
+            <a:pPr marL="0" indent="0" algn="l">
               <a:buNone/>
             </a:pPr>
             <a:r>
-              <a:rPr lang="en-US" sz="1500" dirty="0">
+              <a:rPr lang="en-US" sz="2000" b="1" dirty="0">
                 <a:solidFill>
                   <a:srgbClr val="000000"/>
                 </a:solidFill>
@@ -6446,14 +7087,49 @@
                 <a:ea typeface="Arial" pitchFamily="34" charset="-122"/>
                 <a:cs typeface="Arial" pitchFamily="34" charset="-120"/>
               </a:rPr>
-              <a:t>•  Acts 2:36–41  — the crowd is “cut to the heart” and asks “what shall we do?” What answer are they given — and how do they respond?
-</a:t>
-            </a:r>
-            <a:pPr algn="l" indent="0" marL="0">
+              <a:t>Next week: </a:t>
+            </a:r>
+            <a:r>
+              <a:rPr lang="en-US" sz="2000" i="1" dirty="0">
+                <a:solidFill>
+                  <a:srgbClr val="000000"/>
+                </a:solidFill>
+                <a:latin typeface="Arial" pitchFamily="34" charset="0"/>
+                <a:ea typeface="Arial" pitchFamily="34" charset="-122"/>
+                <a:cs typeface="Arial" pitchFamily="34" charset="-120"/>
+              </a:rPr>
+              <a:t>The Church’s Tests → obeying the gospel and the table. The covenant pattern, now applied to us.</a:t>
+            </a:r>
+            <a:endParaRPr lang="en-US" sz="2000" dirty="0"/>
+          </a:p>
+        </p:txBody>
+      </p:sp>
+      <p:sp>
+        <p:nvSpPr>
+          <p:cNvPr id="6" name="z3"/>
+          <p:cNvSpPr txBox="1"/>
+          <p:nvPr/>
+        </p:nvSpPr>
+        <p:spPr>
+          <a:xfrm>
+            <a:off x="365760" y="3931920"/>
+            <a:ext cx="8412480" cy="1051560"/>
+          </a:xfrm>
+          <a:prstGeom prst="rect">
+            <a:avLst/>
+          </a:prstGeom>
+          <a:noFill/>
+          <a:ln/>
+        </p:spPr>
+        <p:txBody>
+          <a:bodyPr wrap="square" lIns="0" tIns="0" rIns="0" bIns="0" rtlCol="0" anchor="t"/>
+          <a:lstStyle/>
+          <a:p>
+            <a:pPr marL="0" indent="0" algn="l">
               <a:buNone/>
             </a:pPr>
             <a:r>
-              <a:rPr lang="en-US" sz="1500" dirty="0">
+              <a:rPr lang="en-US" b="1" dirty="0">
                 <a:solidFill>
                   <a:srgbClr val="000000"/>
                 </a:solidFill>
@@ -6461,22 +7137,34 @@
                 <a:ea typeface="Arial" pitchFamily="34" charset="-122"/>
                 <a:cs typeface="Arial" pitchFamily="34" charset="-120"/>
               </a:rPr>
-              <a:t>•  1 Corinthians 11:23–29  — what does Paul command a person to do before eating? Find the word “examine.”</a:t>
-            </a:r>
-            <a:endParaRPr lang="en-US" sz="1600" dirty="0"/>
-          </a:p>
-        </p:txBody>
-      </p:sp>
-      <p:sp>
-        <p:nvSpPr>
-          <p:cNvPr id="5" name="z2"/>
+              <a:t>This week in one sentence:
+</a:t>
+            </a:r>
+            <a:r>
+              <a:rPr lang="en-US" sz="2000" b="1" i="1" dirty="0">
+                <a:solidFill>
+                  <a:srgbClr val="1F497D"/>
+                </a:solidFill>
+                <a:latin typeface="Arial" pitchFamily="34" charset="0"/>
+                <a:ea typeface="Arial" pitchFamily="34" charset="-122"/>
+                <a:cs typeface="Arial" pitchFamily="34" charset="-120"/>
+              </a:rPr>
+              <a:t>Every covenant tests faith → and Christ passed the exam first. Grace saves; testing proves.</a:t>
+            </a:r>
+            <a:endParaRPr lang="en-US" sz="2000" dirty="0"/>
+          </a:p>
+        </p:txBody>
+      </p:sp>
+      <p:sp>
+        <p:nvSpPr>
+          <p:cNvPr id="7" name="z4"/>
           <p:cNvSpPr txBox="1"/>
           <p:nvPr/>
         </p:nvSpPr>
         <p:spPr>
           <a:xfrm>
-            <a:off x="365760" y="2834640"/>
-            <a:ext cx="8412480" cy="914400"/>
+            <a:off x="365760" y="5166360"/>
+            <a:ext cx="8412480" cy="822960"/>
           </a:xfrm>
           <a:prstGeom prst="rect">
             <a:avLst/>
@@ -6488,164 +7176,57 @@
           <a:bodyPr wrap="square" lIns="0" tIns="0" rIns="0" bIns="0" rtlCol="0" anchor="t"/>
           <a:lstStyle/>
           <a:p>
-            <a:pPr algn="l" indent="0" marL="0">
+            <a:pPr marL="0" indent="0" algn="ctr">
               <a:buNone/>
             </a:pPr>
             <a:r>
-              <a:rPr lang="en-US" sz="1600" b="1" dirty="0">
-                <a:solidFill>
-                  <a:srgbClr val="000000"/>
-                </a:solidFill>
-                <a:latin typeface="Arial" pitchFamily="34" charset="0"/>
-                <a:ea typeface="Arial" pitchFamily="34" charset="-122"/>
-                <a:cs typeface="Arial" pitchFamily="34" charset="-120"/>
-              </a:rPr>
-              <a:t>Next week: </a:t>
-            </a:r>
-            <a:pPr algn="l" indent="0" marL="0">
+              <a:rPr lang="en-US" sz="2000" b="1" i="1" dirty="0">
+                <a:solidFill>
+                  <a:srgbClr val="1F497D"/>
+                </a:solidFill>
+                <a:latin typeface="Arial" pitchFamily="34" charset="0"/>
+                <a:ea typeface="Arial" pitchFamily="34" charset="-122"/>
+                <a:cs typeface="Arial" pitchFamily="34" charset="-120"/>
+              </a:rPr>
+              <a:t>“by being perfected… he became the source of eternal salvation to all who obey him.”  (Hebrews 5:9)</a:t>
+            </a:r>
+            <a:endParaRPr lang="en-US" sz="2000" dirty="0"/>
+          </a:p>
+        </p:txBody>
+      </p:sp>
+      <p:sp>
+        <p:nvSpPr>
+          <p:cNvPr id="8" name="z5"/>
+          <p:cNvSpPr txBox="1"/>
+          <p:nvPr/>
+        </p:nvSpPr>
+        <p:spPr>
+          <a:xfrm>
+            <a:off x="365760" y="6035040"/>
+            <a:ext cx="8412480" cy="365760"/>
+          </a:xfrm>
+          <a:prstGeom prst="rect">
+            <a:avLst/>
+          </a:prstGeom>
+          <a:noFill/>
+          <a:ln/>
+        </p:spPr>
+        <p:txBody>
+          <a:bodyPr wrap="square" lIns="0" tIns="0" rIns="0" bIns="0" rtlCol="0" anchor="t"/>
+          <a:lstStyle/>
+          <a:p>
+            <a:pPr marL="0" indent="0" algn="ctr">
               <a:buNone/>
             </a:pPr>
             <a:r>
-              <a:rPr lang="en-US" sz="1600" i="1" dirty="0">
-                <a:solidFill>
-                  <a:srgbClr val="000000"/>
-                </a:solidFill>
-                <a:latin typeface="Arial" pitchFamily="34" charset="0"/>
-                <a:ea typeface="Arial" pitchFamily="34" charset="-122"/>
-                <a:cs typeface="Arial" pitchFamily="34" charset="-120"/>
-              </a:rPr>
-              <a:t>The Church’s Tests — obeying the gospel and the table. The covenant pattern, now applied to us.</a:t>
-            </a:r>
-            <a:endParaRPr lang="en-US" sz="1600" dirty="0"/>
-          </a:p>
-        </p:txBody>
-      </p:sp>
-      <p:sp>
-        <p:nvSpPr>
-          <p:cNvPr id="6" name="z3"/>
-          <p:cNvSpPr txBox="1"/>
-          <p:nvPr/>
-        </p:nvSpPr>
-        <p:spPr>
-          <a:xfrm>
-            <a:off x="365760" y="3977640"/>
-            <a:ext cx="8412480" cy="1051560"/>
-          </a:xfrm>
-          <a:prstGeom prst="rect">
-            <a:avLst/>
-          </a:prstGeom>
-          <a:noFill/>
-          <a:ln/>
-        </p:spPr>
-        <p:txBody>
-          <a:bodyPr wrap="square" lIns="0" tIns="0" rIns="0" bIns="0" rtlCol="0" anchor="t"/>
-          <a:lstStyle/>
-          <a:p>
-            <a:pPr algn="l" indent="0" marL="0">
-              <a:buNone/>
-            </a:pPr>
-            <a:r>
-              <a:rPr lang="en-US" sz="1500" b="1" dirty="0">
-                <a:solidFill>
-                  <a:srgbClr val="000000"/>
-                </a:solidFill>
-                <a:latin typeface="Arial" pitchFamily="34" charset="0"/>
-                <a:ea typeface="Arial" pitchFamily="34" charset="-122"/>
-                <a:cs typeface="Arial" pitchFamily="34" charset="-120"/>
-              </a:rPr>
-              <a:t>Carry this week in one sentence:
-</a:t>
-            </a:r>
-            <a:pPr algn="l" indent="0" marL="0">
-              <a:buNone/>
-            </a:pPr>
-            <a:r>
-              <a:rPr lang="en-US" sz="1650" b="1" i="1" dirty="0">
-                <a:solidFill>
-                  <a:srgbClr val="1F497D"/>
-                </a:solidFill>
-                <a:latin typeface="Arial" pitchFamily="34" charset="0"/>
-                <a:ea typeface="Arial" pitchFamily="34" charset="-122"/>
-                <a:cs typeface="Arial" pitchFamily="34" charset="-120"/>
-              </a:rPr>
-              <a:t>Every covenant tests faith — and Christ passed the exam first. Grace saves; testing proves.</a:t>
-            </a:r>
-            <a:endParaRPr lang="en-US" sz="1600" dirty="0"/>
-          </a:p>
-        </p:txBody>
-      </p:sp>
-      <p:sp>
-        <p:nvSpPr>
-          <p:cNvPr id="7" name="z4"/>
-          <p:cNvSpPr txBox="1"/>
-          <p:nvPr/>
-        </p:nvSpPr>
-        <p:spPr>
-          <a:xfrm>
-            <a:off x="365760" y="5166360"/>
-            <a:ext cx="8412480" cy="822960"/>
-          </a:xfrm>
-          <a:prstGeom prst="rect">
-            <a:avLst/>
-          </a:prstGeom>
-          <a:noFill/>
-          <a:ln/>
-        </p:spPr>
-        <p:txBody>
-          <a:bodyPr wrap="square" lIns="0" tIns="0" rIns="0" bIns="0" rtlCol="0" anchor="t"/>
-          <a:lstStyle/>
-          <a:p>
-            <a:pPr algn="ctr" indent="0" marL="0">
-              <a:buNone/>
-            </a:pPr>
-            <a:r>
-              <a:rPr lang="en-US" sz="1600" b="1" i="1" dirty="0">
-                <a:solidFill>
-                  <a:srgbClr val="1F497D"/>
-                </a:solidFill>
-                <a:latin typeface="Arial" pitchFamily="34" charset="0"/>
-                <a:ea typeface="Arial" pitchFamily="34" charset="-122"/>
-                <a:cs typeface="Arial" pitchFamily="34" charset="-120"/>
-              </a:rPr>
-              <a:t>“by being perfected… he became the source of eternal salvation to all who obey him.”  (Hebrews 5:9)</a:t>
-            </a:r>
-            <a:endParaRPr lang="en-US" sz="1600" dirty="0"/>
-          </a:p>
-        </p:txBody>
-      </p:sp>
-      <p:sp>
-        <p:nvSpPr>
-          <p:cNvPr id="8" name="z5"/>
-          <p:cNvSpPr txBox="1"/>
-          <p:nvPr/>
-        </p:nvSpPr>
-        <p:spPr>
-          <a:xfrm>
-            <a:off x="365760" y="6035040"/>
-            <a:ext cx="8412480" cy="365760"/>
-          </a:xfrm>
-          <a:prstGeom prst="rect">
-            <a:avLst/>
-          </a:prstGeom>
-          <a:noFill/>
-          <a:ln/>
-        </p:spPr>
-        <p:txBody>
-          <a:bodyPr wrap="square" lIns="0" tIns="0" rIns="0" bIns="0" rtlCol="0" anchor="t"/>
-          <a:lstStyle/>
-          <a:p>
-            <a:pPr algn="ctr" indent="0" marL="0">
-              <a:buNone/>
-            </a:pPr>
-            <a:r>
-              <a:rPr lang="en-US" sz="1300" b="1" u="sng" dirty="0">
+              <a:rPr lang="en-US" sz="2000" b="1" u="sng" dirty="0">
                 <a:solidFill>
                   <a:srgbClr val="4F81BD"/>
                 </a:solidFill>
                 <a:latin typeface="Arial" pitchFamily="34" charset="0"/>
                 <a:ea typeface="Arial" pitchFamily="34" charset="-122"/>
                 <a:cs typeface="Arial" pitchFamily="34" charset="-120"/>
-                <a:hlinkClick r:id="rId1" invalidUrl="" action="" tgtFrame="" tooltip="" history="1" highlightClick="0" endSnd="0">
+                <a:hlinkClick r:id="rId3">
                   <a:extLst>
                     <a:ext uri="{A12FA001-AC4F-418D-AE19-62706E023703}">
                       <ahyp:hlinkClr xmlns:ahyp="http://schemas.microsoft.com/office/drawing/2018/hyperlinkcolor" val="tx"/>
@@ -6653,9 +7234,38 @@
                   </a:extLst>
                 </a:hlinkClick>
               </a:rPr>
-              <a:t>https://tinyurl.com/TeachTheWord</a:t>
-            </a:r>
-            <a:endParaRPr lang="en-US" sz="1600" dirty="0"/>
+              <a:t>https://</a:t>
+            </a:r>
+            <a:r>
+              <a:rPr lang="en-US" sz="2000" b="1" u="sng" dirty="0" err="1">
+                <a:solidFill>
+                  <a:srgbClr val="4F81BD"/>
+                </a:solidFill>
+                <a:latin typeface="Arial" pitchFamily="34" charset="0"/>
+                <a:ea typeface="Arial" pitchFamily="34" charset="-122"/>
+                <a:cs typeface="Arial" pitchFamily="34" charset="-120"/>
+                <a:hlinkClick r:id="rId3">
+                  <a:extLst>
+                    <a:ext uri="{A12FA001-AC4F-418D-AE19-62706E023703}">
+                      <ahyp:hlinkClr xmlns:ahyp="http://schemas.microsoft.com/office/drawing/2018/hyperlinkcolor" val="tx"/>
+                    </a:ext>
+                  </a:extLst>
+                </a:hlinkClick>
+              </a:rPr>
+              <a:t>TeachTheWord</a:t>
+            </a:r>
+            <a:r>
+              <a:rPr lang="en-US" sz="2000" b="1" u="sng" dirty="0" err="1">
+                <a:solidFill>
+                  <a:srgbClr val="4F81BD"/>
+                </a:solidFill>
+                <a:latin typeface="Arial" pitchFamily="34" charset="0"/>
+                <a:ea typeface="Arial" pitchFamily="34" charset="-122"/>
+                <a:cs typeface="Arial" pitchFamily="34" charset="-120"/>
+              </a:rPr>
+              <a:t>.Church</a:t>
+            </a:r>
+            <a:endParaRPr lang="en-US" sz="2800" dirty="0"/>
           </a:p>
         </p:txBody>
       </p:sp>
@@ -6673,26 +7283,26 @@
               <p:cTn id="2" dur="indefinite" nodeType="mainSeq">
                 <p:childTnLst>
                   <p:par>
-                    <p:cTn id="7" fill="hold">
+                    <p:cTn id="3" fill="hold">
                       <p:stCondLst>
                         <p:cond delay="indefinite"/>
                       </p:stCondLst>
                       <p:childTnLst>
                         <p:par>
-                          <p:cTn id="8" fill="hold">
+                          <p:cTn id="4" fill="hold">
                             <p:stCondLst>
                               <p:cond delay="0"/>
                             </p:stCondLst>
                             <p:childTnLst>
                               <p:par>
-                                <p:cTn id="3" presetID="42" presetClass="entr" presetSubtype="0" fill="hold" grpId="0" nodeType="clickEffect">
+                                <p:cTn id="5" presetID="42" presetClass="entr" presetSubtype="0" fill="hold" nodeType="clickEffect">
                                   <p:stCondLst>
                                     <p:cond delay="0"/>
                                   </p:stCondLst>
                                   <p:childTnLst>
                                     <p:set>
                                       <p:cBhvr>
-                                        <p:cTn id="4" dur="1" fill="hold">
+                                        <p:cTn id="6" dur="1" fill="hold">
                                           <p:stCondLst>
                                             <p:cond delay="0"/>
                                           </p:stCondLst>
@@ -6710,7 +7320,7 @@
                                     </p:set>
                                     <p:animEffect transition="in" filter="fade">
                                       <p:cBhvr>
-                                        <p:cTn id="5" dur="1000"/>
+                                        <p:cTn id="7" dur="1000"/>
                                         <p:tgtEl>
                                           <p:spTgt spid="4"/>
                                         </p:tgtEl>
@@ -6718,7 +7328,7 @@
                                     </p:animEffect>
                                     <p:anim calcmode="lin" valueType="num">
                                       <p:cBhvr>
-                                        <p:cTn id="6" dur="1000" fill="hold"/>
+                                        <p:cTn id="8" dur="1000" fill="hold"/>
                                         <p:tgtEl>
                                           <p:spTgt spid="4"/>
                                         </p:tgtEl>
@@ -6749,26 +7359,26 @@
                     </p:cTn>
                   </p:par>
                   <p:par>
-                    <p:cTn id="13" fill="hold">
+                    <p:cTn id="9" fill="hold">
                       <p:stCondLst>
                         <p:cond delay="indefinite"/>
                       </p:stCondLst>
                       <p:childTnLst>
                         <p:par>
-                          <p:cTn id="14" fill="hold">
+                          <p:cTn id="10" fill="hold">
                             <p:stCondLst>
                               <p:cond delay="0"/>
                             </p:stCondLst>
                             <p:childTnLst>
                               <p:par>
-                                <p:cTn id="9" presetID="42" presetClass="entr" presetSubtype="0" fill="hold" grpId="0" nodeType="clickEffect">
+                                <p:cTn id="11" presetID="42" presetClass="entr" presetSubtype="0" fill="hold" nodeType="clickEffect">
                                   <p:stCondLst>
                                     <p:cond delay="0"/>
                                   </p:stCondLst>
                                   <p:childTnLst>
                                     <p:set>
                                       <p:cBhvr>
-                                        <p:cTn id="10" dur="1" fill="hold">
+                                        <p:cTn id="12" dur="1" fill="hold">
                                           <p:stCondLst>
                                             <p:cond delay="0"/>
                                           </p:stCondLst>
@@ -6786,7 +7396,7 @@
                                     </p:set>
                                     <p:animEffect transition="in" filter="fade">
                                       <p:cBhvr>
-                                        <p:cTn id="11" dur="1000"/>
+                                        <p:cTn id="13" dur="1000"/>
                                         <p:tgtEl>
                                           <p:spTgt spid="5"/>
                                         </p:tgtEl>
@@ -6794,7 +7404,7 @@
                                     </p:animEffect>
                                     <p:anim calcmode="lin" valueType="num">
                                       <p:cBhvr>
-                                        <p:cTn id="12" dur="1000" fill="hold"/>
+                                        <p:cTn id="14" dur="1000" fill="hold"/>
                                         <p:tgtEl>
                                           <p:spTgt spid="5"/>
                                         </p:tgtEl>
@@ -6825,26 +7435,26 @@
                     </p:cTn>
                   </p:par>
                   <p:par>
-                    <p:cTn id="19" fill="hold">
+                    <p:cTn id="15" fill="hold">
                       <p:stCondLst>
                         <p:cond delay="indefinite"/>
                       </p:stCondLst>
                       <p:childTnLst>
                         <p:par>
-                          <p:cTn id="20" fill="hold">
+                          <p:cTn id="16" fill="hold">
                             <p:stCondLst>
                               <p:cond delay="0"/>
                             </p:stCondLst>
                             <p:childTnLst>
                               <p:par>
-                                <p:cTn id="15" presetID="42" presetClass="entr" presetSubtype="0" fill="hold" grpId="0" nodeType="clickEffect">
+                                <p:cTn id="17" presetID="42" presetClass="entr" presetSubtype="0" fill="hold" nodeType="clickEffect">
                                   <p:stCondLst>
                                     <p:cond delay="0"/>
                                   </p:stCondLst>
                                   <p:childTnLst>
                                     <p:set>
                                       <p:cBhvr>
-                                        <p:cTn id="16" dur="1" fill="hold">
+                                        <p:cTn id="18" dur="1" fill="hold">
                                           <p:stCondLst>
                                             <p:cond delay="0"/>
                                           </p:stCondLst>
@@ -6862,7 +7472,7 @@
                                     </p:set>
                                     <p:animEffect transition="in" filter="fade">
                                       <p:cBhvr>
-                                        <p:cTn id="17" dur="1000"/>
+                                        <p:cTn id="19" dur="1000"/>
                                         <p:tgtEl>
                                           <p:spTgt spid="6"/>
                                         </p:tgtEl>
@@ -6870,7 +7480,7 @@
                                     </p:animEffect>
                                     <p:anim calcmode="lin" valueType="num">
                                       <p:cBhvr>
-                                        <p:cTn id="18" dur="1000" fill="hold"/>
+                                        <p:cTn id="20" dur="1000" fill="hold"/>
                                         <p:tgtEl>
                                           <p:spTgt spid="6"/>
                                         </p:tgtEl>
@@ -6901,26 +7511,26 @@
                     </p:cTn>
                   </p:par>
                   <p:par>
-                    <p:cTn id="25" fill="hold">
+                    <p:cTn id="21" fill="hold">
                       <p:stCondLst>
                         <p:cond delay="indefinite"/>
                       </p:stCondLst>
                       <p:childTnLst>
                         <p:par>
-                          <p:cTn id="26" fill="hold">
+                          <p:cTn id="22" fill="hold">
                             <p:stCondLst>
                               <p:cond delay="0"/>
                             </p:stCondLst>
                             <p:childTnLst>
                               <p:par>
-                                <p:cTn id="21" presetID="42" presetClass="entr" presetSubtype="0" fill="hold" grpId="0" nodeType="clickEffect">
+                                <p:cTn id="23" presetID="42" presetClass="entr" presetSubtype="0" fill="hold" nodeType="clickEffect">
                                   <p:stCondLst>
                                     <p:cond delay="0"/>
                                   </p:stCondLst>
                                   <p:childTnLst>
                                     <p:set>
                                       <p:cBhvr>
-                                        <p:cTn id="22" dur="1" fill="hold">
+                                        <p:cTn id="24" dur="1" fill="hold">
                                           <p:stCondLst>
                                             <p:cond delay="0"/>
                                           </p:stCondLst>
@@ -6938,7 +7548,7 @@
                                     </p:set>
                                     <p:animEffect transition="in" filter="fade">
                                       <p:cBhvr>
-                                        <p:cTn id="23" dur="1000"/>
+                                        <p:cTn id="25" dur="1000"/>
                                         <p:tgtEl>
                                           <p:spTgt spid="7"/>
                                         </p:tgtEl>
@@ -6946,7 +7556,7 @@
                                     </p:animEffect>
                                     <p:anim calcmode="lin" valueType="num">
                                       <p:cBhvr>
-                                        <p:cTn id="24" dur="1000" fill="hold"/>
+                                        <p:cTn id="26" dur="1000" fill="hold"/>
                                         <p:tgtEl>
                                           <p:spTgt spid="7"/>
                                         </p:tgtEl>
@@ -7294,4 +7904,319 @@
     </a:ext>
   </a:extLst>
 </a:theme>
+</file>
+
+<file path=ppt/theme/theme2.xml><?xml version="1.0" encoding="utf-8"?>
+<a:theme xmlns:a="http://schemas.openxmlformats.org/drawingml/2006/main" name="Office Theme">
+  <a:themeElements>
+    <a:clrScheme name="Office">
+      <a:dk1>
+        <a:sysClr val="windowText" lastClr="000000"/>
+      </a:dk1>
+      <a:lt1>
+        <a:sysClr val="window" lastClr="FFFFFF"/>
+      </a:lt1>
+      <a:dk2>
+        <a:srgbClr val="0E2841"/>
+      </a:dk2>
+      <a:lt2>
+        <a:srgbClr val="E8E8E8"/>
+      </a:lt2>
+      <a:accent1>
+        <a:srgbClr val="156082"/>
+      </a:accent1>
+      <a:accent2>
+        <a:srgbClr val="E97132"/>
+      </a:accent2>
+      <a:accent3>
+        <a:srgbClr val="196B24"/>
+      </a:accent3>
+      <a:accent4>
+        <a:srgbClr val="0F9ED5"/>
+      </a:accent4>
+      <a:accent5>
+        <a:srgbClr val="A02B93"/>
+      </a:accent5>
+      <a:accent6>
+        <a:srgbClr val="4EA72E"/>
+      </a:accent6>
+      <a:hlink>
+        <a:srgbClr val="467886"/>
+      </a:hlink>
+      <a:folHlink>
+        <a:srgbClr val="96607D"/>
+      </a:folHlink>
+    </a:clrScheme>
+    <a:fontScheme name="Office">
+      <a:majorFont>
+        <a:latin typeface="Aptos Display" panose="02110004020202020204"/>
+        <a:ea typeface=""/>
+        <a:cs typeface=""/>
+        <a:font script="Jpan" typeface="游ゴシック Light"/>
+        <a:font script="Hang" typeface="맑은 고딕"/>
+        <a:font script="Hans" typeface="等线 Light"/>
+        <a:font script="Hant" typeface="新細明體"/>
+        <a:font script="Arab" typeface="Times New Roman"/>
+        <a:font script="Hebr" typeface="Times New Roman"/>
+        <a:font script="Thai" typeface="Angsana New"/>
+        <a:font script="Ethi" typeface="Nyala"/>
+        <a:font script="Beng" typeface="Vrinda"/>
+        <a:font script="Gujr" typeface="Shruti"/>
+        <a:font script="Khmr" typeface="MoolBoran"/>
+        <a:font script="Knda" typeface="Tunga"/>
+        <a:font script="Guru" typeface="Raavi"/>
+        <a:font script="Cans" typeface="Euphemia"/>
+        <a:font script="Cher" typeface="Plantagenet Cherokee"/>
+        <a:font script="Yiii" typeface="Microsoft Yi Baiti"/>
+        <a:font script="Tibt" typeface="Microsoft Himalaya"/>
+        <a:font script="Thaa" typeface="MV Boli"/>
+        <a:font script="Deva" typeface="Mangal"/>
+        <a:font script="Telu" typeface="Gautami"/>
+        <a:font script="Taml" typeface="Latha"/>
+        <a:font script="Syrc" typeface="Estrangelo Edessa"/>
+        <a:font script="Orya" typeface="Kalinga"/>
+        <a:font script="Mlym" typeface="Kartika"/>
+        <a:font script="Laoo" typeface="DokChampa"/>
+        <a:font script="Sinh" typeface="Iskoola Pota"/>
+        <a:font script="Mong" typeface="Mongolian Baiti"/>
+        <a:font script="Viet" typeface="Times New Roman"/>
+        <a:font script="Uigh" typeface="Microsoft Uighur"/>
+        <a:font script="Geor" typeface="Sylfaen"/>
+        <a:font script="Armn" typeface="Arial"/>
+        <a:font script="Bugi" typeface="Leelawadee UI"/>
+        <a:font script="Bopo" typeface="Microsoft JhengHei"/>
+        <a:font script="Java" typeface="Javanese Text"/>
+        <a:font script="Lisu" typeface="Segoe UI"/>
+        <a:font script="Mymr" typeface="Myanmar Text"/>
+        <a:font script="Nkoo" typeface="Ebrima"/>
+        <a:font script="Olck" typeface="Nirmala UI"/>
+        <a:font script="Osma" typeface="Ebrima"/>
+        <a:font script="Phag" typeface="Phagspa"/>
+        <a:font script="Syrn" typeface="Estrangelo Edessa"/>
+        <a:font script="Syrj" typeface="Estrangelo Edessa"/>
+        <a:font script="Syre" typeface="Estrangelo Edessa"/>
+        <a:font script="Sora" typeface="Nirmala UI"/>
+        <a:font script="Tale" typeface="Microsoft Tai Le"/>
+        <a:font script="Talu" typeface="Microsoft New Tai Lue"/>
+        <a:font script="Tfng" typeface="Ebrima"/>
+      </a:majorFont>
+      <a:minorFont>
+        <a:latin typeface="Aptos" panose="02110004020202020204"/>
+        <a:ea typeface=""/>
+        <a:cs typeface=""/>
+        <a:font script="Jpan" typeface="游ゴシック"/>
+        <a:font script="Hang" typeface="맑은 고딕"/>
+        <a:font script="Hans" typeface="等线"/>
+        <a:font script="Hant" typeface="新細明體"/>
+        <a:font script="Arab" typeface="Arial"/>
+        <a:font script="Hebr" typeface="Arial"/>
+        <a:font script="Thai" typeface="Cordia New"/>
+        <a:font script="Ethi" typeface="Nyala"/>
+        <a:font script="Beng" typeface="Vrinda"/>
+        <a:font script="Gujr" typeface="Shruti"/>
+        <a:font script="Khmr" typeface="DaunPenh"/>
+        <a:font script="Knda" typeface="Tunga"/>
+        <a:font script="Guru" typeface="Raavi"/>
+        <a:font script="Cans" typeface="Euphemia"/>
+        <a:font script="Cher" typeface="Plantagenet Cherokee"/>
+        <a:font script="Yiii" typeface="Microsoft Yi Baiti"/>
+        <a:font script="Tibt" typeface="Microsoft Himalaya"/>
+        <a:font script="Thaa" typeface="MV Boli"/>
+        <a:font script="Deva" typeface="Mangal"/>
+        <a:font script="Telu" typeface="Gautami"/>
+        <a:font script="Taml" typeface="Latha"/>
+        <a:font script="Syrc" typeface="Estrangelo Edessa"/>
+        <a:font script="Orya" typeface="Kalinga"/>
+        <a:font script="Mlym" typeface="Kartika"/>
+        <a:font script="Laoo" typeface="DokChampa"/>
+        <a:font script="Sinh" typeface="Iskoola Pota"/>
+        <a:font script="Mong" typeface="Mongolian Baiti"/>
+        <a:font script="Viet" typeface="Arial"/>
+        <a:font script="Uigh" typeface="Microsoft Uighur"/>
+        <a:font script="Geor" typeface="Sylfaen"/>
+        <a:font script="Armn" typeface="Arial"/>
+        <a:font script="Bugi" typeface="Leelawadee UI"/>
+        <a:font script="Bopo" typeface="Microsoft JhengHei"/>
+        <a:font script="Java" typeface="Javanese Text"/>
+        <a:font script="Lisu" typeface="Segoe UI"/>
+        <a:font script="Mymr" typeface="Myanmar Text"/>
+        <a:font script="Nkoo" typeface="Ebrima"/>
+        <a:font script="Olck" typeface="Nirmala UI"/>
+        <a:font script="Osma" typeface="Ebrima"/>
+        <a:font script="Phag" typeface="Phagspa"/>
+        <a:font script="Syrn" typeface="Estrangelo Edessa"/>
+        <a:font script="Syrj" typeface="Estrangelo Edessa"/>
+        <a:font script="Syre" typeface="Estrangelo Edessa"/>
+        <a:font script="Sora" typeface="Nirmala UI"/>
+        <a:font script="Tale" typeface="Microsoft Tai Le"/>
+        <a:font script="Talu" typeface="Microsoft New Tai Lue"/>
+        <a:font script="Tfng" typeface="Ebrima"/>
+      </a:minorFont>
+    </a:fontScheme>
+    <a:fmtScheme name="Office">
+      <a:fillStyleLst>
+        <a:solidFill>
+          <a:schemeClr val="phClr"/>
+        </a:solidFill>
+        <a:gradFill rotWithShape="1">
+          <a:gsLst>
+            <a:gs pos="0">
+              <a:schemeClr val="phClr">
+                <a:lumMod val="110000"/>
+                <a:satMod val="105000"/>
+                <a:tint val="67000"/>
+              </a:schemeClr>
+            </a:gs>
+            <a:gs pos="50000">
+              <a:schemeClr val="phClr">
+                <a:lumMod val="105000"/>
+                <a:satMod val="103000"/>
+                <a:tint val="73000"/>
+              </a:schemeClr>
+            </a:gs>
+            <a:gs pos="100000">
+              <a:schemeClr val="phClr">
+                <a:lumMod val="105000"/>
+                <a:satMod val="109000"/>
+                <a:tint val="81000"/>
+              </a:schemeClr>
+            </a:gs>
+          </a:gsLst>
+          <a:lin ang="5400000" scaled="0"/>
+        </a:gradFill>
+        <a:gradFill rotWithShape="1">
+          <a:gsLst>
+            <a:gs pos="0">
+              <a:schemeClr val="phClr">
+                <a:satMod val="103000"/>
+                <a:lumMod val="102000"/>
+                <a:tint val="94000"/>
+              </a:schemeClr>
+            </a:gs>
+            <a:gs pos="50000">
+              <a:schemeClr val="phClr">
+                <a:satMod val="110000"/>
+                <a:lumMod val="100000"/>
+                <a:shade val="100000"/>
+              </a:schemeClr>
+            </a:gs>
+            <a:gs pos="100000">
+              <a:schemeClr val="phClr">
+                <a:lumMod val="99000"/>
+                <a:satMod val="120000"/>
+                <a:shade val="78000"/>
+              </a:schemeClr>
+            </a:gs>
+          </a:gsLst>
+          <a:lin ang="5400000" scaled="0"/>
+        </a:gradFill>
+      </a:fillStyleLst>
+      <a:lnStyleLst>
+        <a:ln w="12700" cap="flat" cmpd="sng" algn="ctr">
+          <a:solidFill>
+            <a:schemeClr val="phClr"/>
+          </a:solidFill>
+          <a:prstDash val="solid"/>
+          <a:miter lim="800000"/>
+        </a:ln>
+        <a:ln w="19050" cap="flat" cmpd="sng" algn="ctr">
+          <a:solidFill>
+            <a:schemeClr val="phClr"/>
+          </a:solidFill>
+          <a:prstDash val="solid"/>
+          <a:miter lim="800000"/>
+        </a:ln>
+        <a:ln w="25400" cap="flat" cmpd="sng" algn="ctr">
+          <a:solidFill>
+            <a:schemeClr val="phClr"/>
+          </a:solidFill>
+          <a:prstDash val="solid"/>
+          <a:miter lim="800000"/>
+        </a:ln>
+      </a:lnStyleLst>
+      <a:effectStyleLst>
+        <a:effectStyle>
+          <a:effectLst/>
+        </a:effectStyle>
+        <a:effectStyle>
+          <a:effectLst/>
+        </a:effectStyle>
+        <a:effectStyle>
+          <a:effectLst>
+            <a:outerShdw blurRad="57150" dist="19050" dir="5400000" algn="ctr" rotWithShape="0">
+              <a:srgbClr val="000000">
+                <a:alpha val="63000"/>
+              </a:srgbClr>
+            </a:outerShdw>
+          </a:effectLst>
+        </a:effectStyle>
+      </a:effectStyleLst>
+      <a:bgFillStyleLst>
+        <a:solidFill>
+          <a:schemeClr val="phClr"/>
+        </a:solidFill>
+        <a:solidFill>
+          <a:schemeClr val="phClr">
+            <a:tint val="95000"/>
+            <a:satMod val="170000"/>
+          </a:schemeClr>
+        </a:solidFill>
+        <a:gradFill rotWithShape="1">
+          <a:gsLst>
+            <a:gs pos="0">
+              <a:schemeClr val="phClr">
+                <a:tint val="93000"/>
+                <a:satMod val="150000"/>
+                <a:shade val="98000"/>
+                <a:lumMod val="102000"/>
+              </a:schemeClr>
+            </a:gs>
+            <a:gs pos="50000">
+              <a:schemeClr val="phClr">
+                <a:tint val="98000"/>
+                <a:satMod val="130000"/>
+                <a:shade val="90000"/>
+                <a:lumMod val="103000"/>
+              </a:schemeClr>
+            </a:gs>
+            <a:gs pos="100000">
+              <a:schemeClr val="phClr">
+                <a:shade val="63000"/>
+                <a:satMod val="120000"/>
+              </a:schemeClr>
+            </a:gs>
+          </a:gsLst>
+          <a:lin ang="5400000" scaled="0"/>
+        </a:gradFill>
+      </a:bgFillStyleLst>
+    </a:fmtScheme>
+  </a:themeElements>
+  <a:objectDefaults>
+    <a:lnDef>
+      <a:spPr/>
+      <a:bodyPr/>
+      <a:lstStyle/>
+      <a:style>
+        <a:lnRef idx="2">
+          <a:schemeClr val="accent1"/>
+        </a:lnRef>
+        <a:fillRef idx="0">
+          <a:schemeClr val="accent1"/>
+        </a:fillRef>
+        <a:effectRef idx="1">
+          <a:schemeClr val="accent1"/>
+        </a:effectRef>
+        <a:fontRef idx="minor">
+          <a:schemeClr val="tx1"/>
+        </a:fontRef>
+      </a:style>
+    </a:lnDef>
+  </a:objectDefaults>
+  <a:extraClrSchemeLst/>
+  <a:extLst>
+    <a:ext uri="{05A4C25C-085E-4340-85A3-A5531E510DB2}">
+      <thm15:themeFamily xmlns:thm15="http://schemas.microsoft.com/office/thememl/2012/main" name="Office Theme" id="{2E142A2C-CD16-42D6-873A-C26D2A0506FA}" vid="{1BDDFF52-6CD6-40A5-AB3C-68EB2F1E4D0A}"/>
+    </a:ext>
+  </a:extLst>
+</a:theme>
 </file>